--- a/engenharia-software/desenvolvimento-aplicacoes/pedro/Aula 10 - Programação Assincrona e Comunicação com API/Aula_Dart_Requisicoes_API.pptx
+++ b/engenharia-software/desenvolvimento-aplicacoes/pedro/Aula 10 - Programação Assincrona e Comunicação com API/Aula_Dart_Requisicoes_API.pptx
@@ -3155,7 +3155,7 @@
           </a:lstStyle>
           <a:p>
             <a:fld id="{F81AA659-8FD3-461F-8FBC-BDBF8F913D9D}" type="datetimeFigureOut">
-              <a:t>25/10/2026</a:t>
+              <a:t>26/10/2026</a:t>
             </a:fld>
             <a:endParaRPr/>
           </a:p>
@@ -11522,9 +11522,8 @@
                 <a:solidFill>
                   <a:srgbClr val="000000"/>
                 </a:solidFill>
-                <a:latin typeface="Inter"/>
-                <a:ea typeface="Inter"/>
-                <a:cs typeface="Inter"/>
+                <a:latin typeface="Times New Roman" panose="02020603050405020304" pitchFamily="18" charset="0"/>
+                <a:cs typeface="Times New Roman" panose="02020603050405020304" pitchFamily="18" charset="0"/>
               </a:rPr>
               <a:t>Requisições de API</a:t>
             </a:r>
@@ -11545,9 +11544,8 @@
                 <a:solidFill>
                   <a:srgbClr val="000000"/>
                 </a:solidFill>
-                <a:latin typeface="Inter"/>
-                <a:ea typeface="Inter"/>
-                <a:cs typeface="Inter"/>
+                <a:latin typeface="Times New Roman" panose="02020603050405020304" pitchFamily="18" charset="0"/>
+                <a:cs typeface="Times New Roman" panose="02020603050405020304" pitchFamily="18" charset="0"/>
               </a:rPr>
               <a:t>com Dart</a:t>
             </a:r>
@@ -11691,9 +11689,8 @@
                 <a:solidFill>
                   <a:srgbClr val="000000"/>
                 </a:solidFill>
-                <a:latin typeface="Inter"/>
-                <a:ea typeface="Inter"/>
-                <a:cs typeface="Inter"/>
+                <a:latin typeface="Times New Roman" panose="02020603050405020304" pitchFamily="18" charset="0"/>
+                <a:cs typeface="Times New Roman" panose="02020603050405020304" pitchFamily="18" charset="0"/>
               </a:rPr>
               <a:t>Prof. Esp. Pedro Miho</a:t>
             </a:r>
@@ -11884,15 +11881,54 @@
               </a:defRPr>
             </a:pPr>
             <a:r>
-              <a:rPr sz="2400" b="1">
+              <a:rPr sz="2400" b="1" dirty="0">
                 <a:solidFill>
                   <a:srgbClr val="000000"/>
                 </a:solidFill>
-                <a:latin typeface="Inter"/>
-                <a:ea typeface="Inter"/>
-                <a:cs typeface="Inter"/>
+                <a:latin typeface="Times New Roman" panose="02020603050405020304" pitchFamily="18" charset="0"/>
+                <a:cs typeface="Times New Roman" panose="02020603050405020304" pitchFamily="18" charset="0"/>
               </a:rPr>
-              <a:t>Na prática: interpretando o JSON</a:t>
+              <a:t>Na </a:t>
+            </a:r>
+            <a:r>
+              <a:rPr sz="2400" b="1" dirty="0" err="1">
+                <a:solidFill>
+                  <a:srgbClr val="000000"/>
+                </a:solidFill>
+                <a:latin typeface="Times New Roman" panose="02020603050405020304" pitchFamily="18" charset="0"/>
+                <a:cs typeface="Times New Roman" panose="02020603050405020304" pitchFamily="18" charset="0"/>
+              </a:rPr>
+              <a:t>prática</a:t>
+            </a:r>
+            <a:r>
+              <a:rPr sz="2400" b="1" dirty="0">
+                <a:solidFill>
+                  <a:srgbClr val="000000"/>
+                </a:solidFill>
+                <a:latin typeface="Times New Roman" panose="02020603050405020304" pitchFamily="18" charset="0"/>
+                <a:cs typeface="Times New Roman" panose="02020603050405020304" pitchFamily="18" charset="0"/>
+              </a:rPr>
+              <a:t>: </a:t>
+            </a:r>
+            <a:r>
+              <a:rPr sz="2400" b="1" dirty="0" err="1">
+                <a:solidFill>
+                  <a:srgbClr val="000000"/>
+                </a:solidFill>
+                <a:latin typeface="Times New Roman" panose="02020603050405020304" pitchFamily="18" charset="0"/>
+                <a:cs typeface="Times New Roman" panose="02020603050405020304" pitchFamily="18" charset="0"/>
+              </a:rPr>
+              <a:t>interpretando</a:t>
+            </a:r>
+            <a:r>
+              <a:rPr sz="2400" b="1" dirty="0">
+                <a:solidFill>
+                  <a:srgbClr val="000000"/>
+                </a:solidFill>
+                <a:latin typeface="Times New Roman" panose="02020603050405020304" pitchFamily="18" charset="0"/>
+                <a:cs typeface="Times New Roman" panose="02020603050405020304" pitchFamily="18" charset="0"/>
+              </a:rPr>
+              <a:t> o JSON</a:t>
             </a:r>
           </a:p>
         </p:txBody>
@@ -12530,15 +12566,84 @@
               </a:defRPr>
             </a:pPr>
             <a:r>
-              <a:rPr sz="1725" b="0">
-                <a:solidFill>
-                  <a:srgbClr val="272525"/>
-                </a:solidFill>
-                <a:latin typeface="Inter"/>
-                <a:ea typeface="Inter"/>
-                <a:cs typeface="Inter"/>
+              <a:rPr sz="1725" b="0" dirty="0" err="1">
+                <a:solidFill>
+                  <a:srgbClr val="272525"/>
+                </a:solidFill>
+                <a:latin typeface="Times New Roman" panose="02020603050405020304" pitchFamily="18" charset="0"/>
+                <a:cs typeface="Times New Roman" panose="02020603050405020304" pitchFamily="18" charset="0"/>
               </a:rPr>
-              <a:t>response.body é String. Depois do decode, acessamos a lista.</a:t>
+              <a:t>response.body</a:t>
+            </a:r>
+            <a:r>
+              <a:rPr sz="1725" b="0" dirty="0">
+                <a:solidFill>
+                  <a:srgbClr val="272525"/>
+                </a:solidFill>
+                <a:latin typeface="Times New Roman" panose="02020603050405020304" pitchFamily="18" charset="0"/>
+                <a:cs typeface="Times New Roman" panose="02020603050405020304" pitchFamily="18" charset="0"/>
+              </a:rPr>
+              <a:t> é String. </a:t>
+            </a:r>
+            <a:r>
+              <a:rPr sz="1725" b="0" dirty="0" err="1">
+                <a:solidFill>
+                  <a:srgbClr val="272525"/>
+                </a:solidFill>
+                <a:latin typeface="Times New Roman" panose="02020603050405020304" pitchFamily="18" charset="0"/>
+                <a:cs typeface="Times New Roman" panose="02020603050405020304" pitchFamily="18" charset="0"/>
+              </a:rPr>
+              <a:t>Depois</a:t>
+            </a:r>
+            <a:r>
+              <a:rPr sz="1725" b="0" dirty="0">
+                <a:solidFill>
+                  <a:srgbClr val="272525"/>
+                </a:solidFill>
+                <a:latin typeface="Times New Roman" panose="02020603050405020304" pitchFamily="18" charset="0"/>
+                <a:cs typeface="Times New Roman" panose="02020603050405020304" pitchFamily="18" charset="0"/>
+              </a:rPr>
+              <a:t> do decode, </a:t>
+            </a:r>
+            <a:r>
+              <a:rPr sz="1725" b="0" dirty="0" err="1">
+                <a:solidFill>
+                  <a:srgbClr val="272525"/>
+                </a:solidFill>
+                <a:latin typeface="Times New Roman" panose="02020603050405020304" pitchFamily="18" charset="0"/>
+                <a:cs typeface="Times New Roman" panose="02020603050405020304" pitchFamily="18" charset="0"/>
+              </a:rPr>
+              <a:t>acessamos</a:t>
+            </a:r>
+            <a:r>
+              <a:rPr sz="1725" b="0" dirty="0">
+                <a:solidFill>
+                  <a:srgbClr val="272525"/>
+                </a:solidFill>
+                <a:latin typeface="Times New Roman" panose="02020603050405020304" pitchFamily="18" charset="0"/>
+                <a:cs typeface="Times New Roman" panose="02020603050405020304" pitchFamily="18" charset="0"/>
+              </a:rPr>
+              <a:t> a </a:t>
+            </a:r>
+            <a:r>
+              <a:rPr sz="1725" b="0" dirty="0" err="1">
+                <a:solidFill>
+                  <a:srgbClr val="272525"/>
+                </a:solidFill>
+                <a:latin typeface="Times New Roman" panose="02020603050405020304" pitchFamily="18" charset="0"/>
+                <a:cs typeface="Times New Roman" panose="02020603050405020304" pitchFamily="18" charset="0"/>
+              </a:rPr>
+              <a:t>lista</a:t>
+            </a:r>
+            <a:r>
+              <a:rPr sz="1725" b="0" dirty="0">
+                <a:solidFill>
+                  <a:srgbClr val="272525"/>
+                </a:solidFill>
+                <a:latin typeface="Times New Roman" panose="02020603050405020304" pitchFamily="18" charset="0"/>
+                <a:cs typeface="Times New Roman" panose="02020603050405020304" pitchFamily="18" charset="0"/>
+              </a:rPr>
+              <a:t>.</a:t>
             </a:r>
           </a:p>
         </p:txBody>
@@ -12716,26 +12821,68 @@
             </a:lvl9pPr>
           </a:lstStyle>
           <a:p>
-            <a:pPr>
-              <a:defRPr sz="2400" b="1">
-                <a:solidFill>
-                  <a:srgbClr val="000000"/>
-                </a:solidFill>
-                <a:latin typeface="Inter"/>
-                <a:ea typeface="Inter"/>
-                <a:cs typeface="Inter"/>
-              </a:defRPr>
-            </a:pPr>
-            <a:r>
-              <a:rPr sz="2400" b="1">
-                <a:solidFill>
-                  <a:srgbClr val="000000"/>
-                </a:solidFill>
-                <a:latin typeface="Inter"/>
-                <a:ea typeface="Inter"/>
-                <a:cs typeface="Inter"/>
+            <a:r>
+              <a:rPr dirty="0">
+                <a:latin typeface="Times New Roman" panose="02020603050405020304" pitchFamily="18" charset="0"/>
+                <a:cs typeface="Times New Roman" panose="02020603050405020304" pitchFamily="18" charset="0"/>
               </a:rPr>
-              <a:t>Lista e mapa: como os dados se organizam?</a:t>
+              <a:t>Lista e </a:t>
+            </a:r>
+            <a:r>
+              <a:rPr dirty="0" err="1">
+                <a:latin typeface="Times New Roman" panose="02020603050405020304" pitchFamily="18" charset="0"/>
+                <a:cs typeface="Times New Roman" panose="02020603050405020304" pitchFamily="18" charset="0"/>
+              </a:rPr>
+              <a:t>mapa</a:t>
+            </a:r>
+            <a:r>
+              <a:rPr dirty="0">
+                <a:latin typeface="Times New Roman" panose="02020603050405020304" pitchFamily="18" charset="0"/>
+                <a:cs typeface="Times New Roman" panose="02020603050405020304" pitchFamily="18" charset="0"/>
+              </a:rPr>
+              <a:t>: </a:t>
+            </a:r>
+            <a:r>
+              <a:rPr dirty="0" err="1">
+                <a:latin typeface="Times New Roman" panose="02020603050405020304" pitchFamily="18" charset="0"/>
+                <a:cs typeface="Times New Roman" panose="02020603050405020304" pitchFamily="18" charset="0"/>
+              </a:rPr>
+              <a:t>como</a:t>
+            </a:r>
+            <a:r>
+              <a:rPr dirty="0">
+                <a:latin typeface="Times New Roman" panose="02020603050405020304" pitchFamily="18" charset="0"/>
+                <a:cs typeface="Times New Roman" panose="02020603050405020304" pitchFamily="18" charset="0"/>
+              </a:rPr>
+              <a:t> </a:t>
+            </a:r>
+            <a:r>
+              <a:rPr dirty="0" err="1">
+                <a:latin typeface="Times New Roman" panose="02020603050405020304" pitchFamily="18" charset="0"/>
+                <a:cs typeface="Times New Roman" panose="02020603050405020304" pitchFamily="18" charset="0"/>
+              </a:rPr>
+              <a:t>os</a:t>
+            </a:r>
+            <a:r>
+              <a:rPr dirty="0">
+                <a:latin typeface="Times New Roman" panose="02020603050405020304" pitchFamily="18" charset="0"/>
+                <a:cs typeface="Times New Roman" panose="02020603050405020304" pitchFamily="18" charset="0"/>
+              </a:rPr>
+              <a:t> dados se </a:t>
+            </a:r>
+            <a:r>
+              <a:rPr dirty="0" err="1">
+                <a:latin typeface="Times New Roman" panose="02020603050405020304" pitchFamily="18" charset="0"/>
+                <a:cs typeface="Times New Roman" panose="02020603050405020304" pitchFamily="18" charset="0"/>
+              </a:rPr>
+              <a:t>organizam</a:t>
+            </a:r>
+            <a:r>
+              <a:rPr dirty="0">
+                <a:latin typeface="Times New Roman" panose="02020603050405020304" pitchFamily="18" charset="0"/>
+                <a:cs typeface="Times New Roman" panose="02020603050405020304" pitchFamily="18" charset="0"/>
+              </a:rPr>
+              <a:t>?</a:t>
             </a:r>
           </a:p>
         </p:txBody>
@@ -13035,7 +13182,7 @@
           </a:lstStyle>
           <a:p>
             <a:pPr>
-              <a:defRPr sz="2100" b="0">
+              <a:defRPr sz="1725" b="0">
                 <a:solidFill>
                   <a:srgbClr val="272525"/>
                 </a:solidFill>
@@ -13045,15 +13192,137 @@
               </a:defRPr>
             </a:pPr>
             <a:r>
-              <a:rPr sz="2100" b="0">
-                <a:solidFill>
-                  <a:srgbClr val="272525"/>
-                </a:solidFill>
-                <a:latin typeface="Inter"/>
-                <a:ea typeface="Inter"/>
-                <a:cs typeface="Inter"/>
+              <a:rPr sz="1800" dirty="0">
+                <a:latin typeface="Times New Roman" panose="02020603050405020304" pitchFamily="18" charset="0"/>
+                <a:cs typeface="Times New Roman" panose="02020603050405020304" pitchFamily="18" charset="0"/>
               </a:rPr>
-              <a:t>Uma lista guarda os filmes. Um mapa guarda os dados de cada filme.</a:t>
+              <a:t>Uma </a:t>
+            </a:r>
+            <a:r>
+              <a:rPr sz="1800" dirty="0" err="1">
+                <a:latin typeface="Times New Roman" panose="02020603050405020304" pitchFamily="18" charset="0"/>
+                <a:cs typeface="Times New Roman" panose="02020603050405020304" pitchFamily="18" charset="0"/>
+              </a:rPr>
+              <a:t>lista</a:t>
+            </a:r>
+            <a:r>
+              <a:rPr sz="1800" dirty="0">
+                <a:latin typeface="Times New Roman" panose="02020603050405020304" pitchFamily="18" charset="0"/>
+                <a:cs typeface="Times New Roman" panose="02020603050405020304" pitchFamily="18" charset="0"/>
+              </a:rPr>
+              <a:t> </a:t>
+            </a:r>
+            <a:r>
+              <a:rPr sz="1800" dirty="0" err="1">
+                <a:latin typeface="Times New Roman" panose="02020603050405020304" pitchFamily="18" charset="0"/>
+                <a:cs typeface="Times New Roman" panose="02020603050405020304" pitchFamily="18" charset="0"/>
+              </a:rPr>
+              <a:t>guarda</a:t>
+            </a:r>
+            <a:r>
+              <a:rPr sz="1800" dirty="0">
+                <a:latin typeface="Times New Roman" panose="02020603050405020304" pitchFamily="18" charset="0"/>
+                <a:cs typeface="Times New Roman" panose="02020603050405020304" pitchFamily="18" charset="0"/>
+              </a:rPr>
+              <a:t> </a:t>
+            </a:r>
+            <a:r>
+              <a:rPr sz="1800" dirty="0" err="1">
+                <a:latin typeface="Times New Roman" panose="02020603050405020304" pitchFamily="18" charset="0"/>
+                <a:cs typeface="Times New Roman" panose="02020603050405020304" pitchFamily="18" charset="0"/>
+              </a:rPr>
+              <a:t>os</a:t>
+            </a:r>
+            <a:r>
+              <a:rPr sz="1800" dirty="0">
+                <a:latin typeface="Times New Roman" panose="02020603050405020304" pitchFamily="18" charset="0"/>
+                <a:cs typeface="Times New Roman" panose="02020603050405020304" pitchFamily="18" charset="0"/>
+              </a:rPr>
+              <a:t> </a:t>
+            </a:r>
+            <a:r>
+              <a:rPr sz="1800" dirty="0" err="1">
+                <a:latin typeface="Times New Roman" panose="02020603050405020304" pitchFamily="18" charset="0"/>
+                <a:cs typeface="Times New Roman" panose="02020603050405020304" pitchFamily="18" charset="0"/>
+              </a:rPr>
+              <a:t>filmes</a:t>
+            </a:r>
+            <a:r>
+              <a:rPr sz="1800" dirty="0">
+                <a:latin typeface="Times New Roman" panose="02020603050405020304" pitchFamily="18" charset="0"/>
+                <a:cs typeface="Times New Roman" panose="02020603050405020304" pitchFamily="18" charset="0"/>
+              </a:rPr>
+              <a:t>. Um </a:t>
+            </a:r>
+            <a:r>
+              <a:rPr sz="1800" dirty="0" err="1">
+                <a:latin typeface="Times New Roman" panose="02020603050405020304" pitchFamily="18" charset="0"/>
+                <a:cs typeface="Times New Roman" panose="02020603050405020304" pitchFamily="18" charset="0"/>
+              </a:rPr>
+              <a:t>mapa</a:t>
+            </a:r>
+            <a:r>
+              <a:rPr sz="1800" dirty="0">
+                <a:latin typeface="Times New Roman" panose="02020603050405020304" pitchFamily="18" charset="0"/>
+                <a:cs typeface="Times New Roman" panose="02020603050405020304" pitchFamily="18" charset="0"/>
+              </a:rPr>
+              <a:t> </a:t>
+            </a:r>
+            <a:r>
+              <a:rPr sz="1800" dirty="0" err="1">
+                <a:latin typeface="Times New Roman" panose="02020603050405020304" pitchFamily="18" charset="0"/>
+                <a:cs typeface="Times New Roman" panose="02020603050405020304" pitchFamily="18" charset="0"/>
+              </a:rPr>
+              <a:t>guarda</a:t>
+            </a:r>
+            <a:r>
+              <a:rPr sz="1800" dirty="0">
+                <a:latin typeface="Times New Roman" panose="02020603050405020304" pitchFamily="18" charset="0"/>
+                <a:cs typeface="Times New Roman" panose="02020603050405020304" pitchFamily="18" charset="0"/>
+              </a:rPr>
+              <a:t> </a:t>
+            </a:r>
+            <a:r>
+              <a:rPr sz="1800" dirty="0" err="1">
+                <a:latin typeface="Times New Roman" panose="02020603050405020304" pitchFamily="18" charset="0"/>
+                <a:cs typeface="Times New Roman" panose="02020603050405020304" pitchFamily="18" charset="0"/>
+              </a:rPr>
+              <a:t>os</a:t>
+            </a:r>
+            <a:r>
+              <a:rPr sz="1800" dirty="0">
+                <a:latin typeface="Times New Roman" panose="02020603050405020304" pitchFamily="18" charset="0"/>
+                <a:cs typeface="Times New Roman" panose="02020603050405020304" pitchFamily="18" charset="0"/>
+              </a:rPr>
+              <a:t> dados de </a:t>
+            </a:r>
+            <a:r>
+              <a:rPr sz="1800" dirty="0" err="1">
+                <a:latin typeface="Times New Roman" panose="02020603050405020304" pitchFamily="18" charset="0"/>
+                <a:cs typeface="Times New Roman" panose="02020603050405020304" pitchFamily="18" charset="0"/>
+              </a:rPr>
+              <a:t>cada</a:t>
+            </a:r>
+            <a:r>
+              <a:rPr sz="1800" dirty="0">
+                <a:latin typeface="Times New Roman" panose="02020603050405020304" pitchFamily="18" charset="0"/>
+                <a:cs typeface="Times New Roman" panose="02020603050405020304" pitchFamily="18" charset="0"/>
+              </a:rPr>
+              <a:t> </a:t>
+            </a:r>
+            <a:r>
+              <a:rPr sz="1800" dirty="0" err="1">
+                <a:latin typeface="Times New Roman" panose="02020603050405020304" pitchFamily="18" charset="0"/>
+                <a:cs typeface="Times New Roman" panose="02020603050405020304" pitchFamily="18" charset="0"/>
+              </a:rPr>
+              <a:t>filme</a:t>
+            </a:r>
+            <a:r>
+              <a:rPr sz="1800" dirty="0">
+                <a:latin typeface="Times New Roman" panose="02020603050405020304" pitchFamily="18" charset="0"/>
+                <a:cs typeface="Times New Roman" panose="02020603050405020304" pitchFamily="18" charset="0"/>
+              </a:rPr>
+              <a:t>.</a:t>
             </a:r>
           </a:p>
         </p:txBody>
@@ -13512,15 +13781,102 @@
               </a:defRPr>
             </a:pPr>
             <a:r>
-              <a:rPr sz="1725" b="0">
-                <a:solidFill>
-                  <a:srgbClr val="272525"/>
-                </a:solidFill>
-                <a:latin typeface="Inter"/>
-                <a:ea typeface="Inter"/>
-                <a:cs typeface="Inter"/>
+              <a:rPr dirty="0" err="1">
+                <a:latin typeface="Times New Roman" panose="02020603050405020304" pitchFamily="18" charset="0"/>
+                <a:cs typeface="Times New Roman" panose="02020603050405020304" pitchFamily="18" charset="0"/>
               </a:rPr>
-              <a:t>listaFilmes[0] é o primeiro filme. ["titulo"] acessa uma chave.</a:t>
+              <a:t>listaFilmes</a:t>
+            </a:r>
+            <a:r>
+              <a:rPr dirty="0">
+                <a:latin typeface="Times New Roman" panose="02020603050405020304" pitchFamily="18" charset="0"/>
+                <a:cs typeface="Times New Roman" panose="02020603050405020304" pitchFamily="18" charset="0"/>
+              </a:rPr>
+              <a:t>[0] é o </a:t>
+            </a:r>
+            <a:r>
+              <a:rPr dirty="0" err="1">
+                <a:latin typeface="Times New Roman" panose="02020603050405020304" pitchFamily="18" charset="0"/>
+                <a:cs typeface="Times New Roman" panose="02020603050405020304" pitchFamily="18" charset="0"/>
+              </a:rPr>
+              <a:t>primeiro</a:t>
+            </a:r>
+            <a:r>
+              <a:rPr dirty="0">
+                <a:latin typeface="Times New Roman" panose="02020603050405020304" pitchFamily="18" charset="0"/>
+                <a:cs typeface="Times New Roman" panose="02020603050405020304" pitchFamily="18" charset="0"/>
+              </a:rPr>
+              <a:t> </a:t>
+            </a:r>
+            <a:r>
+              <a:rPr dirty="0" err="1">
+                <a:latin typeface="Times New Roman" panose="02020603050405020304" pitchFamily="18" charset="0"/>
+                <a:cs typeface="Times New Roman" panose="02020603050405020304" pitchFamily="18" charset="0"/>
+              </a:rPr>
+              <a:t>filme</a:t>
+            </a:r>
+            <a:r>
+              <a:rPr dirty="0">
+                <a:latin typeface="Times New Roman" panose="02020603050405020304" pitchFamily="18" charset="0"/>
+                <a:cs typeface="Times New Roman" panose="02020603050405020304" pitchFamily="18" charset="0"/>
+              </a:rPr>
+              <a:t>. ["</a:t>
+            </a:r>
+            <a:r>
+              <a:rPr dirty="0" err="1">
+                <a:latin typeface="Times New Roman" panose="02020603050405020304" pitchFamily="18" charset="0"/>
+                <a:cs typeface="Times New Roman" panose="02020603050405020304" pitchFamily="18" charset="0"/>
+              </a:rPr>
+              <a:t>titulo</a:t>
+            </a:r>
+            <a:r>
+              <a:rPr dirty="0">
+                <a:latin typeface="Times New Roman" panose="02020603050405020304" pitchFamily="18" charset="0"/>
+                <a:cs typeface="Times New Roman" panose="02020603050405020304" pitchFamily="18" charset="0"/>
+              </a:rPr>
+              <a:t>"] </a:t>
+            </a:r>
+            <a:r>
+              <a:rPr dirty="0" err="1">
+                <a:latin typeface="Times New Roman" panose="02020603050405020304" pitchFamily="18" charset="0"/>
+                <a:cs typeface="Times New Roman" panose="02020603050405020304" pitchFamily="18" charset="0"/>
+              </a:rPr>
+              <a:t>acessa</a:t>
+            </a:r>
+            <a:r>
+              <a:rPr dirty="0">
+                <a:latin typeface="Times New Roman" panose="02020603050405020304" pitchFamily="18" charset="0"/>
+                <a:cs typeface="Times New Roman" panose="02020603050405020304" pitchFamily="18" charset="0"/>
+              </a:rPr>
+              <a:t> </a:t>
+            </a:r>
+            <a:r>
+              <a:rPr dirty="0" err="1">
+                <a:latin typeface="Times New Roman" panose="02020603050405020304" pitchFamily="18" charset="0"/>
+                <a:cs typeface="Times New Roman" panose="02020603050405020304" pitchFamily="18" charset="0"/>
+              </a:rPr>
+              <a:t>uma</a:t>
+            </a:r>
+            <a:r>
+              <a:rPr dirty="0">
+                <a:latin typeface="Times New Roman" panose="02020603050405020304" pitchFamily="18" charset="0"/>
+                <a:cs typeface="Times New Roman" panose="02020603050405020304" pitchFamily="18" charset="0"/>
+              </a:rPr>
+              <a:t> </a:t>
+            </a:r>
+            <a:r>
+              <a:rPr dirty="0" err="1">
+                <a:latin typeface="Times New Roman" panose="02020603050405020304" pitchFamily="18" charset="0"/>
+                <a:cs typeface="Times New Roman" panose="02020603050405020304" pitchFamily="18" charset="0"/>
+              </a:rPr>
+              <a:t>chave</a:t>
+            </a:r>
+            <a:r>
+              <a:rPr dirty="0">
+                <a:latin typeface="Times New Roman" panose="02020603050405020304" pitchFamily="18" charset="0"/>
+                <a:cs typeface="Times New Roman" panose="02020603050405020304" pitchFamily="18" charset="0"/>
+              </a:rPr>
+              <a:t>.</a:t>
             </a:r>
           </a:p>
         </p:txBody>
@@ -13709,57 +14065,37 @@
               </a:defRPr>
             </a:pPr>
             <a:r>
-              <a:rPr sz="2400" b="1" dirty="0">
-                <a:solidFill>
-                  <a:srgbClr val="000000"/>
-                </a:solidFill>
-                <a:latin typeface="Inter"/>
-                <a:ea typeface="Inter"/>
-                <a:cs typeface="Inter"/>
+              <a:rPr dirty="0">
+                <a:latin typeface="Times New Roman" panose="02020603050405020304" pitchFamily="18" charset="0"/>
+                <a:cs typeface="Times New Roman" panose="02020603050405020304" pitchFamily="18" charset="0"/>
               </a:rPr>
               <a:t>5. A </a:t>
             </a:r>
             <a:r>
-              <a:rPr sz="2400" b="1" dirty="0" err="1">
-                <a:solidFill>
-                  <a:srgbClr val="000000"/>
-                </a:solidFill>
-                <a:latin typeface="Inter"/>
-                <a:ea typeface="Inter"/>
-                <a:cs typeface="Inter"/>
+              <a:rPr dirty="0" err="1">
+                <a:latin typeface="Times New Roman" panose="02020603050405020304" pitchFamily="18" charset="0"/>
+                <a:cs typeface="Times New Roman" panose="02020603050405020304" pitchFamily="18" charset="0"/>
               </a:rPr>
               <a:t>busca</a:t>
             </a:r>
             <a:r>
-              <a:rPr sz="2400" b="1" dirty="0">
-                <a:solidFill>
-                  <a:srgbClr val="000000"/>
-                </a:solidFill>
-                <a:latin typeface="Inter"/>
-                <a:ea typeface="Inter"/>
-                <a:cs typeface="Inter"/>
+              <a:rPr dirty="0">
+                <a:latin typeface="Times New Roman" panose="02020603050405020304" pitchFamily="18" charset="0"/>
+                <a:cs typeface="Times New Roman" panose="02020603050405020304" pitchFamily="18" charset="0"/>
               </a:rPr>
               <a:t> com </a:t>
             </a:r>
             <a:r>
-              <a:rPr sz="2400" b="1" dirty="0" err="1">
-                <a:solidFill>
-                  <a:srgbClr val="000000"/>
-                </a:solidFill>
-                <a:latin typeface="Inter"/>
-                <a:ea typeface="Inter"/>
-                <a:cs typeface="Inter"/>
+              <a:rPr dirty="0" err="1">
+                <a:latin typeface="Times New Roman" panose="02020603050405020304" pitchFamily="18" charset="0"/>
+                <a:cs typeface="Times New Roman" panose="02020603050405020304" pitchFamily="18" charset="0"/>
               </a:rPr>
               <a:t>firstWhere</a:t>
             </a:r>
             <a:r>
-              <a:rPr sz="2400" b="1" dirty="0">
-                <a:solidFill>
-                  <a:srgbClr val="000000"/>
-                </a:solidFill>
-                <a:latin typeface="Inter"/>
-                <a:ea typeface="Inter"/>
-                <a:cs typeface="Inter"/>
+              <a:rPr dirty="0">
+                <a:latin typeface="Times New Roman" panose="02020603050405020304" pitchFamily="18" charset="0"/>
+                <a:cs typeface="Times New Roman" panose="02020603050405020304" pitchFamily="18" charset="0"/>
               </a:rPr>
               <a:t>()</a:t>
             </a:r>
@@ -13916,9 +14252,8 @@
                 <a:solidFill>
                   <a:srgbClr val="043073"/>
                 </a:solidFill>
-                <a:latin typeface="Inter"/>
-                <a:ea typeface="Inter"/>
-                <a:cs typeface="Inter"/>
+                <a:latin typeface="Times New Roman" panose="02020603050405020304" pitchFamily="18" charset="0"/>
+                <a:cs typeface="Times New Roman" panose="02020603050405020304" pitchFamily="18" charset="0"/>
               </a:rPr>
               <a:t>12</a:t>
             </a:r>
@@ -14075,9 +14410,8 @@
                 <a:solidFill>
                   <a:srgbClr val="272525"/>
                 </a:solidFill>
-                <a:latin typeface="Inter"/>
-                <a:ea typeface="Inter"/>
-                <a:cs typeface="Inter"/>
+                <a:latin typeface="Times New Roman" panose="02020603050405020304" pitchFamily="18" charset="0"/>
+                <a:cs typeface="Times New Roman" panose="02020603050405020304" pitchFamily="18" charset="0"/>
               </a:rPr>
               <a:t>Retorna o primeiro item que atende a uma condição.</a:t>
             </a:r>
@@ -14120,7 +14454,10 @@
           <a:bodyPr/>
           <a:lstStyle/>
           <a:p>
-            <a:endParaRPr lang="pt-BR"/>
+            <a:endParaRPr lang="pt-BR">
+              <a:latin typeface="Times New Roman" panose="02020603050405020304" pitchFamily="18" charset="0"/>
+              <a:cs typeface="Times New Roman" panose="02020603050405020304" pitchFamily="18" charset="0"/>
+            </a:endParaRPr>
           </a:p>
         </p:txBody>
       </p:sp>
@@ -14274,9 +14611,8 @@
                 <a:solidFill>
                   <a:srgbClr val="043073"/>
                 </a:solidFill>
-                <a:latin typeface="Inter"/>
-                <a:ea typeface="Inter"/>
-                <a:cs typeface="Inter"/>
+                <a:latin typeface="Times New Roman" panose="02020603050405020304" pitchFamily="18" charset="0"/>
+                <a:cs typeface="Times New Roman" panose="02020603050405020304" pitchFamily="18" charset="0"/>
               </a:rPr>
               <a:t>Condição</a:t>
             </a:r>
@@ -14433,9 +14769,8 @@
                 <a:solidFill>
                   <a:srgbClr val="272525"/>
                 </a:solidFill>
-                <a:latin typeface="Inter"/>
-                <a:ea typeface="Inter"/>
-                <a:cs typeface="Inter"/>
+                <a:latin typeface="Times New Roman" panose="02020603050405020304" pitchFamily="18" charset="0"/>
+                <a:cs typeface="Times New Roman" panose="02020603050405020304" pitchFamily="18" charset="0"/>
               </a:rPr>
               <a:t>O título é igual a “Interestelar”?</a:t>
             </a:r>
@@ -14478,7 +14813,10 @@
           <a:bodyPr/>
           <a:lstStyle/>
           <a:p>
-            <a:endParaRPr lang="pt-BR"/>
+            <a:endParaRPr lang="pt-BR">
+              <a:latin typeface="Times New Roman" panose="02020603050405020304" pitchFamily="18" charset="0"/>
+              <a:cs typeface="Times New Roman" panose="02020603050405020304" pitchFamily="18" charset="0"/>
+            </a:endParaRPr>
           </a:p>
         </p:txBody>
       </p:sp>
@@ -14632,9 +14970,8 @@
                 <a:solidFill>
                   <a:srgbClr val="043073"/>
                 </a:solidFill>
-                <a:latin typeface="Inter"/>
-                <a:ea typeface="Inter"/>
-                <a:cs typeface="Inter"/>
+                <a:latin typeface="Times New Roman" panose="02020603050405020304" pitchFamily="18" charset="0"/>
+                <a:cs typeface="Times New Roman" panose="02020603050405020304" pitchFamily="18" charset="0"/>
               </a:rPr>
               <a:t>Resultado</a:t>
             </a:r>
@@ -14791,9 +15128,8 @@
                 <a:solidFill>
                   <a:srgbClr val="272525"/>
                 </a:solidFill>
-                <a:latin typeface="Inter"/>
-                <a:ea typeface="Inter"/>
-                <a:cs typeface="Inter"/>
+                <a:latin typeface="Times New Roman" panose="02020603050405020304" pitchFamily="18" charset="0"/>
+                <a:cs typeface="Times New Roman" panose="02020603050405020304" pitchFamily="18" charset="0"/>
               </a:rPr>
               <a:t>Um mapa com os dados do filme encontrado.</a:t>
             </a:r>
@@ -14836,7 +15172,10 @@
           <a:bodyPr/>
           <a:lstStyle/>
           <a:p>
-            <a:endParaRPr lang="pt-BR"/>
+            <a:endParaRPr lang="pt-BR">
+              <a:latin typeface="Times New Roman" panose="02020603050405020304" pitchFamily="18" charset="0"/>
+              <a:cs typeface="Times New Roman" panose="02020603050405020304" pitchFamily="18" charset="0"/>
+            </a:endParaRPr>
           </a:p>
         </p:txBody>
       </p:sp>
@@ -14986,15 +15325,98 @@
               </a:defRPr>
             </a:pPr>
             <a:r>
-              <a:rPr sz="1725" b="0">
-                <a:solidFill>
-                  <a:srgbClr val="272525"/>
-                </a:solidFill>
-                <a:latin typeface="Inter"/>
-                <a:ea typeface="Inter"/>
-                <a:cs typeface="Inter"/>
+              <a:rPr dirty="0">
+                <a:latin typeface="Times New Roman" panose="02020603050405020304" pitchFamily="18" charset="0"/>
+                <a:cs typeface="Times New Roman" panose="02020603050405020304" pitchFamily="18" charset="0"/>
               </a:rPr>
-              <a:t>Se nenhum item atender à condição, firstWhere() lança um erro.</a:t>
+              <a:t>Se </a:t>
+            </a:r>
+            <a:r>
+              <a:rPr dirty="0" err="1">
+                <a:latin typeface="Times New Roman" panose="02020603050405020304" pitchFamily="18" charset="0"/>
+                <a:cs typeface="Times New Roman" panose="02020603050405020304" pitchFamily="18" charset="0"/>
+              </a:rPr>
+              <a:t>nenhum</a:t>
+            </a:r>
+            <a:r>
+              <a:rPr dirty="0">
+                <a:latin typeface="Times New Roman" panose="02020603050405020304" pitchFamily="18" charset="0"/>
+                <a:cs typeface="Times New Roman" panose="02020603050405020304" pitchFamily="18" charset="0"/>
+              </a:rPr>
+              <a:t> item </a:t>
+            </a:r>
+            <a:r>
+              <a:rPr dirty="0" err="1">
+                <a:latin typeface="Times New Roman" panose="02020603050405020304" pitchFamily="18" charset="0"/>
+                <a:cs typeface="Times New Roman" panose="02020603050405020304" pitchFamily="18" charset="0"/>
+              </a:rPr>
+              <a:t>atender</a:t>
+            </a:r>
+            <a:r>
+              <a:rPr dirty="0">
+                <a:latin typeface="Times New Roman" panose="02020603050405020304" pitchFamily="18" charset="0"/>
+                <a:cs typeface="Times New Roman" panose="02020603050405020304" pitchFamily="18" charset="0"/>
+              </a:rPr>
+              <a:t> à </a:t>
+            </a:r>
+            <a:r>
+              <a:rPr dirty="0" err="1">
+                <a:latin typeface="Times New Roman" panose="02020603050405020304" pitchFamily="18" charset="0"/>
+                <a:cs typeface="Times New Roman" panose="02020603050405020304" pitchFamily="18" charset="0"/>
+              </a:rPr>
+              <a:t>condição</a:t>
+            </a:r>
+            <a:r>
+              <a:rPr dirty="0">
+                <a:latin typeface="Times New Roman" panose="02020603050405020304" pitchFamily="18" charset="0"/>
+                <a:cs typeface="Times New Roman" panose="02020603050405020304" pitchFamily="18" charset="0"/>
+              </a:rPr>
+              <a:t>, </a:t>
+            </a:r>
+            <a:r>
+              <a:rPr dirty="0" err="1">
+                <a:latin typeface="Times New Roman" panose="02020603050405020304" pitchFamily="18" charset="0"/>
+                <a:cs typeface="Times New Roman" panose="02020603050405020304" pitchFamily="18" charset="0"/>
+              </a:rPr>
+              <a:t>firstWhere</a:t>
+            </a:r>
+            <a:r>
+              <a:rPr dirty="0">
+                <a:latin typeface="Times New Roman" panose="02020603050405020304" pitchFamily="18" charset="0"/>
+                <a:cs typeface="Times New Roman" panose="02020603050405020304" pitchFamily="18" charset="0"/>
+              </a:rPr>
+              <a:t>() </a:t>
+            </a:r>
+            <a:r>
+              <a:rPr dirty="0" err="1">
+                <a:latin typeface="Times New Roman" panose="02020603050405020304" pitchFamily="18" charset="0"/>
+                <a:cs typeface="Times New Roman" panose="02020603050405020304" pitchFamily="18" charset="0"/>
+              </a:rPr>
+              <a:t>lança</a:t>
+            </a:r>
+            <a:r>
+              <a:rPr dirty="0">
+                <a:latin typeface="Times New Roman" panose="02020603050405020304" pitchFamily="18" charset="0"/>
+                <a:cs typeface="Times New Roman" panose="02020603050405020304" pitchFamily="18" charset="0"/>
+              </a:rPr>
+              <a:t> um </a:t>
+            </a:r>
+            <a:r>
+              <a:rPr dirty="0" err="1">
+                <a:latin typeface="Times New Roman" panose="02020603050405020304" pitchFamily="18" charset="0"/>
+                <a:cs typeface="Times New Roman" panose="02020603050405020304" pitchFamily="18" charset="0"/>
+              </a:rPr>
+              <a:t>erro</a:t>
+            </a:r>
+            <a:r>
+              <a:rPr sz="1725" b="0" dirty="0">
+                <a:solidFill>
+                  <a:srgbClr val="272525"/>
+                </a:solidFill>
+                <a:latin typeface="Times New Roman" panose="02020603050405020304" pitchFamily="18" charset="0"/>
+                <a:cs typeface="Times New Roman" panose="02020603050405020304" pitchFamily="18" charset="0"/>
+              </a:rPr>
+              <a:t>.</a:t>
             </a:r>
           </a:p>
         </p:txBody>
@@ -15183,16 +15605,51 @@
               </a:defRPr>
             </a:pPr>
             <a:r>
-              <a:rPr sz="2400" b="1">
-                <a:solidFill>
-                  <a:srgbClr val="000000"/>
-                </a:solidFill>
-                <a:latin typeface="Inter"/>
-                <a:ea typeface="Inter"/>
-                <a:cs typeface="Inter"/>
+              <a:rPr dirty="0">
+                <a:latin typeface="Times New Roman" panose="02020603050405020304" pitchFamily="18" charset="0"/>
+                <a:cs typeface="Times New Roman" panose="02020603050405020304" pitchFamily="18" charset="0"/>
               </a:rPr>
-              <a:t>Na prática: encontrando Interestelar</a:t>
-            </a:r>
+              <a:t>Na </a:t>
+            </a:r>
+            <a:r>
+              <a:rPr dirty="0" err="1">
+                <a:latin typeface="Times New Roman" panose="02020603050405020304" pitchFamily="18" charset="0"/>
+                <a:cs typeface="Times New Roman" panose="02020603050405020304" pitchFamily="18" charset="0"/>
+              </a:rPr>
+              <a:t>prática</a:t>
+            </a:r>
+            <a:r>
+              <a:rPr dirty="0">
+                <a:latin typeface="Times New Roman" panose="02020603050405020304" pitchFamily="18" charset="0"/>
+                <a:cs typeface="Times New Roman" panose="02020603050405020304" pitchFamily="18" charset="0"/>
+              </a:rPr>
+              <a:t>: </a:t>
+            </a:r>
+            <a:r>
+              <a:rPr dirty="0" err="1">
+                <a:latin typeface="Times New Roman" panose="02020603050405020304" pitchFamily="18" charset="0"/>
+                <a:cs typeface="Times New Roman" panose="02020603050405020304" pitchFamily="18" charset="0"/>
+              </a:rPr>
+              <a:t>encontrando</a:t>
+            </a:r>
+            <a:r>
+              <a:rPr dirty="0">
+                <a:latin typeface="Times New Roman" panose="02020603050405020304" pitchFamily="18" charset="0"/>
+                <a:cs typeface="Times New Roman" panose="02020603050405020304" pitchFamily="18" charset="0"/>
+              </a:rPr>
+              <a:t> </a:t>
+            </a:r>
+            <a:r>
+              <a:rPr dirty="0" err="1">
+                <a:latin typeface="Times New Roman" panose="02020603050405020304" pitchFamily="18" charset="0"/>
+                <a:cs typeface="Times New Roman" panose="02020603050405020304" pitchFamily="18" charset="0"/>
+              </a:rPr>
+              <a:t>Interestelar</a:t>
+            </a:r>
+            <a:endParaRPr dirty="0">
+              <a:latin typeface="Times New Roman" panose="02020603050405020304" pitchFamily="18" charset="0"/>
+              <a:cs typeface="Times New Roman" panose="02020603050405020304" pitchFamily="18" charset="0"/>
+            </a:endParaRPr>
           </a:p>
         </p:txBody>
       </p:sp>
@@ -15842,15 +16299,88 @@
               </a:defRPr>
             </a:pPr>
             <a:r>
-              <a:rPr sz="1725" b="0">
-                <a:solidFill>
-                  <a:srgbClr val="272525"/>
-                </a:solidFill>
-                <a:latin typeface="Inter"/>
-                <a:ea typeface="Inter"/>
-                <a:cs typeface="Inter"/>
+              <a:rPr dirty="0" err="1">
+                <a:latin typeface="Times New Roman" panose="02020603050405020304" pitchFamily="18" charset="0"/>
+                <a:cs typeface="Times New Roman" panose="02020603050405020304" pitchFamily="18" charset="0"/>
               </a:rPr>
-              <a:t>filme representa cada item analisado. No exemplo, a saída é 169.</a:t>
+              <a:t>filme</a:t>
+            </a:r>
+            <a:r>
+              <a:rPr dirty="0">
+                <a:latin typeface="Times New Roman" panose="02020603050405020304" pitchFamily="18" charset="0"/>
+                <a:cs typeface="Times New Roman" panose="02020603050405020304" pitchFamily="18" charset="0"/>
+              </a:rPr>
+              <a:t> </a:t>
+            </a:r>
+            <a:r>
+              <a:rPr dirty="0" err="1">
+                <a:latin typeface="Times New Roman" panose="02020603050405020304" pitchFamily="18" charset="0"/>
+                <a:cs typeface="Times New Roman" panose="02020603050405020304" pitchFamily="18" charset="0"/>
+              </a:rPr>
+              <a:t>representa</a:t>
+            </a:r>
+            <a:r>
+              <a:rPr dirty="0">
+                <a:latin typeface="Times New Roman" panose="02020603050405020304" pitchFamily="18" charset="0"/>
+                <a:cs typeface="Times New Roman" panose="02020603050405020304" pitchFamily="18" charset="0"/>
+              </a:rPr>
+              <a:t> </a:t>
+            </a:r>
+            <a:r>
+              <a:rPr dirty="0" err="1">
+                <a:latin typeface="Times New Roman" panose="02020603050405020304" pitchFamily="18" charset="0"/>
+                <a:cs typeface="Times New Roman" panose="02020603050405020304" pitchFamily="18" charset="0"/>
+              </a:rPr>
+              <a:t>cada</a:t>
+            </a:r>
+            <a:r>
+              <a:rPr dirty="0">
+                <a:latin typeface="Times New Roman" panose="02020603050405020304" pitchFamily="18" charset="0"/>
+                <a:cs typeface="Times New Roman" panose="02020603050405020304" pitchFamily="18" charset="0"/>
+              </a:rPr>
+              <a:t> item </a:t>
+            </a:r>
+            <a:r>
+              <a:rPr dirty="0" err="1">
+                <a:latin typeface="Times New Roman" panose="02020603050405020304" pitchFamily="18" charset="0"/>
+                <a:cs typeface="Times New Roman" panose="02020603050405020304" pitchFamily="18" charset="0"/>
+              </a:rPr>
+              <a:t>analisado</a:t>
+            </a:r>
+            <a:r>
+              <a:rPr dirty="0">
+                <a:latin typeface="Times New Roman" panose="02020603050405020304" pitchFamily="18" charset="0"/>
+                <a:cs typeface="Times New Roman" panose="02020603050405020304" pitchFamily="18" charset="0"/>
+              </a:rPr>
+              <a:t>. No </a:t>
+            </a:r>
+            <a:r>
+              <a:rPr dirty="0" err="1">
+                <a:latin typeface="Times New Roman" panose="02020603050405020304" pitchFamily="18" charset="0"/>
+                <a:cs typeface="Times New Roman" panose="02020603050405020304" pitchFamily="18" charset="0"/>
+              </a:rPr>
+              <a:t>exemplo</a:t>
+            </a:r>
+            <a:r>
+              <a:rPr dirty="0">
+                <a:latin typeface="Times New Roman" panose="02020603050405020304" pitchFamily="18" charset="0"/>
+                <a:cs typeface="Times New Roman" panose="02020603050405020304" pitchFamily="18" charset="0"/>
+              </a:rPr>
+              <a:t>, a </a:t>
+            </a:r>
+            <a:r>
+              <a:rPr dirty="0" err="1">
+                <a:latin typeface="Times New Roman" panose="02020603050405020304" pitchFamily="18" charset="0"/>
+                <a:cs typeface="Times New Roman" panose="02020603050405020304" pitchFamily="18" charset="0"/>
+              </a:rPr>
+              <a:t>saída</a:t>
+            </a:r>
+            <a:r>
+              <a:rPr dirty="0">
+                <a:latin typeface="Times New Roman" panose="02020603050405020304" pitchFamily="18" charset="0"/>
+                <a:cs typeface="Times New Roman" panose="02020603050405020304" pitchFamily="18" charset="0"/>
+              </a:rPr>
+              <a:t> é 169.</a:t>
             </a:r>
           </a:p>
         </p:txBody>
@@ -15964,6 +16494,8 @@
                 <a:solidFill>
                   <a:srgbClr val="043073"/>
                 </a:solidFill>
+                <a:latin typeface="Times New Roman" panose="02020603050405020304" pitchFamily="18" charset="0"/>
+                <a:cs typeface="Times New Roman" panose="02020603050405020304" pitchFamily="18" charset="0"/>
               </a:endParaRPr>
             </a:p>
           </p:txBody>
@@ -15999,6 +16531,8 @@
                   <a:solidFill>
                     <a:srgbClr val="043073"/>
                   </a:solidFill>
+                  <a:latin typeface="Times New Roman" panose="02020603050405020304" pitchFamily="18" charset="0"/>
+                  <a:cs typeface="Times New Roman" panose="02020603050405020304" pitchFamily="18" charset="0"/>
                   <a:sym typeface="Arial"/>
                 </a:rPr>
                 <a:t>Lavar os legumes</a:t>
@@ -16065,6 +16599,8 @@
                 <a:solidFill>
                   <a:srgbClr val="043073"/>
                 </a:solidFill>
+                <a:latin typeface="Times New Roman" panose="02020603050405020304" pitchFamily="18" charset="0"/>
+                <a:cs typeface="Times New Roman" panose="02020603050405020304" pitchFamily="18" charset="0"/>
               </a:endParaRPr>
             </a:p>
           </p:txBody>
@@ -16100,6 +16636,8 @@
                   <a:solidFill>
                     <a:srgbClr val="043073"/>
                   </a:solidFill>
+                  <a:latin typeface="Times New Roman" panose="02020603050405020304" pitchFamily="18" charset="0"/>
+                  <a:cs typeface="Times New Roman" panose="02020603050405020304" pitchFamily="18" charset="0"/>
                   <a:sym typeface="Arial"/>
                 </a:rPr>
                 <a:t>Cozinhar o ovo</a:t>
@@ -16166,6 +16704,8 @@
                 <a:solidFill>
                   <a:srgbClr val="043073"/>
                 </a:solidFill>
+                <a:latin typeface="Times New Roman" panose="02020603050405020304" pitchFamily="18" charset="0"/>
+                <a:cs typeface="Times New Roman" panose="02020603050405020304" pitchFamily="18" charset="0"/>
               </a:endParaRPr>
             </a:p>
           </p:txBody>
@@ -16201,6 +16741,8 @@
                   <a:solidFill>
                     <a:srgbClr val="043073"/>
                   </a:solidFill>
+                  <a:latin typeface="Times New Roman" panose="02020603050405020304" pitchFamily="18" charset="0"/>
+                  <a:cs typeface="Times New Roman" panose="02020603050405020304" pitchFamily="18" charset="0"/>
                   <a:sym typeface="Arial"/>
                 </a:rPr>
                 <a:t>Picar os legumes</a:t>
@@ -16267,6 +16809,8 @@
                 <a:solidFill>
                   <a:srgbClr val="043073"/>
                 </a:solidFill>
+                <a:latin typeface="Times New Roman" panose="02020603050405020304" pitchFamily="18" charset="0"/>
+                <a:cs typeface="Times New Roman" panose="02020603050405020304" pitchFamily="18" charset="0"/>
               </a:endParaRPr>
             </a:p>
           </p:txBody>
@@ -16302,6 +16846,8 @@
                   <a:solidFill>
                     <a:srgbClr val="043073"/>
                   </a:solidFill>
+                  <a:latin typeface="Times New Roman" panose="02020603050405020304" pitchFamily="18" charset="0"/>
+                  <a:cs typeface="Times New Roman" panose="02020603050405020304" pitchFamily="18" charset="0"/>
                   <a:sym typeface="Arial"/>
                 </a:rPr>
                 <a:t>Descascar o ovo</a:t>
@@ -16368,6 +16914,8 @@
                 <a:solidFill>
                   <a:srgbClr val="043073"/>
                 </a:solidFill>
+                <a:latin typeface="Times New Roman" panose="02020603050405020304" pitchFamily="18" charset="0"/>
+                <a:cs typeface="Times New Roman" panose="02020603050405020304" pitchFamily="18" charset="0"/>
               </a:endParaRPr>
             </a:p>
           </p:txBody>
@@ -16403,6 +16951,8 @@
                   <a:solidFill>
                     <a:srgbClr val="043073"/>
                   </a:solidFill>
+                  <a:latin typeface="Times New Roman" panose="02020603050405020304" pitchFamily="18" charset="0"/>
+                  <a:cs typeface="Times New Roman" panose="02020603050405020304" pitchFamily="18" charset="0"/>
                   <a:sym typeface="Arial"/>
                 </a:rPr>
                 <a:t>Montar a salada</a:t>
@@ -16560,9 +17110,8 @@
               <a:solidFill>
                 <a:srgbClr val="000000"/>
               </a:solidFill>
-              <a:latin typeface="Inter"/>
-              <a:ea typeface="Inter"/>
-              <a:cs typeface="Inter"/>
+              <a:latin typeface="Times New Roman" panose="02020603050405020304" pitchFamily="18" charset="0"/>
+              <a:cs typeface="Times New Roman" panose="02020603050405020304" pitchFamily="18" charset="0"/>
             </a:endParaRPr>
           </a:p>
         </p:txBody>
@@ -16713,38 +17262,29 @@
               </a:defRPr>
             </a:pPr>
             <a:r>
-              <a:rPr lang="pt-BR" sz="2400" b="1" dirty="0">
-                <a:solidFill>
-                  <a:srgbClr val="000000"/>
-                </a:solidFill>
-                <a:latin typeface="Inter"/>
-                <a:ea typeface="Inter"/>
-                <a:cs typeface="Inter"/>
+              <a:rPr lang="pt-BR" dirty="0">
+                <a:latin typeface="Times New Roman" panose="02020603050405020304" pitchFamily="18" charset="0"/>
+                <a:cs typeface="Times New Roman" panose="02020603050405020304" pitchFamily="18" charset="0"/>
               </a:rPr>
-              <a:t>Assi</a:t>
-            </a:r>
-            <a:r>
-              <a:rPr sz="2400" b="1" dirty="0" err="1">
-                <a:solidFill>
-                  <a:srgbClr val="000000"/>
-                </a:solidFill>
-                <a:latin typeface="Inter"/>
-                <a:ea typeface="Inter"/>
-                <a:cs typeface="Inter"/>
+              <a:t>6. Assi</a:t>
+            </a:r>
+            <a:r>
+              <a:rPr dirty="0" err="1">
+                <a:latin typeface="Times New Roman" panose="02020603050405020304" pitchFamily="18" charset="0"/>
+                <a:cs typeface="Times New Roman" panose="02020603050405020304" pitchFamily="18" charset="0"/>
               </a:rPr>
               <a:t>ncronismo</a:t>
             </a:r>
             <a:r>
-              <a:rPr lang="pt-BR" dirty="0"/>
+              <a:rPr lang="pt-BR" dirty="0">
+                <a:latin typeface="Times New Roman" panose="02020603050405020304" pitchFamily="18" charset="0"/>
+                <a:cs typeface="Times New Roman" panose="02020603050405020304" pitchFamily="18" charset="0"/>
+              </a:rPr>
               <a:t> x Sincronismo</a:t>
             </a:r>
-            <a:endParaRPr sz="2400" b="1" dirty="0">
-              <a:solidFill>
-                <a:srgbClr val="000000"/>
-              </a:solidFill>
-              <a:latin typeface="Inter"/>
-              <a:ea typeface="Inter"/>
-              <a:cs typeface="Inter"/>
+            <a:endParaRPr dirty="0">
+              <a:latin typeface="Times New Roman" panose="02020603050405020304" pitchFamily="18" charset="0"/>
+              <a:cs typeface="Times New Roman" panose="02020603050405020304" pitchFamily="18" charset="0"/>
             </a:endParaRPr>
           </a:p>
         </p:txBody>
@@ -16833,6 +17373,8 @@
               <a:solidFill>
                 <a:srgbClr val="043073"/>
               </a:solidFill>
+              <a:latin typeface="Times New Roman" panose="02020603050405020304" pitchFamily="18" charset="0"/>
+              <a:cs typeface="Times New Roman" panose="02020603050405020304" pitchFamily="18" charset="0"/>
             </a:endParaRPr>
           </a:p>
         </p:txBody>
@@ -16868,6 +17410,8 @@
                 <a:solidFill>
                   <a:srgbClr val="043073"/>
                 </a:solidFill>
+                <a:latin typeface="Times New Roman" panose="02020603050405020304" pitchFamily="18" charset="0"/>
+                <a:cs typeface="Times New Roman" panose="02020603050405020304" pitchFamily="18" charset="0"/>
                 <a:sym typeface="Arial"/>
               </a:rPr>
               <a:t>Cozinhar o ovo</a:t>
@@ -16934,6 +17478,8 @@
               <a:solidFill>
                 <a:srgbClr val="043073"/>
               </a:solidFill>
+              <a:latin typeface="Times New Roman" panose="02020603050405020304" pitchFamily="18" charset="0"/>
+              <a:cs typeface="Times New Roman" panose="02020603050405020304" pitchFamily="18" charset="0"/>
             </a:endParaRPr>
           </a:p>
         </p:txBody>
@@ -16969,6 +17515,8 @@
                 <a:solidFill>
                   <a:srgbClr val="043073"/>
                 </a:solidFill>
+                <a:latin typeface="Times New Roman" panose="02020603050405020304" pitchFamily="18" charset="0"/>
+                <a:cs typeface="Times New Roman" panose="02020603050405020304" pitchFamily="18" charset="0"/>
                 <a:sym typeface="Arial"/>
               </a:rPr>
               <a:t>Picar os legumes</a:t>
@@ -17007,6 +17555,8 @@
                 <a:solidFill>
                   <a:srgbClr val="043073"/>
                 </a:solidFill>
+                <a:latin typeface="Times New Roman" panose="02020603050405020304" pitchFamily="18" charset="0"/>
+                <a:cs typeface="Times New Roman" panose="02020603050405020304" pitchFamily="18" charset="0"/>
                 <a:sym typeface="Arial"/>
               </a:rPr>
               <a:t>THEN</a:t>
@@ -17093,6 +17643,8 @@
                 <a:solidFill>
                   <a:srgbClr val="043073"/>
                 </a:solidFill>
+                <a:latin typeface="Times New Roman" panose="02020603050405020304" pitchFamily="18" charset="0"/>
+                <a:cs typeface="Times New Roman" panose="02020603050405020304" pitchFamily="18" charset="0"/>
               </a:endParaRPr>
             </a:p>
           </p:txBody>
@@ -17128,6 +17680,8 @@
                   <a:solidFill>
                     <a:srgbClr val="043073"/>
                   </a:solidFill>
+                  <a:latin typeface="Times New Roman" panose="02020603050405020304" pitchFamily="18" charset="0"/>
+                  <a:cs typeface="Times New Roman" panose="02020603050405020304" pitchFamily="18" charset="0"/>
                   <a:sym typeface="Arial"/>
                 </a:rPr>
                 <a:t>Descascar</a:t>
@@ -17137,6 +17691,8 @@
                   <a:solidFill>
                     <a:srgbClr val="043073"/>
                   </a:solidFill>
+                  <a:latin typeface="Times New Roman" panose="02020603050405020304" pitchFamily="18" charset="0"/>
+                  <a:cs typeface="Times New Roman" panose="02020603050405020304" pitchFamily="18" charset="0"/>
                   <a:sym typeface="Arial"/>
                 </a:rPr>
                 <a:t> o </a:t>
@@ -17146,6 +17702,8 @@
                   <a:solidFill>
                     <a:srgbClr val="043073"/>
                   </a:solidFill>
+                  <a:latin typeface="Times New Roman" panose="02020603050405020304" pitchFamily="18" charset="0"/>
+                  <a:cs typeface="Times New Roman" panose="02020603050405020304" pitchFamily="18" charset="0"/>
                   <a:sym typeface="Arial"/>
                 </a:rPr>
                 <a:t>ovo</a:t>
@@ -17154,6 +17712,8 @@
                 <a:solidFill>
                   <a:srgbClr val="043073"/>
                 </a:solidFill>
+                <a:latin typeface="Times New Roman" panose="02020603050405020304" pitchFamily="18" charset="0"/>
+                <a:cs typeface="Times New Roman" panose="02020603050405020304" pitchFamily="18" charset="0"/>
                 <a:sym typeface="Arial"/>
               </a:endParaRPr>
             </a:p>
@@ -17239,6 +17799,8 @@
                 <a:solidFill>
                   <a:srgbClr val="043073"/>
                 </a:solidFill>
+                <a:latin typeface="Times New Roman" panose="02020603050405020304" pitchFamily="18" charset="0"/>
+                <a:cs typeface="Times New Roman" panose="02020603050405020304" pitchFamily="18" charset="0"/>
               </a:endParaRPr>
             </a:p>
           </p:txBody>
@@ -17274,6 +17836,8 @@
                   <a:solidFill>
                     <a:srgbClr val="043073"/>
                   </a:solidFill>
+                  <a:latin typeface="Times New Roman" panose="02020603050405020304" pitchFamily="18" charset="0"/>
+                  <a:cs typeface="Times New Roman" panose="02020603050405020304" pitchFamily="18" charset="0"/>
                   <a:sym typeface="Arial"/>
                 </a:rPr>
                 <a:t>Montar</a:t>
@@ -17283,6 +17847,8 @@
                   <a:solidFill>
                     <a:srgbClr val="043073"/>
                   </a:solidFill>
+                  <a:latin typeface="Times New Roman" panose="02020603050405020304" pitchFamily="18" charset="0"/>
+                  <a:cs typeface="Times New Roman" panose="02020603050405020304" pitchFamily="18" charset="0"/>
                   <a:sym typeface="Arial"/>
                 </a:rPr>
                 <a:t> a </a:t>
@@ -17292,6 +17858,8 @@
                   <a:solidFill>
                     <a:srgbClr val="043073"/>
                   </a:solidFill>
+                  <a:latin typeface="Times New Roman" panose="02020603050405020304" pitchFamily="18" charset="0"/>
+                  <a:cs typeface="Times New Roman" panose="02020603050405020304" pitchFamily="18" charset="0"/>
                   <a:sym typeface="Arial"/>
                 </a:rPr>
                 <a:t>salada</a:t>
@@ -17300,6 +17868,8 @@
                 <a:solidFill>
                   <a:srgbClr val="043073"/>
                 </a:solidFill>
+                <a:latin typeface="Times New Roman" panose="02020603050405020304" pitchFamily="18" charset="0"/>
+                <a:cs typeface="Times New Roman" panose="02020603050405020304" pitchFamily="18" charset="0"/>
                 <a:sym typeface="Arial"/>
               </a:endParaRPr>
             </a:p>
@@ -17452,38 +18022,22 @@
               </a:defRPr>
             </a:pPr>
             <a:r>
-              <a:rPr sz="2400" b="1" dirty="0">
-                <a:solidFill>
-                  <a:srgbClr val="000000"/>
-                </a:solidFill>
-                <a:latin typeface="Inter"/>
-                <a:ea typeface="Inter"/>
-                <a:cs typeface="Inter"/>
+              <a:rPr lang="pt-BR" dirty="0">
+                <a:latin typeface="Times New Roman" panose="02020603050405020304" pitchFamily="18" charset="0"/>
+                <a:cs typeface="Times New Roman" panose="02020603050405020304" pitchFamily="18" charset="0"/>
               </a:rPr>
-              <a:t>6. </a:t>
-            </a:r>
-            <a:r>
-              <a:rPr lang="pt-BR" dirty="0"/>
               <a:t>S</a:t>
             </a:r>
             <a:r>
-              <a:rPr sz="2400" b="1" dirty="0" err="1">
-                <a:solidFill>
-                  <a:srgbClr val="000000"/>
-                </a:solidFill>
-                <a:latin typeface="Inter"/>
-                <a:ea typeface="Inter"/>
-                <a:cs typeface="Inter"/>
+              <a:rPr dirty="0" err="1">
+                <a:latin typeface="Times New Roman" panose="02020603050405020304" pitchFamily="18" charset="0"/>
+                <a:cs typeface="Times New Roman" panose="02020603050405020304" pitchFamily="18" charset="0"/>
               </a:rPr>
               <a:t>incronismo</a:t>
             </a:r>
-            <a:endParaRPr sz="2400" b="1" dirty="0">
-              <a:solidFill>
-                <a:srgbClr val="000000"/>
-              </a:solidFill>
-              <a:latin typeface="Inter"/>
-              <a:ea typeface="Inter"/>
-              <a:cs typeface="Inter"/>
+            <a:endParaRPr dirty="0">
+              <a:latin typeface="Times New Roman" panose="02020603050405020304" pitchFamily="18" charset="0"/>
+              <a:cs typeface="Times New Roman" panose="02020603050405020304" pitchFamily="18" charset="0"/>
             </a:endParaRPr>
           </a:p>
         </p:txBody>
@@ -17502,10 +18056,10 @@
         </p:nvGrpSpPr>
         <p:grpSpPr>
           <a:xfrm rot="16200000">
-            <a:off x="7749042" y="3543693"/>
-            <a:ext cx="198120" cy="1281155"/>
+            <a:off x="7722603" y="3570131"/>
+            <a:ext cx="198120" cy="1228279"/>
             <a:chOff x="7757160" y="2819400"/>
-            <a:chExt cx="198120" cy="851741"/>
+            <a:chExt cx="198120" cy="816588"/>
           </a:xfrm>
         </p:grpSpPr>
         <p:sp>
@@ -17545,6 +18099,8 @@
                 <a:solidFill>
                   <a:srgbClr val="043073"/>
                 </a:solidFill>
+                <a:latin typeface="Times New Roman" panose="02020603050405020304" pitchFamily="18" charset="0"/>
+                <a:cs typeface="Times New Roman" panose="02020603050405020304" pitchFamily="18" charset="0"/>
               </a:endParaRPr>
             </a:p>
           </p:txBody>
@@ -17563,8 +18119,8 @@
           </p:nvSpPr>
           <p:spPr>
             <a:xfrm>
-              <a:off x="7757160" y="3459480"/>
-              <a:ext cx="198120" cy="211661"/>
+              <a:off x="7757160" y="3494632"/>
+              <a:ext cx="198120" cy="141356"/>
             </a:xfrm>
             <a:prstGeom prst="rect">
               <a:avLst/>
@@ -17589,6 +18145,8 @@
                   <a:solidFill>
                     <a:srgbClr val="043073"/>
                   </a:solidFill>
+                  <a:latin typeface="Times New Roman" panose="02020603050405020304" pitchFamily="18" charset="0"/>
+                  <a:cs typeface="Times New Roman" panose="02020603050405020304" pitchFamily="18" charset="0"/>
                   <a:sym typeface="Arial"/>
                 </a:rPr>
                 <a:t>▼</a:t>
@@ -17611,10 +18169,10 @@
         </p:nvGrpSpPr>
         <p:grpSpPr>
           <a:xfrm rot="16200000">
-            <a:off x="4367445" y="3575013"/>
-            <a:ext cx="198120" cy="1203276"/>
+            <a:off x="4345847" y="3596612"/>
+            <a:ext cx="198120" cy="1160078"/>
             <a:chOff x="7757160" y="2819400"/>
-            <a:chExt cx="198120" cy="851741"/>
+            <a:chExt cx="198120" cy="821163"/>
           </a:xfrm>
         </p:grpSpPr>
         <p:sp>
@@ -17654,6 +18212,8 @@
                 <a:solidFill>
                   <a:srgbClr val="043073"/>
                 </a:solidFill>
+                <a:latin typeface="Times New Roman" panose="02020603050405020304" pitchFamily="18" charset="0"/>
+                <a:cs typeface="Times New Roman" panose="02020603050405020304" pitchFamily="18" charset="0"/>
               </a:endParaRPr>
             </a:p>
           </p:txBody>
@@ -17672,8 +18232,8 @@
           </p:nvSpPr>
           <p:spPr>
             <a:xfrm>
-              <a:off x="7757160" y="3459480"/>
-              <a:ext cx="198120" cy="211661"/>
+              <a:off x="7757160" y="3490058"/>
+              <a:ext cx="198120" cy="150505"/>
             </a:xfrm>
             <a:prstGeom prst="rect">
               <a:avLst/>
@@ -17698,6 +18258,8 @@
                   <a:solidFill>
                     <a:srgbClr val="043073"/>
                   </a:solidFill>
+                  <a:latin typeface="Times New Roman" panose="02020603050405020304" pitchFamily="18" charset="0"/>
+                  <a:cs typeface="Times New Roman" panose="02020603050405020304" pitchFamily="18" charset="0"/>
                   <a:sym typeface="Arial"/>
                 </a:rPr>
                 <a:t>▼</a:t>
@@ -17911,6 +18473,8 @@
                 <a:solidFill>
                   <a:srgbClr val="043073"/>
                 </a:solidFill>
+                <a:latin typeface="Times New Roman" panose="02020603050405020304" pitchFamily="18" charset="0"/>
+                <a:cs typeface="Times New Roman" panose="02020603050405020304" pitchFamily="18" charset="0"/>
               </a:endParaRPr>
             </a:p>
           </p:txBody>
@@ -17949,6 +18513,8 @@
                   <a:solidFill>
                     <a:srgbClr val="043073"/>
                   </a:solidFill>
+                  <a:latin typeface="Times New Roman" panose="02020603050405020304" pitchFamily="18" charset="0"/>
+                  <a:cs typeface="Times New Roman" panose="02020603050405020304" pitchFamily="18" charset="0"/>
                   <a:sym typeface="Arial"/>
                 </a:rPr>
                 <a:t>▼</a:t>
@@ -18008,6 +18574,8 @@
                 <a:solidFill>
                   <a:srgbClr val="043073"/>
                 </a:solidFill>
+                <a:latin typeface="Times New Roman" panose="02020603050405020304" pitchFamily="18" charset="0"/>
+                <a:cs typeface="Times New Roman" panose="02020603050405020304" pitchFamily="18" charset="0"/>
               </a:endParaRPr>
             </a:p>
           </p:txBody>
@@ -18046,6 +18614,8 @@
                   <a:solidFill>
                     <a:srgbClr val="043073"/>
                   </a:solidFill>
+                  <a:latin typeface="Times New Roman" panose="02020603050405020304" pitchFamily="18" charset="0"/>
+                  <a:cs typeface="Times New Roman" panose="02020603050405020304" pitchFamily="18" charset="0"/>
                   <a:sym typeface="Arial"/>
                 </a:rPr>
                 <a:t>▼</a:t>
@@ -18105,6 +18675,8 @@
                 <a:solidFill>
                   <a:srgbClr val="043073"/>
                 </a:solidFill>
+                <a:latin typeface="Times New Roman" panose="02020603050405020304" pitchFamily="18" charset="0"/>
+                <a:cs typeface="Times New Roman" panose="02020603050405020304" pitchFamily="18" charset="0"/>
               </a:endParaRPr>
             </a:p>
           </p:txBody>
@@ -18143,6 +18715,8 @@
                   <a:solidFill>
                     <a:srgbClr val="043073"/>
                   </a:solidFill>
+                  <a:latin typeface="Times New Roman" panose="02020603050405020304" pitchFamily="18" charset="0"/>
+                  <a:cs typeface="Times New Roman" panose="02020603050405020304" pitchFamily="18" charset="0"/>
                   <a:sym typeface="Arial"/>
                 </a:rPr>
                 <a:t>▼</a:t>
@@ -18226,7 +18800,10 @@
             <a:bodyPr/>
             <a:lstStyle/>
             <a:p>
-              <a:endParaRPr lang="pt-BR" sz="1120" dirty="0"/>
+              <a:endParaRPr lang="pt-BR" sz="1120" dirty="0">
+                <a:latin typeface="Times New Roman" panose="02020603050405020304" pitchFamily="18" charset="0"/>
+                <a:cs typeface="Times New Roman" panose="02020603050405020304" pitchFamily="18" charset="0"/>
+              </a:endParaRPr>
             </a:p>
           </p:txBody>
         </p:sp>
@@ -18261,6 +18838,8 @@
                   <a:solidFill>
                     <a:srgbClr val="043073"/>
                   </a:solidFill>
+                  <a:latin typeface="Times New Roman" panose="02020603050405020304" pitchFamily="18" charset="0"/>
+                  <a:cs typeface="Times New Roman" panose="02020603050405020304" pitchFamily="18" charset="0"/>
                   <a:sym typeface="Arial"/>
                 </a:rPr>
                 <a:t>Cozinhar</a:t>
@@ -18270,6 +18849,8 @@
                   <a:solidFill>
                     <a:srgbClr val="043073"/>
                   </a:solidFill>
+                  <a:latin typeface="Times New Roman" panose="02020603050405020304" pitchFamily="18" charset="0"/>
+                  <a:cs typeface="Times New Roman" panose="02020603050405020304" pitchFamily="18" charset="0"/>
                   <a:sym typeface="Arial"/>
                 </a:rPr>
                 <a:t> o </a:t>
@@ -18279,6 +18860,8 @@
                   <a:solidFill>
                     <a:srgbClr val="043073"/>
                   </a:solidFill>
+                  <a:latin typeface="Times New Roman" panose="02020603050405020304" pitchFamily="18" charset="0"/>
+                  <a:cs typeface="Times New Roman" panose="02020603050405020304" pitchFamily="18" charset="0"/>
                   <a:sym typeface="Arial"/>
                 </a:rPr>
                 <a:t>ovo</a:t>
@@ -18287,6 +18870,8 @@
                 <a:solidFill>
                   <a:srgbClr val="043073"/>
                 </a:solidFill>
+                <a:latin typeface="Times New Roman" panose="02020603050405020304" pitchFamily="18" charset="0"/>
+                <a:cs typeface="Times New Roman" panose="02020603050405020304" pitchFamily="18" charset="0"/>
                 <a:sym typeface="Arial"/>
               </a:endParaRPr>
             </a:p>
@@ -18372,6 +18957,8 @@
                 <a:solidFill>
                   <a:srgbClr val="043073"/>
                 </a:solidFill>
+                <a:latin typeface="Times New Roman" panose="02020603050405020304" pitchFamily="18" charset="0"/>
+                <a:cs typeface="Times New Roman" panose="02020603050405020304" pitchFamily="18" charset="0"/>
               </a:endParaRPr>
             </a:p>
           </p:txBody>
@@ -18407,6 +18994,8 @@
                   <a:solidFill>
                     <a:srgbClr val="043073"/>
                   </a:solidFill>
+                  <a:latin typeface="Times New Roman" panose="02020603050405020304" pitchFamily="18" charset="0"/>
+                  <a:cs typeface="Times New Roman" panose="02020603050405020304" pitchFamily="18" charset="0"/>
                   <a:sym typeface="Arial"/>
                 </a:rPr>
                 <a:t>Picar os legumes</a:t>
@@ -18494,6 +19083,8 @@
                 <a:solidFill>
                   <a:srgbClr val="043073"/>
                 </a:solidFill>
+                <a:latin typeface="Times New Roman" panose="02020603050405020304" pitchFamily="18" charset="0"/>
+                <a:cs typeface="Times New Roman" panose="02020603050405020304" pitchFamily="18" charset="0"/>
               </a:endParaRPr>
             </a:p>
           </p:txBody>
@@ -18529,6 +19120,8 @@
                   <a:solidFill>
                     <a:srgbClr val="043073"/>
                   </a:solidFill>
+                  <a:latin typeface="Times New Roman" panose="02020603050405020304" pitchFamily="18" charset="0"/>
+                  <a:cs typeface="Times New Roman" panose="02020603050405020304" pitchFamily="18" charset="0"/>
                   <a:sym typeface="Arial"/>
                 </a:rPr>
                 <a:t>Descascar o ovo</a:t>
@@ -18616,6 +19209,8 @@
                 <a:solidFill>
                   <a:srgbClr val="043073"/>
                 </a:solidFill>
+                <a:latin typeface="Times New Roman" panose="02020603050405020304" pitchFamily="18" charset="0"/>
+                <a:cs typeface="Times New Roman" panose="02020603050405020304" pitchFamily="18" charset="0"/>
               </a:endParaRPr>
             </a:p>
           </p:txBody>
@@ -18651,6 +19246,8 @@
                   <a:solidFill>
                     <a:srgbClr val="043073"/>
                   </a:solidFill>
+                  <a:latin typeface="Times New Roman" panose="02020603050405020304" pitchFamily="18" charset="0"/>
+                  <a:cs typeface="Times New Roman" panose="02020603050405020304" pitchFamily="18" charset="0"/>
                   <a:sym typeface="Arial"/>
                 </a:rPr>
                 <a:t>Montar</a:t>
@@ -18660,6 +19257,8 @@
                   <a:solidFill>
                     <a:srgbClr val="043073"/>
                   </a:solidFill>
+                  <a:latin typeface="Times New Roman" panose="02020603050405020304" pitchFamily="18" charset="0"/>
+                  <a:cs typeface="Times New Roman" panose="02020603050405020304" pitchFamily="18" charset="0"/>
                   <a:sym typeface="Arial"/>
                 </a:rPr>
                 <a:t> a </a:t>
@@ -18669,6 +19268,8 @@
                   <a:solidFill>
                     <a:srgbClr val="043073"/>
                   </a:solidFill>
+                  <a:latin typeface="Times New Roman" panose="02020603050405020304" pitchFamily="18" charset="0"/>
+                  <a:cs typeface="Times New Roman" panose="02020603050405020304" pitchFamily="18" charset="0"/>
                   <a:sym typeface="Arial"/>
                 </a:rPr>
                 <a:t>salada</a:t>
@@ -18677,6 +19278,8 @@
                 <a:solidFill>
                   <a:srgbClr val="043073"/>
                 </a:solidFill>
+                <a:latin typeface="Times New Roman" panose="02020603050405020304" pitchFamily="18" charset="0"/>
+                <a:cs typeface="Times New Roman" panose="02020603050405020304" pitchFamily="18" charset="0"/>
                 <a:sym typeface="Arial"/>
               </a:endParaRPr>
             </a:p>
@@ -18829,45 +19432,22 @@
               </a:defRPr>
             </a:pPr>
             <a:r>
-              <a:rPr sz="2400" b="1" dirty="0">
-                <a:solidFill>
-                  <a:srgbClr val="000000"/>
-                </a:solidFill>
-                <a:latin typeface="Inter"/>
-                <a:ea typeface="Inter"/>
-                <a:cs typeface="Inter"/>
-              </a:rPr>
-              <a:t>6. </a:t>
-            </a:r>
-            <a:r>
-              <a:rPr lang="pt-BR" sz="2400" b="1" dirty="0" err="1">
-                <a:solidFill>
-                  <a:srgbClr val="000000"/>
-                </a:solidFill>
-                <a:latin typeface="Inter"/>
-                <a:ea typeface="Inter"/>
-                <a:cs typeface="Inter"/>
+              <a:rPr lang="pt-BR" dirty="0" err="1">
+                <a:latin typeface="Times New Roman" panose="02020603050405020304" pitchFamily="18" charset="0"/>
+                <a:cs typeface="Times New Roman" panose="02020603050405020304" pitchFamily="18" charset="0"/>
               </a:rPr>
               <a:t>Ass</a:t>
             </a:r>
             <a:r>
-              <a:rPr sz="2400" b="1" dirty="0" err="1">
-                <a:solidFill>
-                  <a:srgbClr val="000000"/>
-                </a:solidFill>
-                <a:latin typeface="Inter"/>
-                <a:ea typeface="Inter"/>
-                <a:cs typeface="Inter"/>
+              <a:rPr dirty="0" err="1">
+                <a:latin typeface="Times New Roman" panose="02020603050405020304" pitchFamily="18" charset="0"/>
+                <a:cs typeface="Times New Roman" panose="02020603050405020304" pitchFamily="18" charset="0"/>
               </a:rPr>
               <a:t>incronismo</a:t>
             </a:r>
-            <a:endParaRPr sz="2400" b="1" dirty="0">
-              <a:solidFill>
-                <a:srgbClr val="000000"/>
-              </a:solidFill>
-              <a:latin typeface="Inter"/>
-              <a:ea typeface="Inter"/>
-              <a:cs typeface="Inter"/>
+            <a:endParaRPr dirty="0">
+              <a:latin typeface="Times New Roman" panose="02020603050405020304" pitchFamily="18" charset="0"/>
+              <a:cs typeface="Times New Roman" panose="02020603050405020304" pitchFamily="18" charset="0"/>
             </a:endParaRPr>
           </a:p>
         </p:txBody>
@@ -19051,67 +19631,43 @@
               </a:defRPr>
             </a:pPr>
             <a:r>
-              <a:rPr lang="pt-BR" sz="2400" b="1" dirty="0">
-                <a:solidFill>
-                  <a:srgbClr val="000000"/>
-                </a:solidFill>
-                <a:latin typeface="Inter"/>
-                <a:ea typeface="Inter"/>
-                <a:cs typeface="Inter"/>
+              <a:rPr lang="pt-BR" dirty="0">
+                <a:latin typeface="Times New Roman" panose="02020603050405020304" pitchFamily="18" charset="0"/>
+                <a:cs typeface="Times New Roman" panose="02020603050405020304" pitchFamily="18" charset="0"/>
               </a:rPr>
               <a:t>7</a:t>
             </a:r>
             <a:r>
-              <a:rPr sz="2400" b="1" dirty="0">
-                <a:solidFill>
-                  <a:srgbClr val="000000"/>
-                </a:solidFill>
-                <a:latin typeface="Inter"/>
-                <a:ea typeface="Inter"/>
-                <a:cs typeface="Inter"/>
+              <a:rPr dirty="0">
+                <a:latin typeface="Times New Roman" panose="02020603050405020304" pitchFamily="18" charset="0"/>
+                <a:cs typeface="Times New Roman" panose="02020603050405020304" pitchFamily="18" charset="0"/>
               </a:rPr>
               <a:t>. </a:t>
             </a:r>
             <a:r>
-              <a:rPr sz="2400" b="1" dirty="0" err="1">
-                <a:solidFill>
-                  <a:srgbClr val="000000"/>
-                </a:solidFill>
-                <a:latin typeface="Inter"/>
-                <a:ea typeface="Inter"/>
-                <a:cs typeface="Inter"/>
+              <a:rPr dirty="0" err="1">
+                <a:latin typeface="Times New Roman" panose="02020603050405020304" pitchFamily="18" charset="0"/>
+                <a:cs typeface="Times New Roman" panose="02020603050405020304" pitchFamily="18" charset="0"/>
               </a:rPr>
               <a:t>Sincronismo</a:t>
             </a:r>
             <a:r>
-              <a:rPr sz="2400" b="1" dirty="0">
-                <a:solidFill>
-                  <a:srgbClr val="000000"/>
-                </a:solidFill>
-                <a:latin typeface="Inter"/>
-                <a:ea typeface="Inter"/>
-                <a:cs typeface="Inter"/>
+              <a:rPr dirty="0">
+                <a:latin typeface="Times New Roman" panose="02020603050405020304" pitchFamily="18" charset="0"/>
+                <a:cs typeface="Times New Roman" panose="02020603050405020304" pitchFamily="18" charset="0"/>
               </a:rPr>
               <a:t> e </a:t>
             </a:r>
             <a:r>
-              <a:rPr sz="2400" b="1" dirty="0" err="1">
-                <a:solidFill>
-                  <a:srgbClr val="000000"/>
-                </a:solidFill>
-                <a:latin typeface="Inter"/>
-                <a:ea typeface="Inter"/>
-                <a:cs typeface="Inter"/>
+              <a:rPr dirty="0" err="1">
+                <a:latin typeface="Times New Roman" panose="02020603050405020304" pitchFamily="18" charset="0"/>
+                <a:cs typeface="Times New Roman" panose="02020603050405020304" pitchFamily="18" charset="0"/>
               </a:rPr>
               <a:t>assincronismo</a:t>
             </a:r>
-            <a:endParaRPr sz="2400" b="1" dirty="0">
-              <a:solidFill>
-                <a:srgbClr val="000000"/>
-              </a:solidFill>
-              <a:latin typeface="Inter"/>
-              <a:ea typeface="Inter"/>
-              <a:cs typeface="Inter"/>
+            <a:endParaRPr dirty="0">
+              <a:latin typeface="Times New Roman" panose="02020603050405020304" pitchFamily="18" charset="0"/>
+              <a:cs typeface="Times New Roman" panose="02020603050405020304" pitchFamily="18" charset="0"/>
             </a:endParaRPr>
           </a:p>
         </p:txBody>
@@ -19266,9 +19822,8 @@
                 <a:solidFill>
                   <a:srgbClr val="043073"/>
                 </a:solidFill>
-                <a:latin typeface="Inter"/>
-                <a:ea typeface="Inter"/>
-                <a:cs typeface="Inter"/>
+                <a:latin typeface="Times New Roman" panose="02020603050405020304" pitchFamily="18" charset="0"/>
+                <a:cs typeface="Times New Roman" panose="02020603050405020304" pitchFamily="18" charset="0"/>
               </a:rPr>
               <a:t>14</a:t>
             </a:r>
@@ -19425,9 +19980,8 @@
                 <a:solidFill>
                   <a:srgbClr val="272525"/>
                 </a:solidFill>
-                <a:latin typeface="Inter"/>
-                <a:ea typeface="Inter"/>
-                <a:cs typeface="Inter"/>
+                <a:latin typeface="Times New Roman" panose="02020603050405020304" pitchFamily="18" charset="0"/>
+                <a:cs typeface="Times New Roman" panose="02020603050405020304" pitchFamily="18" charset="0"/>
               </a:rPr>
               <a:t>A diferença está no que acontece durante a espera.</a:t>
             </a:r>
@@ -19470,7 +20024,10 @@
           <a:bodyPr/>
           <a:lstStyle/>
           <a:p>
-            <a:endParaRPr lang="pt-BR"/>
+            <a:endParaRPr lang="pt-BR">
+              <a:latin typeface="Times New Roman" panose="02020603050405020304" pitchFamily="18" charset="0"/>
+              <a:cs typeface="Times New Roman" panose="02020603050405020304" pitchFamily="18" charset="0"/>
+            </a:endParaRPr>
           </a:p>
         </p:txBody>
       </p:sp>
@@ -19624,9 +20181,8 @@
                 <a:solidFill>
                   <a:srgbClr val="043073"/>
                 </a:solidFill>
-                <a:latin typeface="Inter"/>
-                <a:ea typeface="Inter"/>
-                <a:cs typeface="Inter"/>
+                <a:latin typeface="Times New Roman" panose="02020603050405020304" pitchFamily="18" charset="0"/>
+                <a:cs typeface="Times New Roman" panose="02020603050405020304" pitchFamily="18" charset="0"/>
               </a:rPr>
               <a:t>Síncrono</a:t>
             </a:r>
@@ -19783,9 +20339,8 @@
                 <a:solidFill>
                   <a:srgbClr val="272525"/>
                 </a:solidFill>
-                <a:latin typeface="Inter"/>
-                <a:ea typeface="Inter"/>
-                <a:cs typeface="Inter"/>
+                <a:latin typeface="Times New Roman" panose="02020603050405020304" pitchFamily="18" charset="0"/>
+                <a:cs typeface="Times New Roman" panose="02020603050405020304" pitchFamily="18" charset="0"/>
               </a:rPr>
               <a:t>Espera o ovo cozinhar.</a:t>
             </a:r>
@@ -19795,9 +20350,8 @@
               <a:solidFill>
                 <a:srgbClr val="272525"/>
               </a:solidFill>
-              <a:latin typeface="Inter"/>
-              <a:ea typeface="Inter"/>
-              <a:cs typeface="Inter"/>
+              <a:latin typeface="Times New Roman" panose="02020603050405020304" pitchFamily="18" charset="0"/>
+              <a:cs typeface="Times New Roman" panose="02020603050405020304" pitchFamily="18" charset="0"/>
             </a:endParaRPr>
           </a:p>
           <a:p>
@@ -19816,9 +20370,8 @@
                 <a:solidFill>
                   <a:srgbClr val="272525"/>
                 </a:solidFill>
-                <a:latin typeface="Inter"/>
-                <a:ea typeface="Inter"/>
-                <a:cs typeface="Inter"/>
+                <a:latin typeface="Times New Roman" panose="02020603050405020304" pitchFamily="18" charset="0"/>
+                <a:cs typeface="Times New Roman" panose="02020603050405020304" pitchFamily="18" charset="0"/>
               </a:rPr>
               <a:t>Depois, pica os legumes.</a:t>
             </a:r>
@@ -19861,7 +20414,10 @@
           <a:bodyPr/>
           <a:lstStyle/>
           <a:p>
-            <a:endParaRPr lang="pt-BR"/>
+            <a:endParaRPr lang="pt-BR">
+              <a:latin typeface="Times New Roman" panose="02020603050405020304" pitchFamily="18" charset="0"/>
+              <a:cs typeface="Times New Roman" panose="02020603050405020304" pitchFamily="18" charset="0"/>
+            </a:endParaRPr>
           </a:p>
         </p:txBody>
       </p:sp>
@@ -20015,9 +20571,8 @@
                 <a:solidFill>
                   <a:srgbClr val="043073"/>
                 </a:solidFill>
-                <a:latin typeface="Inter"/>
-                <a:ea typeface="Inter"/>
-                <a:cs typeface="Inter"/>
+                <a:latin typeface="Times New Roman" panose="02020603050405020304" pitchFamily="18" charset="0"/>
+                <a:cs typeface="Times New Roman" panose="02020603050405020304" pitchFamily="18" charset="0"/>
               </a:rPr>
               <a:t>Assíncrono</a:t>
             </a:r>
@@ -20174,9 +20729,8 @@
                 <a:solidFill>
                   <a:srgbClr val="272525"/>
                 </a:solidFill>
-                <a:latin typeface="Inter"/>
-                <a:ea typeface="Inter"/>
-                <a:cs typeface="Inter"/>
+                <a:latin typeface="Times New Roman" panose="02020603050405020304" pitchFamily="18" charset="0"/>
+                <a:cs typeface="Times New Roman" panose="02020603050405020304" pitchFamily="18" charset="0"/>
               </a:rPr>
               <a:t>Inicia o cozimento.</a:t>
             </a:r>
@@ -20186,9 +20740,8 @@
               <a:solidFill>
                 <a:srgbClr val="272525"/>
               </a:solidFill>
-              <a:latin typeface="Inter"/>
-              <a:ea typeface="Inter"/>
-              <a:cs typeface="Inter"/>
+              <a:latin typeface="Times New Roman" panose="02020603050405020304" pitchFamily="18" charset="0"/>
+              <a:cs typeface="Times New Roman" panose="02020603050405020304" pitchFamily="18" charset="0"/>
             </a:endParaRPr>
           </a:p>
           <a:p>
@@ -20207,9 +20760,8 @@
                 <a:solidFill>
                   <a:srgbClr val="272525"/>
                 </a:solidFill>
-                <a:latin typeface="Inter"/>
-                <a:ea typeface="Inter"/>
-                <a:cs typeface="Inter"/>
+                <a:latin typeface="Times New Roman" panose="02020603050405020304" pitchFamily="18" charset="0"/>
+                <a:cs typeface="Times New Roman" panose="02020603050405020304" pitchFamily="18" charset="0"/>
               </a:rPr>
               <a:t>Durante a espera, pica os legumes.</a:t>
             </a:r>
@@ -20252,7 +20804,10 @@
           <a:bodyPr/>
           <a:lstStyle/>
           <a:p>
-            <a:endParaRPr lang="pt-BR"/>
+            <a:endParaRPr lang="pt-BR">
+              <a:latin typeface="Times New Roman" panose="02020603050405020304" pitchFamily="18" charset="0"/>
+              <a:cs typeface="Times New Roman" panose="02020603050405020304" pitchFamily="18" charset="0"/>
+            </a:endParaRPr>
           </a:p>
         </p:txBody>
       </p:sp>
@@ -20402,15 +20957,116 @@
               </a:defRPr>
             </a:pPr>
             <a:r>
-              <a:rPr sz="1725" b="0">
-                <a:solidFill>
-                  <a:srgbClr val="272525"/>
-                </a:solidFill>
-                <a:latin typeface="Inter"/>
-                <a:ea typeface="Inter"/>
-                <a:cs typeface="Inter"/>
+              <a:rPr dirty="0" err="1">
+                <a:latin typeface="Times New Roman" panose="02020603050405020304" pitchFamily="18" charset="0"/>
+                <a:cs typeface="Times New Roman" panose="02020603050405020304" pitchFamily="18" charset="0"/>
               </a:rPr>
-              <a:t>Descascar o ovo depende de ele estar pronto em ambos os casos.</a:t>
+              <a:t>Descascar</a:t>
+            </a:r>
+            <a:r>
+              <a:rPr dirty="0">
+                <a:latin typeface="Times New Roman" panose="02020603050405020304" pitchFamily="18" charset="0"/>
+                <a:cs typeface="Times New Roman" panose="02020603050405020304" pitchFamily="18" charset="0"/>
+              </a:rPr>
+              <a:t> o </a:t>
+            </a:r>
+            <a:r>
+              <a:rPr dirty="0" err="1">
+                <a:latin typeface="Times New Roman" panose="02020603050405020304" pitchFamily="18" charset="0"/>
+                <a:cs typeface="Times New Roman" panose="02020603050405020304" pitchFamily="18" charset="0"/>
+              </a:rPr>
+              <a:t>ovo</a:t>
+            </a:r>
+            <a:r>
+              <a:rPr dirty="0">
+                <a:latin typeface="Times New Roman" panose="02020603050405020304" pitchFamily="18" charset="0"/>
+                <a:cs typeface="Times New Roman" panose="02020603050405020304" pitchFamily="18" charset="0"/>
+              </a:rPr>
+              <a:t> </a:t>
+            </a:r>
+            <a:r>
+              <a:rPr dirty="0" err="1">
+                <a:latin typeface="Times New Roman" panose="02020603050405020304" pitchFamily="18" charset="0"/>
+                <a:cs typeface="Times New Roman" panose="02020603050405020304" pitchFamily="18" charset="0"/>
+              </a:rPr>
+              <a:t>depende</a:t>
+            </a:r>
+            <a:r>
+              <a:rPr dirty="0">
+                <a:latin typeface="Times New Roman" panose="02020603050405020304" pitchFamily="18" charset="0"/>
+                <a:cs typeface="Times New Roman" panose="02020603050405020304" pitchFamily="18" charset="0"/>
+              </a:rPr>
+              <a:t> de </a:t>
+            </a:r>
+            <a:r>
+              <a:rPr dirty="0" err="1">
+                <a:latin typeface="Times New Roman" panose="02020603050405020304" pitchFamily="18" charset="0"/>
+                <a:cs typeface="Times New Roman" panose="02020603050405020304" pitchFamily="18" charset="0"/>
+              </a:rPr>
+              <a:t>ele</a:t>
+            </a:r>
+            <a:r>
+              <a:rPr dirty="0">
+                <a:latin typeface="Times New Roman" panose="02020603050405020304" pitchFamily="18" charset="0"/>
+                <a:cs typeface="Times New Roman" panose="02020603050405020304" pitchFamily="18" charset="0"/>
+              </a:rPr>
+              <a:t> </a:t>
+            </a:r>
+            <a:r>
+              <a:rPr dirty="0" err="1">
+                <a:latin typeface="Times New Roman" panose="02020603050405020304" pitchFamily="18" charset="0"/>
+                <a:cs typeface="Times New Roman" panose="02020603050405020304" pitchFamily="18" charset="0"/>
+              </a:rPr>
+              <a:t>estar</a:t>
+            </a:r>
+            <a:r>
+              <a:rPr dirty="0">
+                <a:latin typeface="Times New Roman" panose="02020603050405020304" pitchFamily="18" charset="0"/>
+                <a:cs typeface="Times New Roman" panose="02020603050405020304" pitchFamily="18" charset="0"/>
+              </a:rPr>
+              <a:t> pronto </a:t>
+            </a:r>
+            <a:r>
+              <a:rPr dirty="0" err="1">
+                <a:latin typeface="Times New Roman" panose="02020603050405020304" pitchFamily="18" charset="0"/>
+                <a:cs typeface="Times New Roman" panose="02020603050405020304" pitchFamily="18" charset="0"/>
+              </a:rPr>
+              <a:t>em</a:t>
+            </a:r>
+            <a:r>
+              <a:rPr dirty="0">
+                <a:latin typeface="Times New Roman" panose="02020603050405020304" pitchFamily="18" charset="0"/>
+                <a:cs typeface="Times New Roman" panose="02020603050405020304" pitchFamily="18" charset="0"/>
+              </a:rPr>
+              <a:t> ambos </a:t>
+            </a:r>
+            <a:r>
+              <a:rPr dirty="0" err="1">
+                <a:latin typeface="Times New Roman" panose="02020603050405020304" pitchFamily="18" charset="0"/>
+                <a:cs typeface="Times New Roman" panose="02020603050405020304" pitchFamily="18" charset="0"/>
+              </a:rPr>
+              <a:t>os</a:t>
+            </a:r>
+            <a:r>
+              <a:rPr dirty="0">
+                <a:latin typeface="Times New Roman" panose="02020603050405020304" pitchFamily="18" charset="0"/>
+                <a:cs typeface="Times New Roman" panose="02020603050405020304" pitchFamily="18" charset="0"/>
+              </a:rPr>
+              <a:t> </a:t>
+            </a:r>
+            <a:r>
+              <a:rPr dirty="0" err="1">
+                <a:latin typeface="Times New Roman" panose="02020603050405020304" pitchFamily="18" charset="0"/>
+                <a:cs typeface="Times New Roman" panose="02020603050405020304" pitchFamily="18" charset="0"/>
+              </a:rPr>
+              <a:t>casos</a:t>
+            </a:r>
+            <a:r>
+              <a:rPr dirty="0">
+                <a:latin typeface="Times New Roman" panose="02020603050405020304" pitchFamily="18" charset="0"/>
+                <a:cs typeface="Times New Roman" panose="02020603050405020304" pitchFamily="18" charset="0"/>
+              </a:rPr>
+              <a:t>.</a:t>
             </a:r>
           </a:p>
         </p:txBody>
@@ -20599,15 +21255,25 @@
               </a:defRPr>
             </a:pPr>
             <a:r>
-              <a:rPr sz="2400" b="1">
-                <a:solidFill>
-                  <a:srgbClr val="000000"/>
-                </a:solidFill>
-                <a:latin typeface="Inter"/>
-                <a:ea typeface="Inter"/>
-                <a:cs typeface="Inter"/>
+              <a:rPr dirty="0">
+                <a:latin typeface="Times New Roman" panose="02020603050405020304" pitchFamily="18" charset="0"/>
+                <a:cs typeface="Times New Roman" panose="02020603050405020304" pitchFamily="18" charset="0"/>
               </a:rPr>
-              <a:t>A ordem com .then()</a:t>
+              <a:t>A </a:t>
+            </a:r>
+            <a:r>
+              <a:rPr dirty="0" err="1">
+                <a:latin typeface="Times New Roman" panose="02020603050405020304" pitchFamily="18" charset="0"/>
+                <a:cs typeface="Times New Roman" panose="02020603050405020304" pitchFamily="18" charset="0"/>
+              </a:rPr>
+              <a:t>ordem</a:t>
+            </a:r>
+            <a:r>
+              <a:rPr dirty="0">
+                <a:latin typeface="Times New Roman" panose="02020603050405020304" pitchFamily="18" charset="0"/>
+                <a:cs typeface="Times New Roman" panose="02020603050405020304" pitchFamily="18" charset="0"/>
+              </a:rPr>
+              <a:t> com .then()</a:t>
             </a:r>
           </a:p>
         </p:txBody>
@@ -21235,16 +21901,75 @@
               </a:defRPr>
             </a:pPr>
             <a:r>
-              <a:rPr sz="1725" b="0">
-                <a:solidFill>
-                  <a:srgbClr val="272525"/>
-                </a:solidFill>
-                <a:latin typeface="Inter"/>
-                <a:ea typeface="Inter"/>
-                <a:cs typeface="Inter"/>
+              <a:rPr sz="1725" b="0" dirty="0">
+                <a:solidFill>
+                  <a:srgbClr val="272525"/>
+                </a:solidFill>
+                <a:latin typeface="Times New Roman" panose="02020603050405020304" pitchFamily="18" charset="0"/>
+                <a:cs typeface="Times New Roman" panose="02020603050405020304" pitchFamily="18" charset="0"/>
               </a:rPr>
-              <a:t>1. Continuando o programa     2. Resposta recebida</a:t>
-            </a:r>
+              <a:t>1</a:t>
+            </a:r>
+            <a:r>
+              <a:rPr dirty="0">
+                <a:latin typeface="Times New Roman" panose="02020603050405020304" pitchFamily="18" charset="0"/>
+                <a:cs typeface="Times New Roman" panose="02020603050405020304" pitchFamily="18" charset="0"/>
+              </a:rPr>
+              <a:t>. </a:t>
+            </a:r>
+            <a:r>
+              <a:rPr dirty="0" err="1">
+                <a:latin typeface="Times New Roman" panose="02020603050405020304" pitchFamily="18" charset="0"/>
+                <a:cs typeface="Times New Roman" panose="02020603050405020304" pitchFamily="18" charset="0"/>
+              </a:rPr>
+              <a:t>Continuando</a:t>
+            </a:r>
+            <a:r>
+              <a:rPr dirty="0">
+                <a:latin typeface="Times New Roman" panose="02020603050405020304" pitchFamily="18" charset="0"/>
+                <a:cs typeface="Times New Roman" panose="02020603050405020304" pitchFamily="18" charset="0"/>
+              </a:rPr>
+              <a:t> o </a:t>
+            </a:r>
+            <a:r>
+              <a:rPr dirty="0" err="1">
+                <a:latin typeface="Times New Roman" panose="02020603050405020304" pitchFamily="18" charset="0"/>
+                <a:cs typeface="Times New Roman" panose="02020603050405020304" pitchFamily="18" charset="0"/>
+              </a:rPr>
+              <a:t>programa</a:t>
+            </a:r>
+            <a:r>
+              <a:rPr dirty="0">
+                <a:latin typeface="Times New Roman" panose="02020603050405020304" pitchFamily="18" charset="0"/>
+                <a:cs typeface="Times New Roman" panose="02020603050405020304" pitchFamily="18" charset="0"/>
+              </a:rPr>
+              <a:t>     2. </a:t>
+            </a:r>
+            <a:r>
+              <a:rPr dirty="0" err="1">
+                <a:latin typeface="Times New Roman" panose="02020603050405020304" pitchFamily="18" charset="0"/>
+                <a:cs typeface="Times New Roman" panose="02020603050405020304" pitchFamily="18" charset="0"/>
+              </a:rPr>
+              <a:t>Resposta</a:t>
+            </a:r>
+            <a:r>
+              <a:rPr dirty="0">
+                <a:latin typeface="Times New Roman" panose="02020603050405020304" pitchFamily="18" charset="0"/>
+                <a:cs typeface="Times New Roman" panose="02020603050405020304" pitchFamily="18" charset="0"/>
+              </a:rPr>
+              <a:t> </a:t>
+            </a:r>
+            <a:r>
+              <a:rPr dirty="0" err="1">
+                <a:latin typeface="Times New Roman" panose="02020603050405020304" pitchFamily="18" charset="0"/>
+                <a:cs typeface="Times New Roman" panose="02020603050405020304" pitchFamily="18" charset="0"/>
+              </a:rPr>
+              <a:t>recebida</a:t>
+            </a:r>
+            <a:endParaRPr dirty="0">
+              <a:latin typeface="Times New Roman" panose="02020603050405020304" pitchFamily="18" charset="0"/>
+              <a:cs typeface="Times New Roman" panose="02020603050405020304" pitchFamily="18" charset="0"/>
+            </a:endParaRPr>
           </a:p>
         </p:txBody>
       </p:sp>
@@ -21432,13 +22157,9 @@
               </a:defRPr>
             </a:pPr>
             <a:r>
-              <a:rPr sz="2400" b="1">
-                <a:solidFill>
-                  <a:srgbClr val="000000"/>
-                </a:solidFill>
-                <a:latin typeface="Inter"/>
-                <a:ea typeface="Inter"/>
-                <a:cs typeface="Inter"/>
+              <a:rPr dirty="0">
+                <a:latin typeface="Times New Roman" panose="02020603050405020304" pitchFamily="18" charset="0"/>
+                <a:cs typeface="Times New Roman" panose="02020603050405020304" pitchFamily="18" charset="0"/>
               </a:rPr>
               <a:t>7. async e await</a:t>
             </a:r>
@@ -21595,9 +22316,8 @@
                 <a:solidFill>
                   <a:srgbClr val="043073"/>
                 </a:solidFill>
-                <a:latin typeface="Inter"/>
-                <a:ea typeface="Inter"/>
-                <a:cs typeface="Inter"/>
+                <a:latin typeface="Times New Roman" panose="02020603050405020304" pitchFamily="18" charset="0"/>
+                <a:cs typeface="Times New Roman" panose="02020603050405020304" pitchFamily="18" charset="0"/>
               </a:rPr>
               <a:t>16</a:t>
             </a:r>
@@ -21754,9 +22474,8 @@
                 <a:solidFill>
                   <a:srgbClr val="272525"/>
                 </a:solidFill>
-                <a:latin typeface="Inter"/>
-                <a:ea typeface="Inter"/>
-                <a:cs typeface="Inter"/>
+                <a:latin typeface="Times New Roman" panose="02020603050405020304" pitchFamily="18" charset="0"/>
+                <a:cs typeface="Times New Roman" panose="02020603050405020304" pitchFamily="18" charset="0"/>
               </a:rPr>
               <a:t>A leitura fica em sequência, mesmo com uma operação assíncrona.</a:t>
             </a:r>
@@ -21799,7 +22518,10 @@
           <a:bodyPr/>
           <a:lstStyle/>
           <a:p>
-            <a:endParaRPr lang="pt-BR"/>
+            <a:endParaRPr lang="pt-BR">
+              <a:latin typeface="Times New Roman" panose="02020603050405020304" pitchFamily="18" charset="0"/>
+              <a:cs typeface="Times New Roman" panose="02020603050405020304" pitchFamily="18" charset="0"/>
+            </a:endParaRPr>
           </a:p>
         </p:txBody>
       </p:sp>
@@ -21953,9 +22675,8 @@
                 <a:solidFill>
                   <a:srgbClr val="043073"/>
                 </a:solidFill>
-                <a:latin typeface="Inter"/>
-                <a:ea typeface="Inter"/>
-                <a:cs typeface="Inter"/>
+                <a:latin typeface="Times New Roman" panose="02020603050405020304" pitchFamily="18" charset="0"/>
+                <a:cs typeface="Times New Roman" panose="02020603050405020304" pitchFamily="18" charset="0"/>
               </a:rPr>
               <a:t>async</a:t>
             </a:r>
@@ -22112,9 +22833,8 @@
                 <a:solidFill>
                   <a:srgbClr val="272525"/>
                 </a:solidFill>
-                <a:latin typeface="Inter"/>
-                <a:ea typeface="Inter"/>
-                <a:cs typeface="Inter"/>
+                <a:latin typeface="Times New Roman" panose="02020603050405020304" pitchFamily="18" charset="0"/>
+                <a:cs typeface="Times New Roman" panose="02020603050405020304" pitchFamily="18" charset="0"/>
               </a:rPr>
               <a:t>Marca a função como assíncrona.</a:t>
             </a:r>
@@ -22124,9 +22844,8 @@
               <a:solidFill>
                 <a:srgbClr val="272525"/>
               </a:solidFill>
-              <a:latin typeface="Inter"/>
-              <a:ea typeface="Inter"/>
-              <a:cs typeface="Inter"/>
+              <a:latin typeface="Times New Roman" panose="02020603050405020304" pitchFamily="18" charset="0"/>
+              <a:cs typeface="Times New Roman" panose="02020603050405020304" pitchFamily="18" charset="0"/>
             </a:endParaRPr>
           </a:p>
           <a:p>
@@ -22145,9 +22864,8 @@
                 <a:solidFill>
                   <a:srgbClr val="272525"/>
                 </a:solidFill>
-                <a:latin typeface="Inter"/>
-                <a:ea typeface="Inter"/>
-                <a:cs typeface="Inter"/>
+                <a:latin typeface="Times New Roman" panose="02020603050405020304" pitchFamily="18" charset="0"/>
+                <a:cs typeface="Times New Roman" panose="02020603050405020304" pitchFamily="18" charset="0"/>
               </a:rPr>
               <a:t>Permite usar await no corpo.</a:t>
             </a:r>
@@ -22190,7 +22908,10 @@
           <a:bodyPr/>
           <a:lstStyle/>
           <a:p>
-            <a:endParaRPr lang="pt-BR"/>
+            <a:endParaRPr lang="pt-BR">
+              <a:latin typeface="Times New Roman" panose="02020603050405020304" pitchFamily="18" charset="0"/>
+              <a:cs typeface="Times New Roman" panose="02020603050405020304" pitchFamily="18" charset="0"/>
+            </a:endParaRPr>
           </a:p>
         </p:txBody>
       </p:sp>
@@ -22344,9 +23065,8 @@
                 <a:solidFill>
                   <a:srgbClr val="043073"/>
                 </a:solidFill>
-                <a:latin typeface="Inter"/>
-                <a:ea typeface="Inter"/>
-                <a:cs typeface="Inter"/>
+                <a:latin typeface="Times New Roman" panose="02020603050405020304" pitchFamily="18" charset="0"/>
+                <a:cs typeface="Times New Roman" panose="02020603050405020304" pitchFamily="18" charset="0"/>
               </a:rPr>
               <a:t>await</a:t>
             </a:r>
@@ -22503,9 +23223,8 @@
                 <a:solidFill>
                   <a:srgbClr val="272525"/>
                 </a:solidFill>
-                <a:latin typeface="Inter"/>
-                <a:ea typeface="Inter"/>
-                <a:cs typeface="Inter"/>
+                <a:latin typeface="Times New Roman" panose="02020603050405020304" pitchFamily="18" charset="0"/>
+                <a:cs typeface="Times New Roman" panose="02020603050405020304" pitchFamily="18" charset="0"/>
               </a:rPr>
               <a:t>Aguarda um Future.</a:t>
             </a:r>
@@ -22515,9 +23234,8 @@
               <a:solidFill>
                 <a:srgbClr val="272525"/>
               </a:solidFill>
-              <a:latin typeface="Inter"/>
-              <a:ea typeface="Inter"/>
-              <a:cs typeface="Inter"/>
+              <a:latin typeface="Times New Roman" panose="02020603050405020304" pitchFamily="18" charset="0"/>
+              <a:cs typeface="Times New Roman" panose="02020603050405020304" pitchFamily="18" charset="0"/>
             </a:endParaRPr>
           </a:p>
           <a:p>
@@ -22536,9 +23254,8 @@
                 <a:solidFill>
                   <a:srgbClr val="272525"/>
                 </a:solidFill>
-                <a:latin typeface="Inter"/>
-                <a:ea typeface="Inter"/>
-                <a:cs typeface="Inter"/>
+                <a:latin typeface="Times New Roman" panose="02020603050405020304" pitchFamily="18" charset="0"/>
+                <a:cs typeface="Times New Roman" panose="02020603050405020304" pitchFamily="18" charset="0"/>
               </a:rPr>
               <a:t>Obtém o valor quando ele chega.</a:t>
             </a:r>
@@ -22581,7 +23298,10 @@
           <a:bodyPr/>
           <a:lstStyle/>
           <a:p>
-            <a:endParaRPr lang="pt-BR"/>
+            <a:endParaRPr lang="pt-BR">
+              <a:latin typeface="Times New Roman" panose="02020603050405020304" pitchFamily="18" charset="0"/>
+              <a:cs typeface="Times New Roman" panose="02020603050405020304" pitchFamily="18" charset="0"/>
+            </a:endParaRPr>
           </a:p>
         </p:txBody>
       </p:sp>
@@ -22735,9 +23455,8 @@
                 <a:solidFill>
                   <a:srgbClr val="272525"/>
                 </a:solidFill>
-                <a:latin typeface="Inter"/>
-                <a:ea typeface="Inter"/>
-                <a:cs typeface="Inter"/>
+                <a:latin typeface="Times New Roman" panose="02020603050405020304" pitchFamily="18" charset="0"/>
+                <a:cs typeface="Times New Roman" panose="02020603050405020304" pitchFamily="18" charset="0"/>
               </a:rPr>
               <a:t>A função atual pausa na espera. A aplicação pode atender outras tarefas.</a:t>
             </a:r>
@@ -22932,9 +23651,8 @@
                 <a:solidFill>
                   <a:srgbClr val="000000"/>
                 </a:solidFill>
-                <a:latin typeface="Inter"/>
-                <a:ea typeface="Inter"/>
-                <a:cs typeface="Inter"/>
+                <a:latin typeface="Times New Roman" panose="02020603050405020304" pitchFamily="18" charset="0"/>
+                <a:cs typeface="Times New Roman" panose="02020603050405020304" pitchFamily="18" charset="0"/>
               </a:rPr>
               <a:t>Uma aplicação conversando com uma API</a:t>
             </a:r>
@@ -23091,9 +23809,8 @@
                 <a:solidFill>
                   <a:srgbClr val="043073"/>
                 </a:solidFill>
-                <a:latin typeface="Inter"/>
-                <a:ea typeface="Inter"/>
-                <a:cs typeface="Inter"/>
+                <a:latin typeface="Times New Roman" panose="02020603050405020304" pitchFamily="18" charset="0"/>
+                <a:cs typeface="Times New Roman" panose="02020603050405020304" pitchFamily="18" charset="0"/>
               </a:rPr>
               <a:t>02</a:t>
             </a:r>
@@ -23250,9 +23967,8 @@
                 <a:solidFill>
                   <a:srgbClr val="272525"/>
                 </a:solidFill>
-                <a:latin typeface="Inter"/>
-                <a:ea typeface="Inter"/>
-                <a:cs typeface="Inter"/>
+                <a:latin typeface="Times New Roman" panose="02020603050405020304" pitchFamily="18" charset="0"/>
+                <a:cs typeface="Times New Roman" panose="02020603050405020304" pitchFamily="18" charset="0"/>
               </a:rPr>
               <a:t>A aplicação pede os filmes. A API devolve uma resposta.</a:t>
             </a:r>
@@ -23295,7 +24011,10 @@
           <a:bodyPr/>
           <a:lstStyle/>
           <a:p>
-            <a:endParaRPr lang="pt-BR"/>
+            <a:endParaRPr lang="pt-BR">
+              <a:latin typeface="Times New Roman" panose="02020603050405020304" pitchFamily="18" charset="0"/>
+              <a:cs typeface="Times New Roman" panose="02020603050405020304" pitchFamily="18" charset="0"/>
+            </a:endParaRPr>
           </a:p>
         </p:txBody>
       </p:sp>
@@ -23449,9 +24168,8 @@
                 <a:solidFill>
                   <a:srgbClr val="043073"/>
                 </a:solidFill>
-                <a:latin typeface="Inter"/>
-                <a:ea typeface="Inter"/>
-                <a:cs typeface="Inter"/>
+                <a:latin typeface="Times New Roman" panose="02020603050405020304" pitchFamily="18" charset="0"/>
+                <a:cs typeface="Times New Roman" panose="02020603050405020304" pitchFamily="18" charset="0"/>
               </a:rPr>
               <a:t>Aplicação Dart</a:t>
             </a:r>
@@ -23608,9 +24326,8 @@
                 <a:solidFill>
                   <a:srgbClr val="272525"/>
                 </a:solidFill>
-                <a:latin typeface="Inter"/>
-                <a:ea typeface="Inter"/>
-                <a:cs typeface="Inter"/>
+                <a:latin typeface="Times New Roman" panose="02020603050405020304" pitchFamily="18" charset="0"/>
+                <a:cs typeface="Times New Roman" panose="02020603050405020304" pitchFamily="18" charset="0"/>
               </a:rPr>
               <a:t>Envia uma requisição GET.</a:t>
             </a:r>
@@ -23653,7 +24370,10 @@
           <a:bodyPr/>
           <a:lstStyle/>
           <a:p>
-            <a:endParaRPr lang="pt-BR"/>
+            <a:endParaRPr lang="pt-BR">
+              <a:latin typeface="Times New Roman" panose="02020603050405020304" pitchFamily="18" charset="0"/>
+              <a:cs typeface="Times New Roman" panose="02020603050405020304" pitchFamily="18" charset="0"/>
+            </a:endParaRPr>
           </a:p>
         </p:txBody>
       </p:sp>
@@ -23807,9 +24527,8 @@
                 <a:solidFill>
                   <a:srgbClr val="043073"/>
                 </a:solidFill>
-                <a:latin typeface="Inter"/>
-                <a:ea typeface="Inter"/>
-                <a:cs typeface="Inter"/>
+                <a:latin typeface="Times New Roman" panose="02020603050405020304" pitchFamily="18" charset="0"/>
+                <a:cs typeface="Times New Roman" panose="02020603050405020304" pitchFamily="18" charset="0"/>
               </a:rPr>
               <a:t>API de filmes</a:t>
             </a:r>
@@ -23966,9 +24685,8 @@
                 <a:solidFill>
                   <a:srgbClr val="272525"/>
                 </a:solidFill>
-                <a:latin typeface="Inter"/>
-                <a:ea typeface="Inter"/>
-                <a:cs typeface="Inter"/>
+                <a:latin typeface="Times New Roman" panose="02020603050405020304" pitchFamily="18" charset="0"/>
+                <a:cs typeface="Times New Roman" panose="02020603050405020304" pitchFamily="18" charset="0"/>
               </a:rPr>
               <a:t>Devolve status, cabeçalhos e conteúdo.</a:t>
             </a:r>
@@ -24011,7 +24729,10 @@
           <a:bodyPr/>
           <a:lstStyle/>
           <a:p>
-            <a:endParaRPr lang="pt-BR"/>
+            <a:endParaRPr lang="pt-BR">
+              <a:latin typeface="Times New Roman" panose="02020603050405020304" pitchFamily="18" charset="0"/>
+              <a:cs typeface="Times New Roman" panose="02020603050405020304" pitchFamily="18" charset="0"/>
+            </a:endParaRPr>
           </a:p>
         </p:txBody>
       </p:sp>
@@ -24165,9 +24886,8 @@
                 <a:solidFill>
                   <a:srgbClr val="272525"/>
                 </a:solidFill>
-                <a:latin typeface="Inter"/>
-                <a:ea typeface="Inter"/>
-                <a:cs typeface="Inter"/>
+                <a:latin typeface="Times New Roman" panose="02020603050405020304" pitchFamily="18" charset="0"/>
+                <a:cs typeface="Times New Roman" panose="02020603050405020304" pitchFamily="18" charset="0"/>
               </a:rPr>
               <a:t>Nossa tarefa: buscar os filmes e encontrar “Interestelar”.</a:t>
             </a:r>
@@ -24358,16 +25078,51 @@
               </a:defRPr>
             </a:pPr>
             <a:r>
-              <a:rPr sz="2400" b="1">
-                <a:solidFill>
-                  <a:srgbClr val="000000"/>
-                </a:solidFill>
-                <a:latin typeface="Inter"/>
-                <a:ea typeface="Inter"/>
-                <a:cs typeface="Inter"/>
+              <a:rPr dirty="0">
+                <a:latin typeface="Times New Roman" panose="02020603050405020304" pitchFamily="18" charset="0"/>
+                <a:cs typeface="Times New Roman" panose="02020603050405020304" pitchFamily="18" charset="0"/>
               </a:rPr>
-              <a:t>Na prática: aguardando a resposta</a:t>
-            </a:r>
+              <a:t>Na </a:t>
+            </a:r>
+            <a:r>
+              <a:rPr dirty="0" err="1">
+                <a:latin typeface="Times New Roman" panose="02020603050405020304" pitchFamily="18" charset="0"/>
+                <a:cs typeface="Times New Roman" panose="02020603050405020304" pitchFamily="18" charset="0"/>
+              </a:rPr>
+              <a:t>prática</a:t>
+            </a:r>
+            <a:r>
+              <a:rPr dirty="0">
+                <a:latin typeface="Times New Roman" panose="02020603050405020304" pitchFamily="18" charset="0"/>
+                <a:cs typeface="Times New Roman" panose="02020603050405020304" pitchFamily="18" charset="0"/>
+              </a:rPr>
+              <a:t>: </a:t>
+            </a:r>
+            <a:r>
+              <a:rPr dirty="0" err="1">
+                <a:latin typeface="Times New Roman" panose="02020603050405020304" pitchFamily="18" charset="0"/>
+                <a:cs typeface="Times New Roman" panose="02020603050405020304" pitchFamily="18" charset="0"/>
+              </a:rPr>
+              <a:t>aguardando</a:t>
+            </a:r>
+            <a:r>
+              <a:rPr dirty="0">
+                <a:latin typeface="Times New Roman" panose="02020603050405020304" pitchFamily="18" charset="0"/>
+                <a:cs typeface="Times New Roman" panose="02020603050405020304" pitchFamily="18" charset="0"/>
+              </a:rPr>
+              <a:t> a </a:t>
+            </a:r>
+            <a:r>
+              <a:rPr dirty="0" err="1">
+                <a:latin typeface="Times New Roman" panose="02020603050405020304" pitchFamily="18" charset="0"/>
+                <a:cs typeface="Times New Roman" panose="02020603050405020304" pitchFamily="18" charset="0"/>
+              </a:rPr>
+              <a:t>resposta</a:t>
+            </a:r>
+            <a:endParaRPr dirty="0">
+              <a:latin typeface="Times New Roman" panose="02020603050405020304" pitchFamily="18" charset="0"/>
+              <a:cs typeface="Times New Roman" panose="02020603050405020304" pitchFamily="18" charset="0"/>
+            </a:endParaRPr>
           </a:p>
         </p:txBody>
       </p:sp>
@@ -25073,15 +25828,154 @@
               </a:defRPr>
             </a:pPr>
             <a:r>
-              <a:rPr sz="1725" b="0">
-                <a:solidFill>
-                  <a:srgbClr val="272525"/>
-                </a:solidFill>
-                <a:latin typeface="Inter"/>
-                <a:ea typeface="Inter"/>
-                <a:cs typeface="Inter"/>
+              <a:rPr sz="1725" b="0" dirty="0">
+                <a:solidFill>
+                  <a:srgbClr val="272525"/>
+                </a:solidFill>
+                <a:latin typeface="Times New Roman" panose="02020603050405020304" pitchFamily="18" charset="0"/>
+                <a:cs typeface="Times New Roman" panose="02020603050405020304" pitchFamily="18" charset="0"/>
               </a:rPr>
-              <a:t>A próxima instrução da função só executa quando o await terminar.</a:t>
+              <a:t>A </a:t>
+            </a:r>
+            <a:r>
+              <a:rPr sz="1725" b="0" dirty="0" err="1">
+                <a:solidFill>
+                  <a:srgbClr val="272525"/>
+                </a:solidFill>
+                <a:latin typeface="Times New Roman" panose="02020603050405020304" pitchFamily="18" charset="0"/>
+                <a:cs typeface="Times New Roman" panose="02020603050405020304" pitchFamily="18" charset="0"/>
+              </a:rPr>
+              <a:t>próxima</a:t>
+            </a:r>
+            <a:r>
+              <a:rPr sz="1725" b="0" dirty="0">
+                <a:solidFill>
+                  <a:srgbClr val="272525"/>
+                </a:solidFill>
+                <a:latin typeface="Times New Roman" panose="02020603050405020304" pitchFamily="18" charset="0"/>
+                <a:cs typeface="Times New Roman" panose="02020603050405020304" pitchFamily="18" charset="0"/>
+              </a:rPr>
+              <a:t> </a:t>
+            </a:r>
+            <a:r>
+              <a:rPr sz="1725" b="0" dirty="0" err="1">
+                <a:solidFill>
+                  <a:srgbClr val="272525"/>
+                </a:solidFill>
+                <a:latin typeface="Times New Roman" panose="02020603050405020304" pitchFamily="18" charset="0"/>
+                <a:cs typeface="Times New Roman" panose="02020603050405020304" pitchFamily="18" charset="0"/>
+              </a:rPr>
+              <a:t>instrução</a:t>
+            </a:r>
+            <a:r>
+              <a:rPr sz="1725" b="0" dirty="0">
+                <a:solidFill>
+                  <a:srgbClr val="272525"/>
+                </a:solidFill>
+                <a:latin typeface="Times New Roman" panose="02020603050405020304" pitchFamily="18" charset="0"/>
+                <a:cs typeface="Times New Roman" panose="02020603050405020304" pitchFamily="18" charset="0"/>
+              </a:rPr>
+              <a:t> da </a:t>
+            </a:r>
+            <a:r>
+              <a:rPr sz="1725" b="0" dirty="0" err="1">
+                <a:solidFill>
+                  <a:srgbClr val="272525"/>
+                </a:solidFill>
+                <a:latin typeface="Times New Roman" panose="02020603050405020304" pitchFamily="18" charset="0"/>
+                <a:cs typeface="Times New Roman" panose="02020603050405020304" pitchFamily="18" charset="0"/>
+              </a:rPr>
+              <a:t>função</a:t>
+            </a:r>
+            <a:r>
+              <a:rPr sz="1725" b="0" dirty="0">
+                <a:solidFill>
+                  <a:srgbClr val="272525"/>
+                </a:solidFill>
+                <a:latin typeface="Times New Roman" panose="02020603050405020304" pitchFamily="18" charset="0"/>
+                <a:cs typeface="Times New Roman" panose="02020603050405020304" pitchFamily="18" charset="0"/>
+              </a:rPr>
+              <a:t> </a:t>
+            </a:r>
+            <a:r>
+              <a:rPr sz="1725" b="0" dirty="0" err="1">
+                <a:solidFill>
+                  <a:srgbClr val="272525"/>
+                </a:solidFill>
+                <a:latin typeface="Times New Roman" panose="02020603050405020304" pitchFamily="18" charset="0"/>
+                <a:cs typeface="Times New Roman" panose="02020603050405020304" pitchFamily="18" charset="0"/>
+              </a:rPr>
+              <a:t>só</a:t>
+            </a:r>
+            <a:r>
+              <a:rPr sz="1725" b="0" dirty="0">
+                <a:solidFill>
+                  <a:srgbClr val="272525"/>
+                </a:solidFill>
+                <a:latin typeface="Times New Roman" panose="02020603050405020304" pitchFamily="18" charset="0"/>
+                <a:cs typeface="Times New Roman" panose="02020603050405020304" pitchFamily="18" charset="0"/>
+              </a:rPr>
+              <a:t> </a:t>
+            </a:r>
+            <a:r>
+              <a:rPr sz="1725" b="0" dirty="0" err="1">
+                <a:solidFill>
+                  <a:srgbClr val="272525"/>
+                </a:solidFill>
+                <a:latin typeface="Times New Roman" panose="02020603050405020304" pitchFamily="18" charset="0"/>
+                <a:cs typeface="Times New Roman" panose="02020603050405020304" pitchFamily="18" charset="0"/>
+              </a:rPr>
+              <a:t>executa</a:t>
+            </a:r>
+            <a:r>
+              <a:rPr sz="1725" b="0" dirty="0">
+                <a:solidFill>
+                  <a:srgbClr val="272525"/>
+                </a:solidFill>
+                <a:latin typeface="Times New Roman" panose="02020603050405020304" pitchFamily="18" charset="0"/>
+                <a:cs typeface="Times New Roman" panose="02020603050405020304" pitchFamily="18" charset="0"/>
+              </a:rPr>
+              <a:t> </a:t>
+            </a:r>
+            <a:r>
+              <a:rPr sz="1725" b="0" dirty="0" err="1">
+                <a:solidFill>
+                  <a:srgbClr val="272525"/>
+                </a:solidFill>
+                <a:latin typeface="Times New Roman" panose="02020603050405020304" pitchFamily="18" charset="0"/>
+                <a:cs typeface="Times New Roman" panose="02020603050405020304" pitchFamily="18" charset="0"/>
+              </a:rPr>
+              <a:t>quando</a:t>
+            </a:r>
+            <a:r>
+              <a:rPr sz="1725" b="0" dirty="0">
+                <a:solidFill>
+                  <a:srgbClr val="272525"/>
+                </a:solidFill>
+                <a:latin typeface="Times New Roman" panose="02020603050405020304" pitchFamily="18" charset="0"/>
+                <a:cs typeface="Times New Roman" panose="02020603050405020304" pitchFamily="18" charset="0"/>
+              </a:rPr>
+              <a:t> o await </a:t>
+            </a:r>
+            <a:r>
+              <a:rPr sz="1725" b="0" dirty="0" err="1">
+                <a:solidFill>
+                  <a:srgbClr val="272525"/>
+                </a:solidFill>
+                <a:latin typeface="Times New Roman" panose="02020603050405020304" pitchFamily="18" charset="0"/>
+                <a:cs typeface="Times New Roman" panose="02020603050405020304" pitchFamily="18" charset="0"/>
+              </a:rPr>
+              <a:t>terminar</a:t>
+            </a:r>
+            <a:r>
+              <a:rPr sz="1725" b="0" dirty="0">
+                <a:solidFill>
+                  <a:srgbClr val="272525"/>
+                </a:solidFill>
+                <a:latin typeface="Times New Roman" panose="02020603050405020304" pitchFamily="18" charset="0"/>
+                <a:cs typeface="Times New Roman" panose="02020603050405020304" pitchFamily="18" charset="0"/>
+              </a:rPr>
+              <a:t>.</a:t>
             </a:r>
           </a:p>
         </p:txBody>
@@ -25270,16 +26164,23 @@
               </a:defRPr>
             </a:pPr>
             <a:r>
-              <a:rPr sz="2400" b="1">
-                <a:solidFill>
-                  <a:srgbClr val="000000"/>
-                </a:solidFill>
-                <a:latin typeface="Inter"/>
-                <a:ea typeface="Inter"/>
-                <a:cs typeface="Inter"/>
+              <a:rPr dirty="0">
+                <a:latin typeface="Times New Roman" panose="02020603050405020304" pitchFamily="18" charset="0"/>
+                <a:cs typeface="Times New Roman" panose="02020603050405020304" pitchFamily="18" charset="0"/>
               </a:rPr>
-              <a:t>.then() e await: duas formas de continuar</a:t>
-            </a:r>
+              <a:t>.then() e await: duas formas de </a:t>
+            </a:r>
+            <a:r>
+              <a:rPr dirty="0" err="1">
+                <a:latin typeface="Times New Roman" panose="02020603050405020304" pitchFamily="18" charset="0"/>
+                <a:cs typeface="Times New Roman" panose="02020603050405020304" pitchFamily="18" charset="0"/>
+              </a:rPr>
+              <a:t>continuar</a:t>
+            </a:r>
+            <a:endParaRPr dirty="0">
+              <a:latin typeface="Times New Roman" panose="02020603050405020304" pitchFamily="18" charset="0"/>
+              <a:cs typeface="Times New Roman" panose="02020603050405020304" pitchFamily="18" charset="0"/>
+            </a:endParaRPr>
           </a:p>
         </p:txBody>
       </p:sp>
@@ -25433,9 +26334,7 @@
                 <a:solidFill>
                   <a:srgbClr val="043073"/>
                 </a:solidFill>
-                <a:latin typeface="Inter"/>
-                <a:ea typeface="Inter"/>
-                <a:cs typeface="Inter"/>
+                <a:cs typeface="Times New Roman" panose="02020603050405020304" pitchFamily="18" charset="0"/>
               </a:rPr>
               <a:t>18</a:t>
             </a:r>
@@ -25592,11 +26491,50 @@
                 <a:solidFill>
                   <a:srgbClr val="272525"/>
                 </a:solidFill>
-                <a:latin typeface="Inter"/>
-                <a:ea typeface="Inter"/>
-                <a:cs typeface="Inter"/>
+                <a:latin typeface="Times New Roman" panose="02020603050405020304" pitchFamily="18" charset="0"/>
+                <a:cs typeface="Times New Roman" panose="02020603050405020304" pitchFamily="18" charset="0"/>
               </a:rPr>
-              <a:t>Ambos permitem usar o resultado de um Future.</a:t>
+              <a:t>Ambos </a:t>
+            </a:r>
+            <a:r>
+              <a:rPr sz="2100" b="0" dirty="0" err="1">
+                <a:solidFill>
+                  <a:srgbClr val="272525"/>
+                </a:solidFill>
+                <a:latin typeface="Times New Roman" panose="02020603050405020304" pitchFamily="18" charset="0"/>
+                <a:cs typeface="Times New Roman" panose="02020603050405020304" pitchFamily="18" charset="0"/>
+              </a:rPr>
+              <a:t>permitem</a:t>
+            </a:r>
+            <a:r>
+              <a:rPr sz="2100" b="0" dirty="0">
+                <a:solidFill>
+                  <a:srgbClr val="272525"/>
+                </a:solidFill>
+                <a:latin typeface="Times New Roman" panose="02020603050405020304" pitchFamily="18" charset="0"/>
+                <a:cs typeface="Times New Roman" panose="02020603050405020304" pitchFamily="18" charset="0"/>
+              </a:rPr>
+              <a:t> usar o </a:t>
+            </a:r>
+            <a:r>
+              <a:rPr sz="2100" b="0" dirty="0" err="1">
+                <a:solidFill>
+                  <a:srgbClr val="272525"/>
+                </a:solidFill>
+                <a:latin typeface="Times New Roman" panose="02020603050405020304" pitchFamily="18" charset="0"/>
+                <a:cs typeface="Times New Roman" panose="02020603050405020304" pitchFamily="18" charset="0"/>
+              </a:rPr>
+              <a:t>resultado</a:t>
+            </a:r>
+            <a:r>
+              <a:rPr sz="2100" b="0" dirty="0">
+                <a:solidFill>
+                  <a:srgbClr val="272525"/>
+                </a:solidFill>
+                <a:latin typeface="Times New Roman" panose="02020603050405020304" pitchFamily="18" charset="0"/>
+                <a:cs typeface="Times New Roman" panose="02020603050405020304" pitchFamily="18" charset="0"/>
+              </a:rPr>
+              <a:t> de um Future.</a:t>
             </a:r>
           </a:p>
         </p:txBody>
@@ -25831,9 +26769,7 @@
                 <a:solidFill>
                   <a:srgbClr val="043073"/>
                 </a:solidFill>
-                <a:latin typeface="Inter"/>
-                <a:ea typeface="Inter"/>
-                <a:cs typeface="Inter"/>
+                <a:cs typeface="Times New Roman" panose="02020603050405020304" pitchFamily="18" charset="0"/>
               </a:rPr>
               <a:t>.then()</a:t>
             </a:r>
@@ -25990,9 +26926,6 @@
                 <a:solidFill>
                   <a:srgbClr val="043073"/>
                 </a:solidFill>
-                <a:latin typeface="Courier New"/>
-                <a:ea typeface="Courier New"/>
-                <a:cs typeface="Courier New"/>
               </a:rPr>
               <a:t>get(uri).then((response) {</a:t>
             </a:r>
@@ -26013,9 +26946,6 @@
                 <a:solidFill>
                   <a:srgbClr val="043073"/>
                 </a:solidFill>
-                <a:latin typeface="Courier New"/>
-                <a:ea typeface="Courier New"/>
-                <a:cs typeface="Courier New"/>
               </a:rPr>
               <a:t>  print(response.body);</a:t>
             </a:r>
@@ -26036,9 +26966,6 @@
                 <a:solidFill>
                   <a:srgbClr val="043073"/>
                 </a:solidFill>
-                <a:latin typeface="Courier New"/>
-                <a:ea typeface="Courier New"/>
-                <a:cs typeface="Courier New"/>
               </a:rPr>
               <a:t>});</a:t>
             </a:r>
@@ -26195,9 +27122,7 @@
                 <a:solidFill>
                   <a:srgbClr val="043073"/>
                 </a:solidFill>
-                <a:latin typeface="Inter"/>
-                <a:ea typeface="Inter"/>
-                <a:cs typeface="Inter"/>
+                <a:cs typeface="Times New Roman" panose="02020603050405020304" pitchFamily="18" charset="0"/>
               </a:rPr>
               <a:t>await</a:t>
             </a:r>
@@ -26354,9 +27279,6 @@
                 <a:solidFill>
                   <a:srgbClr val="043073"/>
                 </a:solidFill>
-                <a:latin typeface="Courier New"/>
-                <a:ea typeface="Courier New"/>
-                <a:cs typeface="Courier New"/>
               </a:rPr>
               <a:t>Response response =</a:t>
             </a:r>
@@ -26377,9 +27299,6 @@
                 <a:solidFill>
                   <a:srgbClr val="043073"/>
                 </a:solidFill>
-                <a:latin typeface="Courier New"/>
-                <a:ea typeface="Courier New"/>
-                <a:cs typeface="Courier New"/>
               </a:rPr>
               <a:t>    await get(uri);</a:t>
             </a:r>
@@ -26400,9 +27319,6 @@
                 <a:solidFill>
                   <a:srgbClr val="043073"/>
                 </a:solidFill>
-                <a:latin typeface="Courier New"/>
-                <a:ea typeface="Courier New"/>
-                <a:cs typeface="Courier New"/>
               </a:rPr>
               <a:t>print(response.body);</a:t>
             </a:r>
@@ -26595,15 +27511,114 @@
               </a:defRPr>
             </a:pPr>
             <a:r>
-              <a:rPr sz="1725" b="0">
-                <a:solidFill>
-                  <a:srgbClr val="272525"/>
-                </a:solidFill>
-                <a:latin typeface="Inter"/>
-                <a:ea typeface="Inter"/>
-                <a:cs typeface="Inter"/>
+              <a:rPr sz="1725" b="0" dirty="0">
+                <a:solidFill>
+                  <a:srgbClr val="272525"/>
+                </a:solidFill>
+                <a:latin typeface="Times New Roman" panose="02020603050405020304" pitchFamily="18" charset="0"/>
+                <a:cs typeface="Times New Roman" panose="02020603050405020304" pitchFamily="18" charset="0"/>
               </a:rPr>
-              <a:t>Com await, o trecho fica dentro de uma função async.</a:t>
+              <a:t>Com await, o </a:t>
+            </a:r>
+            <a:r>
+              <a:rPr sz="1725" b="0" dirty="0" err="1">
+                <a:solidFill>
+                  <a:srgbClr val="272525"/>
+                </a:solidFill>
+                <a:latin typeface="Times New Roman" panose="02020603050405020304" pitchFamily="18" charset="0"/>
+                <a:cs typeface="Times New Roman" panose="02020603050405020304" pitchFamily="18" charset="0"/>
+              </a:rPr>
+              <a:t>trecho</a:t>
+            </a:r>
+            <a:r>
+              <a:rPr sz="1725" b="0" dirty="0">
+                <a:solidFill>
+                  <a:srgbClr val="272525"/>
+                </a:solidFill>
+                <a:latin typeface="Times New Roman" panose="02020603050405020304" pitchFamily="18" charset="0"/>
+                <a:cs typeface="Times New Roman" panose="02020603050405020304" pitchFamily="18" charset="0"/>
+              </a:rPr>
+              <a:t> </a:t>
+            </a:r>
+            <a:r>
+              <a:rPr sz="1725" b="0" dirty="0" err="1">
+                <a:solidFill>
+                  <a:srgbClr val="272525"/>
+                </a:solidFill>
+                <a:latin typeface="Times New Roman" panose="02020603050405020304" pitchFamily="18" charset="0"/>
+                <a:cs typeface="Times New Roman" panose="02020603050405020304" pitchFamily="18" charset="0"/>
+              </a:rPr>
+              <a:t>fica</a:t>
+            </a:r>
+            <a:r>
+              <a:rPr sz="1725" b="0" dirty="0">
+                <a:solidFill>
+                  <a:srgbClr val="272525"/>
+                </a:solidFill>
+                <a:latin typeface="Times New Roman" panose="02020603050405020304" pitchFamily="18" charset="0"/>
+                <a:cs typeface="Times New Roman" panose="02020603050405020304" pitchFamily="18" charset="0"/>
+              </a:rPr>
+              <a:t> </a:t>
+            </a:r>
+            <a:r>
+              <a:rPr sz="1725" b="0" dirty="0" err="1">
+                <a:solidFill>
+                  <a:srgbClr val="272525"/>
+                </a:solidFill>
+                <a:latin typeface="Times New Roman" panose="02020603050405020304" pitchFamily="18" charset="0"/>
+                <a:cs typeface="Times New Roman" panose="02020603050405020304" pitchFamily="18" charset="0"/>
+              </a:rPr>
+              <a:t>dentro</a:t>
+            </a:r>
+            <a:r>
+              <a:rPr sz="1725" b="0" dirty="0">
+                <a:solidFill>
+                  <a:srgbClr val="272525"/>
+                </a:solidFill>
+                <a:latin typeface="Times New Roman" panose="02020603050405020304" pitchFamily="18" charset="0"/>
+                <a:cs typeface="Times New Roman" panose="02020603050405020304" pitchFamily="18" charset="0"/>
+              </a:rPr>
+              <a:t> de </a:t>
+            </a:r>
+            <a:r>
+              <a:rPr sz="1725" b="0" dirty="0" err="1">
+                <a:solidFill>
+                  <a:srgbClr val="272525"/>
+                </a:solidFill>
+                <a:latin typeface="Times New Roman" panose="02020603050405020304" pitchFamily="18" charset="0"/>
+                <a:cs typeface="Times New Roman" panose="02020603050405020304" pitchFamily="18" charset="0"/>
+              </a:rPr>
+              <a:t>uma</a:t>
+            </a:r>
+            <a:r>
+              <a:rPr sz="1725" b="0" dirty="0">
+                <a:solidFill>
+                  <a:srgbClr val="272525"/>
+                </a:solidFill>
+                <a:latin typeface="Times New Roman" panose="02020603050405020304" pitchFamily="18" charset="0"/>
+                <a:cs typeface="Times New Roman" panose="02020603050405020304" pitchFamily="18" charset="0"/>
+              </a:rPr>
+              <a:t> </a:t>
+            </a:r>
+            <a:r>
+              <a:rPr sz="1725" b="0" dirty="0" err="1">
+                <a:solidFill>
+                  <a:srgbClr val="272525"/>
+                </a:solidFill>
+                <a:latin typeface="Times New Roman" panose="02020603050405020304" pitchFamily="18" charset="0"/>
+                <a:cs typeface="Times New Roman" panose="02020603050405020304" pitchFamily="18" charset="0"/>
+              </a:rPr>
+              <a:t>função</a:t>
+            </a:r>
+            <a:r>
+              <a:rPr sz="1725" b="0" dirty="0">
+                <a:solidFill>
+                  <a:srgbClr val="272525"/>
+                </a:solidFill>
+                <a:latin typeface="Times New Roman" panose="02020603050405020304" pitchFamily="18" charset="0"/>
+                <a:cs typeface="Times New Roman" panose="02020603050405020304" pitchFamily="18" charset="0"/>
+              </a:rPr>
+              <a:t> async.</a:t>
             </a:r>
           </a:p>
         </p:txBody>
@@ -26792,15 +27807,25 @@
               </a:defRPr>
             </a:pPr>
             <a:r>
-              <a:rPr sz="2400" b="1">
-                <a:solidFill>
-                  <a:srgbClr val="000000"/>
-                </a:solidFill>
-                <a:latin typeface="Inter"/>
-                <a:ea typeface="Inter"/>
-                <a:cs typeface="Inter"/>
+              <a:rPr dirty="0">
+                <a:latin typeface="Times New Roman" panose="02020603050405020304" pitchFamily="18" charset="0"/>
+                <a:cs typeface="Times New Roman" panose="02020603050405020304" pitchFamily="18" charset="0"/>
               </a:rPr>
-              <a:t>A chamada no main()</a:t>
+              <a:t>A </a:t>
+            </a:r>
+            <a:r>
+              <a:rPr dirty="0" err="1">
+                <a:latin typeface="Times New Roman" panose="02020603050405020304" pitchFamily="18" charset="0"/>
+                <a:cs typeface="Times New Roman" panose="02020603050405020304" pitchFamily="18" charset="0"/>
+              </a:rPr>
+              <a:t>chamada</a:t>
+            </a:r>
+            <a:r>
+              <a:rPr dirty="0">
+                <a:latin typeface="Times New Roman" panose="02020603050405020304" pitchFamily="18" charset="0"/>
+                <a:cs typeface="Times New Roman" panose="02020603050405020304" pitchFamily="18" charset="0"/>
+              </a:rPr>
+              <a:t> no main()</a:t>
             </a:r>
           </a:p>
         </p:txBody>
@@ -27110,15 +28135,174 @@
               </a:defRPr>
             </a:pPr>
             <a:r>
-              <a:rPr sz="2100" b="0">
-                <a:solidFill>
-                  <a:srgbClr val="272525"/>
-                </a:solidFill>
-                <a:latin typeface="Inter"/>
-                <a:ea typeface="Inter"/>
-                <a:cs typeface="Inter"/>
+              <a:rPr sz="2100" b="0" dirty="0">
+                <a:solidFill>
+                  <a:srgbClr val="272525"/>
+                </a:solidFill>
+                <a:latin typeface="Times New Roman" panose="02020603050405020304" pitchFamily="18" charset="0"/>
+                <a:cs typeface="Times New Roman" panose="02020603050405020304" pitchFamily="18" charset="0"/>
               </a:rPr>
-              <a:t>Quem chama uma função assíncrona também pode aguardar seu resultado.</a:t>
+              <a:t>Quem chama </a:t>
+            </a:r>
+            <a:r>
+              <a:rPr sz="2100" b="0" dirty="0" err="1">
+                <a:solidFill>
+                  <a:srgbClr val="272525"/>
+                </a:solidFill>
+                <a:latin typeface="Times New Roman" panose="02020603050405020304" pitchFamily="18" charset="0"/>
+                <a:cs typeface="Times New Roman" panose="02020603050405020304" pitchFamily="18" charset="0"/>
+              </a:rPr>
+              <a:t>uma</a:t>
+            </a:r>
+            <a:r>
+              <a:rPr sz="2100" b="0" dirty="0">
+                <a:solidFill>
+                  <a:srgbClr val="272525"/>
+                </a:solidFill>
+                <a:latin typeface="Times New Roman" panose="02020603050405020304" pitchFamily="18" charset="0"/>
+                <a:cs typeface="Times New Roman" panose="02020603050405020304" pitchFamily="18" charset="0"/>
+              </a:rPr>
+              <a:t> </a:t>
+            </a:r>
+            <a:r>
+              <a:rPr sz="2100" b="0" dirty="0" err="1">
+                <a:solidFill>
+                  <a:srgbClr val="272525"/>
+                </a:solidFill>
+                <a:latin typeface="Times New Roman" panose="02020603050405020304" pitchFamily="18" charset="0"/>
+                <a:cs typeface="Times New Roman" panose="02020603050405020304" pitchFamily="18" charset="0"/>
+              </a:rPr>
+              <a:t>função</a:t>
+            </a:r>
+            <a:r>
+              <a:rPr sz="2100" b="0" dirty="0">
+                <a:solidFill>
+                  <a:srgbClr val="272525"/>
+                </a:solidFill>
+                <a:latin typeface="Times New Roman" panose="02020603050405020304" pitchFamily="18" charset="0"/>
+                <a:cs typeface="Times New Roman" panose="02020603050405020304" pitchFamily="18" charset="0"/>
+              </a:rPr>
+              <a:t> </a:t>
+            </a:r>
+            <a:r>
+              <a:rPr sz="2100" b="0" dirty="0" err="1">
+                <a:solidFill>
+                  <a:srgbClr val="272525"/>
+                </a:solidFill>
+                <a:latin typeface="Times New Roman" panose="02020603050405020304" pitchFamily="18" charset="0"/>
+                <a:cs typeface="Times New Roman" panose="02020603050405020304" pitchFamily="18" charset="0"/>
+              </a:rPr>
+              <a:t>assíncrona</a:t>
+            </a:r>
+            <a:r>
+              <a:rPr sz="2100" b="0" dirty="0">
+                <a:solidFill>
+                  <a:srgbClr val="272525"/>
+                </a:solidFill>
+                <a:latin typeface="Times New Roman" panose="02020603050405020304" pitchFamily="18" charset="0"/>
+                <a:cs typeface="Times New Roman" panose="02020603050405020304" pitchFamily="18" charset="0"/>
+              </a:rPr>
+              <a:t> </a:t>
+            </a:r>
+            <a:r>
+              <a:rPr sz="2100" b="0" dirty="0" err="1">
+                <a:solidFill>
+                  <a:srgbClr val="272525"/>
+                </a:solidFill>
+                <a:latin typeface="Times New Roman" panose="02020603050405020304" pitchFamily="18" charset="0"/>
+                <a:cs typeface="Times New Roman" panose="02020603050405020304" pitchFamily="18" charset="0"/>
+              </a:rPr>
+              <a:t>também</a:t>
+            </a:r>
+            <a:r>
+              <a:rPr sz="2100" b="0" dirty="0">
+                <a:solidFill>
+                  <a:srgbClr val="272525"/>
+                </a:solidFill>
+                <a:latin typeface="Times New Roman" panose="02020603050405020304" pitchFamily="18" charset="0"/>
+                <a:cs typeface="Times New Roman" panose="02020603050405020304" pitchFamily="18" charset="0"/>
+              </a:rPr>
+              <a:t> </a:t>
+            </a:r>
+            <a:r>
+              <a:rPr sz="2100" b="0" dirty="0" err="1">
+                <a:solidFill>
+                  <a:srgbClr val="272525"/>
+                </a:solidFill>
+                <a:latin typeface="Times New Roman" panose="02020603050405020304" pitchFamily="18" charset="0"/>
+                <a:cs typeface="Times New Roman" panose="02020603050405020304" pitchFamily="18" charset="0"/>
+              </a:rPr>
+              <a:t>pode</a:t>
+            </a:r>
+            <a:r>
+              <a:rPr sz="2100" b="0" dirty="0">
+                <a:solidFill>
+                  <a:srgbClr val="272525"/>
+                </a:solidFill>
+                <a:latin typeface="Times New Roman" panose="02020603050405020304" pitchFamily="18" charset="0"/>
+                <a:cs typeface="Times New Roman" panose="02020603050405020304" pitchFamily="18" charset="0"/>
+              </a:rPr>
+              <a:t> </a:t>
+            </a:r>
+            <a:r>
+              <a:rPr sz="2100" b="0" dirty="0" err="1">
+                <a:solidFill>
+                  <a:srgbClr val="272525"/>
+                </a:solidFill>
+                <a:latin typeface="Times New Roman" panose="02020603050405020304" pitchFamily="18" charset="0"/>
+                <a:cs typeface="Times New Roman" panose="02020603050405020304" pitchFamily="18" charset="0"/>
+              </a:rPr>
+              <a:t>aguardar</a:t>
+            </a:r>
+            <a:r>
+              <a:rPr sz="2100" b="0" dirty="0">
+                <a:solidFill>
+                  <a:srgbClr val="272525"/>
+                </a:solidFill>
+                <a:latin typeface="Times New Roman" panose="02020603050405020304" pitchFamily="18" charset="0"/>
+                <a:cs typeface="Times New Roman" panose="02020603050405020304" pitchFamily="18" charset="0"/>
+              </a:rPr>
+              <a:t> </a:t>
+            </a:r>
+            <a:r>
+              <a:rPr sz="2100" b="0" dirty="0" err="1">
+                <a:solidFill>
+                  <a:srgbClr val="272525"/>
+                </a:solidFill>
+                <a:latin typeface="Times New Roman" panose="02020603050405020304" pitchFamily="18" charset="0"/>
+                <a:cs typeface="Times New Roman" panose="02020603050405020304" pitchFamily="18" charset="0"/>
+              </a:rPr>
+              <a:t>seu</a:t>
+            </a:r>
+            <a:r>
+              <a:rPr sz="2100" b="0" dirty="0">
+                <a:solidFill>
+                  <a:srgbClr val="272525"/>
+                </a:solidFill>
+                <a:latin typeface="Times New Roman" panose="02020603050405020304" pitchFamily="18" charset="0"/>
+                <a:cs typeface="Times New Roman" panose="02020603050405020304" pitchFamily="18" charset="0"/>
+              </a:rPr>
+              <a:t> </a:t>
+            </a:r>
+            <a:r>
+              <a:rPr sz="2100" b="0" dirty="0" err="1">
+                <a:solidFill>
+                  <a:srgbClr val="272525"/>
+                </a:solidFill>
+                <a:latin typeface="Times New Roman" panose="02020603050405020304" pitchFamily="18" charset="0"/>
+                <a:cs typeface="Times New Roman" panose="02020603050405020304" pitchFamily="18" charset="0"/>
+              </a:rPr>
+              <a:t>resultado</a:t>
+            </a:r>
+            <a:r>
+              <a:rPr sz="2100" b="0" dirty="0">
+                <a:solidFill>
+                  <a:srgbClr val="272525"/>
+                </a:solidFill>
+                <a:latin typeface="Times New Roman" panose="02020603050405020304" pitchFamily="18" charset="0"/>
+                <a:cs typeface="Times New Roman" panose="02020603050405020304" pitchFamily="18" charset="0"/>
+              </a:rPr>
+              <a:t>.</a:t>
             </a:r>
           </a:p>
         </p:txBody>
@@ -27577,15 +28761,94 @@
               </a:defRPr>
             </a:pPr>
             <a:r>
-              <a:rPr sz="1725" b="0">
-                <a:solidFill>
-                  <a:srgbClr val="272525"/>
-                </a:solidFill>
-                <a:latin typeface="Inter"/>
-                <a:ea typeface="Inter"/>
-                <a:cs typeface="Inter"/>
+              <a:rPr sz="1725" b="0" dirty="0">
+                <a:solidFill>
+                  <a:srgbClr val="272525"/>
+                </a:solidFill>
+                <a:latin typeface="Times New Roman" panose="02020603050405020304" pitchFamily="18" charset="0"/>
+                <a:cs typeface="Times New Roman" panose="02020603050405020304" pitchFamily="18" charset="0"/>
               </a:rPr>
-              <a:t>Sem await na chamada, main continua enquanto a consulta está pendente.</a:t>
+              <a:t>Sem await </a:t>
+            </a:r>
+            <a:r>
+              <a:rPr sz="1725" b="0" dirty="0" err="1">
+                <a:solidFill>
+                  <a:srgbClr val="272525"/>
+                </a:solidFill>
+                <a:latin typeface="Times New Roman" panose="02020603050405020304" pitchFamily="18" charset="0"/>
+                <a:cs typeface="Times New Roman" panose="02020603050405020304" pitchFamily="18" charset="0"/>
+              </a:rPr>
+              <a:t>na</a:t>
+            </a:r>
+            <a:r>
+              <a:rPr sz="1725" b="0" dirty="0">
+                <a:solidFill>
+                  <a:srgbClr val="272525"/>
+                </a:solidFill>
+                <a:latin typeface="Times New Roman" panose="02020603050405020304" pitchFamily="18" charset="0"/>
+                <a:cs typeface="Times New Roman" panose="02020603050405020304" pitchFamily="18" charset="0"/>
+              </a:rPr>
+              <a:t> </a:t>
+            </a:r>
+            <a:r>
+              <a:rPr sz="1725" b="0" dirty="0" err="1">
+                <a:solidFill>
+                  <a:srgbClr val="272525"/>
+                </a:solidFill>
+                <a:latin typeface="Times New Roman" panose="02020603050405020304" pitchFamily="18" charset="0"/>
+                <a:cs typeface="Times New Roman" panose="02020603050405020304" pitchFamily="18" charset="0"/>
+              </a:rPr>
+              <a:t>chamada</a:t>
+            </a:r>
+            <a:r>
+              <a:rPr sz="1725" b="0" dirty="0">
+                <a:solidFill>
+                  <a:srgbClr val="272525"/>
+                </a:solidFill>
+                <a:latin typeface="Times New Roman" panose="02020603050405020304" pitchFamily="18" charset="0"/>
+                <a:cs typeface="Times New Roman" panose="02020603050405020304" pitchFamily="18" charset="0"/>
+              </a:rPr>
+              <a:t>, main continua </a:t>
+            </a:r>
+            <a:r>
+              <a:rPr sz="1725" b="0" dirty="0" err="1">
+                <a:solidFill>
+                  <a:srgbClr val="272525"/>
+                </a:solidFill>
+                <a:latin typeface="Times New Roman" panose="02020603050405020304" pitchFamily="18" charset="0"/>
+                <a:cs typeface="Times New Roman" panose="02020603050405020304" pitchFamily="18" charset="0"/>
+              </a:rPr>
+              <a:t>enquanto</a:t>
+            </a:r>
+            <a:r>
+              <a:rPr sz="1725" b="0" dirty="0">
+                <a:solidFill>
+                  <a:srgbClr val="272525"/>
+                </a:solidFill>
+                <a:latin typeface="Times New Roman" panose="02020603050405020304" pitchFamily="18" charset="0"/>
+                <a:cs typeface="Times New Roman" panose="02020603050405020304" pitchFamily="18" charset="0"/>
+              </a:rPr>
+              <a:t> a consulta </a:t>
+            </a:r>
+            <a:r>
+              <a:rPr sz="1725" b="0" dirty="0" err="1">
+                <a:solidFill>
+                  <a:srgbClr val="272525"/>
+                </a:solidFill>
+                <a:latin typeface="Times New Roman" panose="02020603050405020304" pitchFamily="18" charset="0"/>
+                <a:cs typeface="Times New Roman" panose="02020603050405020304" pitchFamily="18" charset="0"/>
+              </a:rPr>
+              <a:t>está</a:t>
+            </a:r>
+            <a:r>
+              <a:rPr sz="1725" b="0" dirty="0">
+                <a:solidFill>
+                  <a:srgbClr val="272525"/>
+                </a:solidFill>
+                <a:latin typeface="Times New Roman" panose="02020603050405020304" pitchFamily="18" charset="0"/>
+                <a:cs typeface="Times New Roman" panose="02020603050405020304" pitchFamily="18" charset="0"/>
+              </a:rPr>
+              <a:t> pendente.</a:t>
             </a:r>
           </a:p>
         </p:txBody>
@@ -27774,15 +29037,39 @@
               </a:defRPr>
             </a:pPr>
             <a:r>
-              <a:rPr sz="2400" b="1">
-                <a:solidFill>
-                  <a:srgbClr val="000000"/>
-                </a:solidFill>
-                <a:latin typeface="Inter"/>
-                <a:ea typeface="Inter"/>
-                <a:cs typeface="Inter"/>
+              <a:rPr dirty="0">
+                <a:latin typeface="Times New Roman" panose="02020603050405020304" pitchFamily="18" charset="0"/>
+                <a:cs typeface="Times New Roman" panose="02020603050405020304" pitchFamily="18" charset="0"/>
               </a:rPr>
-              <a:t>O caminho completo dos dados</a:t>
+              <a:t>O </a:t>
+            </a:r>
+            <a:r>
+              <a:rPr dirty="0" err="1">
+                <a:latin typeface="Times New Roman" panose="02020603050405020304" pitchFamily="18" charset="0"/>
+                <a:cs typeface="Times New Roman" panose="02020603050405020304" pitchFamily="18" charset="0"/>
+              </a:rPr>
+              <a:t>caminho</a:t>
+            </a:r>
+            <a:r>
+              <a:rPr dirty="0">
+                <a:latin typeface="Times New Roman" panose="02020603050405020304" pitchFamily="18" charset="0"/>
+                <a:cs typeface="Times New Roman" panose="02020603050405020304" pitchFamily="18" charset="0"/>
+              </a:rPr>
+              <a:t> </a:t>
+            </a:r>
+            <a:r>
+              <a:rPr dirty="0" err="1">
+                <a:latin typeface="Times New Roman" panose="02020603050405020304" pitchFamily="18" charset="0"/>
+                <a:cs typeface="Times New Roman" panose="02020603050405020304" pitchFamily="18" charset="0"/>
+              </a:rPr>
+              <a:t>completo</a:t>
+            </a:r>
+            <a:r>
+              <a:rPr dirty="0">
+                <a:latin typeface="Times New Roman" panose="02020603050405020304" pitchFamily="18" charset="0"/>
+                <a:cs typeface="Times New Roman" panose="02020603050405020304" pitchFamily="18" charset="0"/>
+              </a:rPr>
+              <a:t> dos dados</a:t>
             </a:r>
           </a:p>
         </p:txBody>
@@ -27937,9 +29224,8 @@
                 <a:solidFill>
                   <a:srgbClr val="043073"/>
                 </a:solidFill>
-                <a:latin typeface="Inter"/>
-                <a:ea typeface="Inter"/>
-                <a:cs typeface="Inter"/>
+                <a:latin typeface="Times New Roman" panose="02020603050405020304" pitchFamily="18" charset="0"/>
+                <a:cs typeface="Times New Roman" panose="02020603050405020304" pitchFamily="18" charset="0"/>
               </a:rPr>
               <a:t>20</a:t>
             </a:r>
@@ -28096,9 +29382,8 @@
                 <a:solidFill>
                   <a:srgbClr val="043073"/>
                 </a:solidFill>
-                <a:latin typeface="Inter"/>
-                <a:ea typeface="Inter"/>
-                <a:cs typeface="Inter"/>
+                <a:latin typeface="Times New Roman" panose="02020603050405020304" pitchFamily="18" charset="0"/>
+                <a:cs typeface="Times New Roman" panose="02020603050405020304" pitchFamily="18" charset="0"/>
               </a:rPr>
               <a:t>1</a:t>
             </a:r>
@@ -28255,9 +29540,8 @@
                 <a:solidFill>
                   <a:srgbClr val="043073"/>
                 </a:solidFill>
-                <a:latin typeface="Inter"/>
-                <a:ea typeface="Inter"/>
-                <a:cs typeface="Inter"/>
+                <a:latin typeface="Times New Roman" panose="02020603050405020304" pitchFamily="18" charset="0"/>
+                <a:cs typeface="Times New Roman" panose="02020603050405020304" pitchFamily="18" charset="0"/>
               </a:rPr>
               <a:t>Uri.parse(url)</a:t>
             </a:r>
@@ -28414,9 +29698,8 @@
                 <a:solidFill>
                   <a:srgbClr val="272525"/>
                 </a:solidFill>
-                <a:latin typeface="Inter"/>
-                <a:ea typeface="Inter"/>
-                <a:cs typeface="Inter"/>
+                <a:latin typeface="Times New Roman" panose="02020603050405020304" pitchFamily="18" charset="0"/>
+                <a:cs typeface="Times New Roman" panose="02020603050405020304" pitchFamily="18" charset="0"/>
               </a:rPr>
               <a:t>Prepara o endereço</a:t>
             </a:r>
@@ -28573,9 +29856,8 @@
                 <a:solidFill>
                   <a:srgbClr val="043073"/>
                 </a:solidFill>
-                <a:latin typeface="Inter"/>
-                <a:ea typeface="Inter"/>
-                <a:cs typeface="Inter"/>
+                <a:latin typeface="Times New Roman" panose="02020603050405020304" pitchFamily="18" charset="0"/>
+                <a:cs typeface="Times New Roman" panose="02020603050405020304" pitchFamily="18" charset="0"/>
               </a:rPr>
               <a:t>2</a:t>
             </a:r>
@@ -28732,9 +30014,8 @@
                 <a:solidFill>
                   <a:srgbClr val="043073"/>
                 </a:solidFill>
-                <a:latin typeface="Inter"/>
-                <a:ea typeface="Inter"/>
-                <a:cs typeface="Inter"/>
+                <a:latin typeface="Times New Roman" panose="02020603050405020304" pitchFamily="18" charset="0"/>
+                <a:cs typeface="Times New Roman" panose="02020603050405020304" pitchFamily="18" charset="0"/>
               </a:rPr>
               <a:t>get(...)</a:t>
             </a:r>
@@ -28891,9 +30172,8 @@
                 <a:solidFill>
                   <a:srgbClr val="272525"/>
                 </a:solidFill>
-                <a:latin typeface="Inter"/>
-                <a:ea typeface="Inter"/>
-                <a:cs typeface="Inter"/>
+                <a:latin typeface="Times New Roman" panose="02020603050405020304" pitchFamily="18" charset="0"/>
+                <a:cs typeface="Times New Roman" panose="02020603050405020304" pitchFamily="18" charset="0"/>
               </a:rPr>
               <a:t>Inicia a requisição</a:t>
             </a:r>
@@ -29050,9 +30330,8 @@
                 <a:solidFill>
                   <a:srgbClr val="043073"/>
                 </a:solidFill>
-                <a:latin typeface="Inter"/>
-                <a:ea typeface="Inter"/>
-                <a:cs typeface="Inter"/>
+                <a:latin typeface="Times New Roman" panose="02020603050405020304" pitchFamily="18" charset="0"/>
+                <a:cs typeface="Times New Roman" panose="02020603050405020304" pitchFamily="18" charset="0"/>
               </a:rPr>
               <a:t>3</a:t>
             </a:r>
@@ -29209,9 +30488,8 @@
                 <a:solidFill>
                   <a:srgbClr val="043073"/>
                 </a:solidFill>
-                <a:latin typeface="Inter"/>
-                <a:ea typeface="Inter"/>
-                <a:cs typeface="Inter"/>
+                <a:latin typeface="Times New Roman" panose="02020603050405020304" pitchFamily="18" charset="0"/>
+                <a:cs typeface="Times New Roman" panose="02020603050405020304" pitchFamily="18" charset="0"/>
               </a:rPr>
               <a:t>then ou await</a:t>
             </a:r>
@@ -29368,9 +30646,8 @@
                 <a:solidFill>
                   <a:srgbClr val="272525"/>
                 </a:solidFill>
-                <a:latin typeface="Inter"/>
-                <a:ea typeface="Inter"/>
-                <a:cs typeface="Inter"/>
+                <a:latin typeface="Times New Roman" panose="02020603050405020304" pitchFamily="18" charset="0"/>
+                <a:cs typeface="Times New Roman" panose="02020603050405020304" pitchFamily="18" charset="0"/>
               </a:rPr>
               <a:t>Obtém a resposta</a:t>
             </a:r>
@@ -29527,9 +30804,8 @@
                 <a:solidFill>
                   <a:srgbClr val="043073"/>
                 </a:solidFill>
-                <a:latin typeface="Inter"/>
-                <a:ea typeface="Inter"/>
-                <a:cs typeface="Inter"/>
+                <a:latin typeface="Times New Roman" panose="02020603050405020304" pitchFamily="18" charset="0"/>
+                <a:cs typeface="Times New Roman" panose="02020603050405020304" pitchFamily="18" charset="0"/>
               </a:rPr>
               <a:t>4</a:t>
             </a:r>
@@ -29686,9 +30962,8 @@
                 <a:solidFill>
                   <a:srgbClr val="043073"/>
                 </a:solidFill>
-                <a:latin typeface="Inter"/>
-                <a:ea typeface="Inter"/>
-                <a:cs typeface="Inter"/>
+                <a:latin typeface="Times New Roman" panose="02020603050405020304" pitchFamily="18" charset="0"/>
+                <a:cs typeface="Times New Roman" panose="02020603050405020304" pitchFamily="18" charset="0"/>
               </a:rPr>
               <a:t>json.decode(...)</a:t>
             </a:r>
@@ -29845,9 +31120,8 @@
                 <a:solidFill>
                   <a:srgbClr val="272525"/>
                 </a:solidFill>
-                <a:latin typeface="Inter"/>
-                <a:ea typeface="Inter"/>
-                <a:cs typeface="Inter"/>
+                <a:latin typeface="Times New Roman" panose="02020603050405020304" pitchFamily="18" charset="0"/>
+                <a:cs typeface="Times New Roman" panose="02020603050405020304" pitchFamily="18" charset="0"/>
               </a:rPr>
               <a:t>Interpreta o texto</a:t>
             </a:r>
@@ -30004,9 +31278,8 @@
                 <a:solidFill>
                   <a:srgbClr val="043073"/>
                 </a:solidFill>
-                <a:latin typeface="Inter"/>
-                <a:ea typeface="Inter"/>
-                <a:cs typeface="Inter"/>
+                <a:latin typeface="Times New Roman" panose="02020603050405020304" pitchFamily="18" charset="0"/>
+                <a:cs typeface="Times New Roman" panose="02020603050405020304" pitchFamily="18" charset="0"/>
               </a:rPr>
               <a:t>5</a:t>
             </a:r>
@@ -30163,9 +31436,8 @@
                 <a:solidFill>
                   <a:srgbClr val="043073"/>
                 </a:solidFill>
-                <a:latin typeface="Inter"/>
-                <a:ea typeface="Inter"/>
-                <a:cs typeface="Inter"/>
+                <a:latin typeface="Times New Roman" panose="02020603050405020304" pitchFamily="18" charset="0"/>
+                <a:cs typeface="Times New Roman" panose="02020603050405020304" pitchFamily="18" charset="0"/>
               </a:rPr>
               <a:t>firstWhere(...)</a:t>
             </a:r>
@@ -30322,9 +31594,8 @@
                 <a:solidFill>
                   <a:srgbClr val="272525"/>
                 </a:solidFill>
-                <a:latin typeface="Inter"/>
-                <a:ea typeface="Inter"/>
-                <a:cs typeface="Inter"/>
+                <a:latin typeface="Times New Roman" panose="02020603050405020304" pitchFamily="18" charset="0"/>
+                <a:cs typeface="Times New Roman" panose="02020603050405020304" pitchFamily="18" charset="0"/>
               </a:rPr>
               <a:t>Encontra o filme</a:t>
             </a:r>
@@ -30481,9 +31752,8 @@
                 <a:solidFill>
                   <a:srgbClr val="043073"/>
                 </a:solidFill>
-                <a:latin typeface="Inter"/>
-                <a:ea typeface="Inter"/>
-                <a:cs typeface="Inter"/>
+                <a:latin typeface="Times New Roman" panose="02020603050405020304" pitchFamily="18" charset="0"/>
+                <a:cs typeface="Times New Roman" panose="02020603050405020304" pitchFamily="18" charset="0"/>
               </a:rPr>
               <a:t>6</a:t>
             </a:r>
@@ -30640,9 +31910,8 @@
                 <a:solidFill>
                   <a:srgbClr val="043073"/>
                 </a:solidFill>
-                <a:latin typeface="Inter"/>
-                <a:ea typeface="Inter"/>
-                <a:cs typeface="Inter"/>
+                <a:latin typeface="Times New Roman" panose="02020603050405020304" pitchFamily="18" charset="0"/>
+                <a:cs typeface="Times New Roman" panose="02020603050405020304" pitchFamily="18" charset="0"/>
               </a:rPr>
               <a:t>print(...)</a:t>
             </a:r>
@@ -30799,9 +32068,8 @@
                 <a:solidFill>
                   <a:srgbClr val="272525"/>
                 </a:solidFill>
-                <a:latin typeface="Inter"/>
-                <a:ea typeface="Inter"/>
-                <a:cs typeface="Inter"/>
+                <a:latin typeface="Times New Roman" panose="02020603050405020304" pitchFamily="18" charset="0"/>
+                <a:cs typeface="Times New Roman" panose="02020603050405020304" pitchFamily="18" charset="0"/>
               </a:rPr>
               <a:t>Mostra a duração</a:t>
             </a:r>
@@ -30992,15 +32260,32 @@
               </a:defRPr>
             </a:pPr>
             <a:r>
-              <a:rPr sz="2400" b="1">
-                <a:solidFill>
-                  <a:srgbClr val="000000"/>
-                </a:solidFill>
-                <a:latin typeface="Inter"/>
-                <a:ea typeface="Inter"/>
-                <a:cs typeface="Inter"/>
+              <a:rPr dirty="0" err="1">
+                <a:latin typeface="Times New Roman" panose="02020603050405020304" pitchFamily="18" charset="0"/>
+                <a:cs typeface="Times New Roman" panose="02020603050405020304" pitchFamily="18" charset="0"/>
               </a:rPr>
-              <a:t>Cuidados antes de usar os dados</a:t>
+              <a:t>Cuidados</a:t>
+            </a:r>
+            <a:r>
+              <a:rPr dirty="0">
+                <a:latin typeface="Times New Roman" panose="02020603050405020304" pitchFamily="18" charset="0"/>
+                <a:cs typeface="Times New Roman" panose="02020603050405020304" pitchFamily="18" charset="0"/>
+              </a:rPr>
+              <a:t> antes de usar </a:t>
+            </a:r>
+            <a:r>
+              <a:rPr dirty="0" err="1">
+                <a:latin typeface="Times New Roman" panose="02020603050405020304" pitchFamily="18" charset="0"/>
+                <a:cs typeface="Times New Roman" panose="02020603050405020304" pitchFamily="18" charset="0"/>
+              </a:rPr>
+              <a:t>os</a:t>
+            </a:r>
+            <a:r>
+              <a:rPr dirty="0">
+                <a:latin typeface="Times New Roman" panose="02020603050405020304" pitchFamily="18" charset="0"/>
+                <a:cs typeface="Times New Roman" panose="02020603050405020304" pitchFamily="18" charset="0"/>
+              </a:rPr>
+              <a:t> dados</a:t>
             </a:r>
           </a:p>
         </p:txBody>
@@ -31155,9 +32440,8 @@
                 <a:solidFill>
                   <a:srgbClr val="043073"/>
                 </a:solidFill>
-                <a:latin typeface="Inter"/>
-                <a:ea typeface="Inter"/>
-                <a:cs typeface="Inter"/>
+                <a:latin typeface="Times New Roman" panose="02020603050405020304" pitchFamily="18" charset="0"/>
+                <a:cs typeface="Times New Roman" panose="02020603050405020304" pitchFamily="18" charset="0"/>
               </a:rPr>
               <a:t>21</a:t>
             </a:r>
@@ -31314,9 +32598,8 @@
                 <a:solidFill>
                   <a:srgbClr val="272525"/>
                 </a:solidFill>
-                <a:latin typeface="Inter"/>
-                <a:ea typeface="Inter"/>
-                <a:cs typeface="Inter"/>
+                <a:latin typeface="Times New Roman" panose="02020603050405020304" pitchFamily="18" charset="0"/>
+                <a:cs typeface="Times New Roman" panose="02020603050405020304" pitchFamily="18" charset="0"/>
               </a:rPr>
               <a:t>A resposta precisa ser verificada antes da leitura.</a:t>
             </a:r>
@@ -31473,9 +32756,8 @@
                 <a:solidFill>
                   <a:srgbClr val="043073"/>
                 </a:solidFill>
-                <a:latin typeface="Inter"/>
-                <a:ea typeface="Inter"/>
-                <a:cs typeface="Inter"/>
+                <a:latin typeface="Times New Roman" panose="02020603050405020304" pitchFamily="18" charset="0"/>
+                <a:cs typeface="Times New Roman" panose="02020603050405020304" pitchFamily="18" charset="0"/>
               </a:rPr>
               <a:t>Conexão</a:t>
             </a:r>
@@ -31632,9 +32914,8 @@
                 <a:solidFill>
                   <a:srgbClr val="272525"/>
                 </a:solidFill>
-                <a:latin typeface="Inter"/>
-                <a:ea typeface="Inter"/>
-                <a:cs typeface="Inter"/>
+                <a:latin typeface="Times New Roman" panose="02020603050405020304" pitchFamily="18" charset="0"/>
+                <a:cs typeface="Times New Roman" panose="02020603050405020304" pitchFamily="18" charset="0"/>
               </a:rPr>
               <a:t>A requisição pode falhar.</a:t>
             </a:r>
@@ -31791,9 +33072,8 @@
                 <a:solidFill>
                   <a:srgbClr val="043073"/>
                 </a:solidFill>
-                <a:latin typeface="Inter"/>
-                <a:ea typeface="Inter"/>
-                <a:cs typeface="Inter"/>
+                <a:latin typeface="Times New Roman" panose="02020603050405020304" pitchFamily="18" charset="0"/>
+                <a:cs typeface="Times New Roman" panose="02020603050405020304" pitchFamily="18" charset="0"/>
               </a:rPr>
               <a:t>Status HTTP</a:t>
             </a:r>
@@ -31950,9 +33230,8 @@
                 <a:solidFill>
                   <a:srgbClr val="272525"/>
                 </a:solidFill>
-                <a:latin typeface="Inter"/>
-                <a:ea typeface="Inter"/>
-                <a:cs typeface="Inter"/>
+                <a:latin typeface="Times New Roman" panose="02020603050405020304" pitchFamily="18" charset="0"/>
+                <a:cs typeface="Times New Roman" panose="02020603050405020304" pitchFamily="18" charset="0"/>
               </a:rPr>
               <a:t>Uma resposta pode conter um erro HTTP.</a:t>
             </a:r>
@@ -32109,9 +33388,8 @@
                 <a:solidFill>
                   <a:srgbClr val="043073"/>
                 </a:solidFill>
-                <a:latin typeface="Inter"/>
-                <a:ea typeface="Inter"/>
-                <a:cs typeface="Inter"/>
+                <a:latin typeface="Times New Roman" panose="02020603050405020304" pitchFamily="18" charset="0"/>
+                <a:cs typeface="Times New Roman" panose="02020603050405020304" pitchFamily="18" charset="0"/>
               </a:rPr>
               <a:t>Conteúdo</a:t>
             </a:r>
@@ -32268,9 +33546,8 @@
                 <a:solidFill>
                   <a:srgbClr val="272525"/>
                 </a:solidFill>
-                <a:latin typeface="Inter"/>
-                <a:ea typeface="Inter"/>
-                <a:cs typeface="Inter"/>
+                <a:latin typeface="Times New Roman" panose="02020603050405020304" pitchFamily="18" charset="0"/>
+                <a:cs typeface="Times New Roman" panose="02020603050405020304" pitchFamily="18" charset="0"/>
               </a:rPr>
               <a:t>A lista pode estar vazia ou o filme pode faltar.</a:t>
             </a:r>
@@ -32313,7 +33590,10 @@
           <a:bodyPr/>
           <a:lstStyle/>
           <a:p>
-            <a:endParaRPr lang="pt-BR"/>
+            <a:endParaRPr lang="pt-BR">
+              <a:latin typeface="Times New Roman" panose="02020603050405020304" pitchFamily="18" charset="0"/>
+              <a:cs typeface="Times New Roman" panose="02020603050405020304" pitchFamily="18" charset="0"/>
+            </a:endParaRPr>
           </a:p>
         </p:txBody>
       </p:sp>
@@ -32467,9 +33747,8 @@
                 <a:solidFill>
                   <a:srgbClr val="272525"/>
                 </a:solidFill>
-                <a:latin typeface="Inter"/>
-                <a:ea typeface="Inter"/>
-                <a:cs typeface="Inter"/>
+                <a:latin typeface="Times New Roman" panose="02020603050405020304" pitchFamily="18" charset="0"/>
+                <a:cs typeface="Times New Roman" panose="02020603050405020304" pitchFamily="18" charset="0"/>
               </a:rPr>
               <a:t>Próximo passo: verificar statusCode e trabalhar com try/catch.</a:t>
             </a:r>
@@ -32660,16 +33939,37 @@
               </a:defRPr>
             </a:pPr>
             <a:r>
-              <a:rPr sz="2400" b="1">
-                <a:solidFill>
-                  <a:srgbClr val="000000"/>
-                </a:solidFill>
-                <a:latin typeface="Inter"/>
-                <a:ea typeface="Inter"/>
-                <a:cs typeface="Inter"/>
+              <a:rPr dirty="0">
+                <a:latin typeface="Times New Roman" panose="02020603050405020304" pitchFamily="18" charset="0"/>
+                <a:cs typeface="Times New Roman" panose="02020603050405020304" pitchFamily="18" charset="0"/>
               </a:rPr>
-              <a:t>Vamos fazer juntos</a:t>
-            </a:r>
+              <a:t>Vamos </a:t>
+            </a:r>
+            <a:r>
+              <a:rPr dirty="0" err="1">
+                <a:latin typeface="Times New Roman" panose="02020603050405020304" pitchFamily="18" charset="0"/>
+                <a:cs typeface="Times New Roman" panose="02020603050405020304" pitchFamily="18" charset="0"/>
+              </a:rPr>
+              <a:t>fazer</a:t>
+            </a:r>
+            <a:r>
+              <a:rPr dirty="0">
+                <a:latin typeface="Times New Roman" panose="02020603050405020304" pitchFamily="18" charset="0"/>
+                <a:cs typeface="Times New Roman" panose="02020603050405020304" pitchFamily="18" charset="0"/>
+              </a:rPr>
+              <a:t> </a:t>
+            </a:r>
+            <a:r>
+              <a:rPr dirty="0" err="1">
+                <a:latin typeface="Times New Roman" panose="02020603050405020304" pitchFamily="18" charset="0"/>
+                <a:cs typeface="Times New Roman" panose="02020603050405020304" pitchFamily="18" charset="0"/>
+              </a:rPr>
+              <a:t>juntos</a:t>
+            </a:r>
+            <a:endParaRPr dirty="0">
+              <a:latin typeface="Times New Roman" panose="02020603050405020304" pitchFamily="18" charset="0"/>
+              <a:cs typeface="Times New Roman" panose="02020603050405020304" pitchFamily="18" charset="0"/>
+            </a:endParaRPr>
           </a:p>
         </p:txBody>
       </p:sp>
@@ -32823,9 +34123,8 @@
                 <a:solidFill>
                   <a:srgbClr val="043073"/>
                 </a:solidFill>
-                <a:latin typeface="Inter"/>
-                <a:ea typeface="Inter"/>
-                <a:cs typeface="Inter"/>
+                <a:latin typeface="Times New Roman" panose="02020603050405020304" pitchFamily="18" charset="0"/>
+                <a:cs typeface="Times New Roman" panose="02020603050405020304" pitchFamily="18" charset="0"/>
               </a:rPr>
               <a:t>22</a:t>
             </a:r>
@@ -32982,9 +34281,8 @@
                 <a:solidFill>
                   <a:srgbClr val="272525"/>
                 </a:solidFill>
-                <a:latin typeface="Inter"/>
-                <a:ea typeface="Inter"/>
-                <a:cs typeface="Inter"/>
+                <a:latin typeface="Times New Roman" panose="02020603050405020304" pitchFamily="18" charset="0"/>
+                <a:cs typeface="Times New Roman" panose="02020603050405020304" pitchFamily="18" charset="0"/>
               </a:rPr>
               <a:t>Uma alteração por vez, observando o console.</a:t>
             </a:r>
@@ -33141,9 +34439,8 @@
                 <a:solidFill>
                   <a:srgbClr val="043073"/>
                 </a:solidFill>
-                <a:latin typeface="Inter"/>
-                <a:ea typeface="Inter"/>
-                <a:cs typeface="Inter"/>
+                <a:latin typeface="Times New Roman" panose="02020603050405020304" pitchFamily="18" charset="0"/>
+                <a:cs typeface="Times New Roman" panose="02020603050405020304" pitchFamily="18" charset="0"/>
               </a:rPr>
               <a:t>1</a:t>
             </a:r>
@@ -33300,9 +34597,8 @@
                 <a:solidFill>
                   <a:srgbClr val="272525"/>
                 </a:solidFill>
-                <a:latin typeface="Inter"/>
-                <a:ea typeface="Inter"/>
-                <a:cs typeface="Inter"/>
+                <a:latin typeface="Times New Roman" panose="02020603050405020304" pitchFamily="18" charset="0"/>
+                <a:cs typeface="Times New Roman" panose="02020603050405020304" pitchFamily="18" charset="0"/>
               </a:rPr>
               <a:t>Exibir o título do primeiro filme.</a:t>
             </a:r>
@@ -33459,9 +34755,8 @@
                 <a:solidFill>
                   <a:srgbClr val="043073"/>
                 </a:solidFill>
-                <a:latin typeface="Inter"/>
-                <a:ea typeface="Inter"/>
-                <a:cs typeface="Inter"/>
+                <a:latin typeface="Times New Roman" panose="02020603050405020304" pitchFamily="18" charset="0"/>
+                <a:cs typeface="Times New Roman" panose="02020603050405020304" pitchFamily="18" charset="0"/>
               </a:rPr>
               <a:t>2</a:t>
             </a:r>
@@ -33618,9 +34913,8 @@
                 <a:solidFill>
                   <a:srgbClr val="272525"/>
                 </a:solidFill>
-                <a:latin typeface="Inter"/>
-                <a:ea typeface="Inter"/>
-                <a:cs typeface="Inter"/>
+                <a:latin typeface="Times New Roman" panose="02020603050405020304" pitchFamily="18" charset="0"/>
+                <a:cs typeface="Times New Roman" panose="02020603050405020304" pitchFamily="18" charset="0"/>
               </a:rPr>
               <a:t>Buscar outro título com firstWhere().</a:t>
             </a:r>
@@ -33777,9 +35071,8 @@
                 <a:solidFill>
                   <a:srgbClr val="043073"/>
                 </a:solidFill>
-                <a:latin typeface="Inter"/>
-                <a:ea typeface="Inter"/>
-                <a:cs typeface="Inter"/>
+                <a:latin typeface="Times New Roman" panose="02020603050405020304" pitchFamily="18" charset="0"/>
+                <a:cs typeface="Times New Roman" panose="02020603050405020304" pitchFamily="18" charset="0"/>
               </a:rPr>
               <a:t>3</a:t>
             </a:r>
@@ -33936,9 +35229,8 @@
                 <a:solidFill>
                   <a:srgbClr val="272525"/>
                 </a:solidFill>
-                <a:latin typeface="Inter"/>
-                <a:ea typeface="Inter"/>
-                <a:cs typeface="Inter"/>
+                <a:latin typeface="Times New Roman" panose="02020603050405020304" pitchFamily="18" charset="0"/>
+                <a:cs typeface="Times New Roman" panose="02020603050405020304" pitchFamily="18" charset="0"/>
               </a:rPr>
               <a:t>Reescrever a consulta usando async e await.</a:t>
             </a:r>
@@ -33981,7 +35273,10 @@
           <a:bodyPr/>
           <a:lstStyle/>
           <a:p>
-            <a:endParaRPr lang="pt-BR"/>
+            <a:endParaRPr lang="pt-BR">
+              <a:latin typeface="Times New Roman" panose="02020603050405020304" pitchFamily="18" charset="0"/>
+              <a:cs typeface="Times New Roman" panose="02020603050405020304" pitchFamily="18" charset="0"/>
+            </a:endParaRPr>
           </a:p>
         </p:txBody>
       </p:sp>
@@ -34135,9 +35430,8 @@
                 <a:solidFill>
                   <a:srgbClr val="272525"/>
                 </a:solidFill>
-                <a:latin typeface="Inter"/>
-                <a:ea typeface="Inter"/>
-                <a:cs typeface="Inter"/>
+                <a:latin typeface="Times New Roman" panose="02020603050405020304" pitchFamily="18" charset="0"/>
+                <a:cs typeface="Times New Roman" panose="02020603050405020304" pitchFamily="18" charset="0"/>
               </a:rPr>
               <a:t>Pergunta à turma: qual mensagem aparece primeiro em cada versão?</a:t>
             </a:r>
@@ -34332,9 +35626,8 @@
                 <a:solidFill>
                   <a:srgbClr val="000000"/>
                 </a:solidFill>
-                <a:latin typeface="Inter"/>
-                <a:ea typeface="Inter"/>
-                <a:cs typeface="Inter"/>
+                <a:latin typeface="Times New Roman" panose="02020603050405020304" pitchFamily="18" charset="0"/>
+                <a:cs typeface="Times New Roman" panose="02020603050405020304" pitchFamily="18" charset="0"/>
               </a:rPr>
               <a:t>1. Uri.parse(url)</a:t>
             </a:r>
@@ -34491,9 +35784,8 @@
                 <a:solidFill>
                   <a:srgbClr val="043073"/>
                 </a:solidFill>
-                <a:latin typeface="Inter"/>
-                <a:ea typeface="Inter"/>
-                <a:cs typeface="Inter"/>
+                <a:latin typeface="Times New Roman" panose="02020603050405020304" pitchFamily="18" charset="0"/>
+                <a:cs typeface="Times New Roman" panose="02020603050405020304" pitchFamily="18" charset="0"/>
               </a:rPr>
               <a:t>03</a:t>
             </a:r>
@@ -34650,9 +35942,8 @@
                 <a:solidFill>
                   <a:srgbClr val="272525"/>
                 </a:solidFill>
-                <a:latin typeface="Inter"/>
-                <a:ea typeface="Inter"/>
-                <a:cs typeface="Inter"/>
+                <a:latin typeface="Times New Roman" panose="02020603050405020304" pitchFamily="18" charset="0"/>
+                <a:cs typeface="Times New Roman" panose="02020603050405020304" pitchFamily="18" charset="0"/>
               </a:rPr>
               <a:t>O endereço começa como texto. A requisição recebe um Uri.</a:t>
             </a:r>
@@ -34695,7 +35986,10 @@
           <a:bodyPr/>
           <a:lstStyle/>
           <a:p>
-            <a:endParaRPr lang="pt-BR"/>
+            <a:endParaRPr lang="pt-BR">
+              <a:latin typeface="Times New Roman" panose="02020603050405020304" pitchFamily="18" charset="0"/>
+              <a:cs typeface="Times New Roman" panose="02020603050405020304" pitchFamily="18" charset="0"/>
+            </a:endParaRPr>
           </a:p>
         </p:txBody>
       </p:sp>
@@ -34849,9 +36143,8 @@
                 <a:solidFill>
                   <a:srgbClr val="043073"/>
                 </a:solidFill>
-                <a:latin typeface="Inter"/>
-                <a:ea typeface="Inter"/>
-                <a:cs typeface="Inter"/>
+                <a:latin typeface="Times New Roman" panose="02020603050405020304" pitchFamily="18" charset="0"/>
+                <a:cs typeface="Times New Roman" panose="02020603050405020304" pitchFamily="18" charset="0"/>
               </a:rPr>
               <a:t>String</a:t>
             </a:r>
@@ -35008,9 +36301,8 @@
                 <a:solidFill>
                   <a:srgbClr val="272525"/>
                 </a:solidFill>
-                <a:latin typeface="Inter"/>
-                <a:ea typeface="Inter"/>
-                <a:cs typeface="Inter"/>
+                <a:latin typeface="Times New Roman" panose="02020603050405020304" pitchFamily="18" charset="0"/>
+                <a:cs typeface="Times New Roman" panose="02020603050405020304" pitchFamily="18" charset="0"/>
               </a:rPr>
               <a:t>"https://exemplo.com/filmes"</a:t>
             </a:r>
@@ -35053,7 +36345,10 @@
           <a:bodyPr/>
           <a:lstStyle/>
           <a:p>
-            <a:endParaRPr lang="pt-BR"/>
+            <a:endParaRPr lang="pt-BR">
+              <a:latin typeface="Times New Roman" panose="02020603050405020304" pitchFamily="18" charset="0"/>
+              <a:cs typeface="Times New Roman" panose="02020603050405020304" pitchFamily="18" charset="0"/>
+            </a:endParaRPr>
           </a:p>
         </p:txBody>
       </p:sp>
@@ -35207,9 +36502,8 @@
                 <a:solidFill>
                   <a:srgbClr val="043073"/>
                 </a:solidFill>
-                <a:latin typeface="Inter"/>
-                <a:ea typeface="Inter"/>
-                <a:cs typeface="Inter"/>
+                <a:latin typeface="Times New Roman" panose="02020603050405020304" pitchFamily="18" charset="0"/>
+                <a:cs typeface="Times New Roman" panose="02020603050405020304" pitchFamily="18" charset="0"/>
               </a:rPr>
               <a:t>Uri</a:t>
             </a:r>
@@ -35366,9 +36660,8 @@
                 <a:solidFill>
                   <a:srgbClr val="272525"/>
                 </a:solidFill>
-                <a:latin typeface="Inter"/>
-                <a:ea typeface="Inter"/>
-                <a:cs typeface="Inter"/>
+                <a:latin typeface="Times New Roman" panose="02020603050405020304" pitchFamily="18" charset="0"/>
+                <a:cs typeface="Times New Roman" panose="02020603050405020304" pitchFamily="18" charset="0"/>
               </a:rPr>
               <a:t>Uri.parse(url)</a:t>
             </a:r>
@@ -35411,7 +36704,10 @@
           <a:bodyPr/>
           <a:lstStyle/>
           <a:p>
-            <a:endParaRPr lang="pt-BR"/>
+            <a:endParaRPr lang="pt-BR">
+              <a:latin typeface="Times New Roman" panose="02020603050405020304" pitchFamily="18" charset="0"/>
+              <a:cs typeface="Times New Roman" panose="02020603050405020304" pitchFamily="18" charset="0"/>
+            </a:endParaRPr>
           </a:p>
         </p:txBody>
       </p:sp>
@@ -35565,9 +36861,8 @@
                 <a:solidFill>
                   <a:srgbClr val="272525"/>
                 </a:solidFill>
-                <a:latin typeface="Inter"/>
-                <a:ea typeface="Inter"/>
-                <a:cs typeface="Inter"/>
+                <a:latin typeface="Times New Roman" panose="02020603050405020304" pitchFamily="18" charset="0"/>
+                <a:cs typeface="Times New Roman" panose="02020603050405020304" pitchFamily="18" charset="0"/>
               </a:rPr>
               <a:t>Uri.parse() prepara o endereço. get() envia a requisição.</a:t>
             </a:r>
@@ -35758,16 +37053,72 @@
               </a:defRPr>
             </a:pPr>
             <a:r>
-              <a:rPr sz="2400" b="1">
+              <a:rPr sz="2400" b="1" dirty="0">
                 <a:solidFill>
                   <a:srgbClr val="000000"/>
                 </a:solidFill>
-                <a:latin typeface="Inter"/>
-                <a:ea typeface="Inter"/>
-                <a:cs typeface="Inter"/>
+                <a:latin typeface="Times New Roman" panose="02020603050405020304" pitchFamily="18" charset="0"/>
+                <a:cs typeface="Times New Roman" panose="02020603050405020304" pitchFamily="18" charset="0"/>
               </a:rPr>
-              <a:t>Na prática: iniciando a requisição</a:t>
-            </a:r>
+              <a:t>Na </a:t>
+            </a:r>
+            <a:r>
+              <a:rPr sz="2400" b="1" dirty="0" err="1">
+                <a:solidFill>
+                  <a:srgbClr val="000000"/>
+                </a:solidFill>
+                <a:latin typeface="Times New Roman" panose="02020603050405020304" pitchFamily="18" charset="0"/>
+                <a:cs typeface="Times New Roman" panose="02020603050405020304" pitchFamily="18" charset="0"/>
+              </a:rPr>
+              <a:t>prática</a:t>
+            </a:r>
+            <a:r>
+              <a:rPr sz="2400" b="1" dirty="0">
+                <a:solidFill>
+                  <a:srgbClr val="000000"/>
+                </a:solidFill>
+                <a:latin typeface="Times New Roman" panose="02020603050405020304" pitchFamily="18" charset="0"/>
+                <a:cs typeface="Times New Roman" panose="02020603050405020304" pitchFamily="18" charset="0"/>
+              </a:rPr>
+              <a:t>: </a:t>
+            </a:r>
+            <a:r>
+              <a:rPr sz="2400" b="1" dirty="0" err="1">
+                <a:solidFill>
+                  <a:srgbClr val="000000"/>
+                </a:solidFill>
+                <a:latin typeface="Times New Roman" panose="02020603050405020304" pitchFamily="18" charset="0"/>
+                <a:cs typeface="Times New Roman" panose="02020603050405020304" pitchFamily="18" charset="0"/>
+              </a:rPr>
+              <a:t>iniciando</a:t>
+            </a:r>
+            <a:r>
+              <a:rPr sz="2400" b="1" dirty="0">
+                <a:solidFill>
+                  <a:srgbClr val="000000"/>
+                </a:solidFill>
+                <a:latin typeface="Times New Roman" panose="02020603050405020304" pitchFamily="18" charset="0"/>
+                <a:cs typeface="Times New Roman" panose="02020603050405020304" pitchFamily="18" charset="0"/>
+              </a:rPr>
+              <a:t> a </a:t>
+            </a:r>
+            <a:r>
+              <a:rPr sz="2400" b="1" dirty="0" err="1">
+                <a:solidFill>
+                  <a:srgbClr val="000000"/>
+                </a:solidFill>
+                <a:latin typeface="Times New Roman" panose="02020603050405020304" pitchFamily="18" charset="0"/>
+                <a:cs typeface="Times New Roman" panose="02020603050405020304" pitchFamily="18" charset="0"/>
+              </a:rPr>
+              <a:t>requisição</a:t>
+            </a:r>
+            <a:endParaRPr sz="2400" b="1" dirty="0">
+              <a:solidFill>
+                <a:srgbClr val="000000"/>
+              </a:solidFill>
+              <a:latin typeface="Times New Roman" panose="02020603050405020304" pitchFamily="18" charset="0"/>
+              <a:cs typeface="Times New Roman" panose="02020603050405020304" pitchFamily="18" charset="0"/>
+            </a:endParaRPr>
           </a:p>
         </p:txBody>
       </p:sp>
@@ -36076,15 +37427,94 @@
               </a:defRPr>
             </a:pPr>
             <a:r>
-              <a:rPr sz="2100" b="0">
-                <a:solidFill>
-                  <a:srgbClr val="272525"/>
-                </a:solidFill>
-                <a:latin typeface="Inter"/>
-                <a:ea typeface="Inter"/>
-                <a:cs typeface="Inter"/>
+              <a:rPr sz="2100" b="0" dirty="0">
+                <a:solidFill>
+                  <a:srgbClr val="272525"/>
+                </a:solidFill>
+                <a:latin typeface="Times New Roman" panose="02020603050405020304" pitchFamily="18" charset="0"/>
+                <a:cs typeface="Times New Roman" panose="02020603050405020304" pitchFamily="18" charset="0"/>
               </a:rPr>
-              <a:t>Cada parte tem uma responsabilidade.</a:t>
+              <a:t>Cada </a:t>
+            </a:r>
+            <a:r>
+              <a:rPr sz="2100" b="0" dirty="0" err="1">
+                <a:solidFill>
+                  <a:srgbClr val="272525"/>
+                </a:solidFill>
+                <a:latin typeface="Times New Roman" panose="02020603050405020304" pitchFamily="18" charset="0"/>
+                <a:cs typeface="Times New Roman" panose="02020603050405020304" pitchFamily="18" charset="0"/>
+              </a:rPr>
+              <a:t>parte</a:t>
+            </a:r>
+            <a:r>
+              <a:rPr sz="2100" b="0" dirty="0">
+                <a:solidFill>
+                  <a:srgbClr val="272525"/>
+                </a:solidFill>
+                <a:latin typeface="Times New Roman" panose="02020603050405020304" pitchFamily="18" charset="0"/>
+                <a:cs typeface="Times New Roman" panose="02020603050405020304" pitchFamily="18" charset="0"/>
+              </a:rPr>
+              <a:t> </a:t>
+            </a:r>
+            <a:r>
+              <a:rPr sz="2100" b="0" dirty="0" err="1">
+                <a:solidFill>
+                  <a:srgbClr val="272525"/>
+                </a:solidFill>
+                <a:latin typeface="Times New Roman" panose="02020603050405020304" pitchFamily="18" charset="0"/>
+                <a:cs typeface="Times New Roman" panose="02020603050405020304" pitchFamily="18" charset="0"/>
+              </a:rPr>
+              <a:t>tem</a:t>
+            </a:r>
+            <a:r>
+              <a:rPr sz="2100" b="0" dirty="0">
+                <a:solidFill>
+                  <a:srgbClr val="272525"/>
+                </a:solidFill>
+                <a:latin typeface="Times New Roman" panose="02020603050405020304" pitchFamily="18" charset="0"/>
+                <a:cs typeface="Times New Roman" panose="02020603050405020304" pitchFamily="18" charset="0"/>
+              </a:rPr>
+              <a:t> </a:t>
+            </a:r>
+            <a:r>
+              <a:rPr sz="2100" b="0" dirty="0" err="1">
+                <a:solidFill>
+                  <a:srgbClr val="272525"/>
+                </a:solidFill>
+                <a:latin typeface="Times New Roman" panose="02020603050405020304" pitchFamily="18" charset="0"/>
+                <a:cs typeface="Times New Roman" panose="02020603050405020304" pitchFamily="18" charset="0"/>
+              </a:rPr>
+              <a:t>uma</a:t>
+            </a:r>
+            <a:r>
+              <a:rPr sz="2100" b="0" dirty="0">
+                <a:solidFill>
+                  <a:srgbClr val="272525"/>
+                </a:solidFill>
+                <a:latin typeface="Times New Roman" panose="02020603050405020304" pitchFamily="18" charset="0"/>
+                <a:cs typeface="Times New Roman" panose="02020603050405020304" pitchFamily="18" charset="0"/>
+              </a:rPr>
+              <a:t> </a:t>
+            </a:r>
+            <a:r>
+              <a:rPr sz="2100" b="0" dirty="0" err="1">
+                <a:solidFill>
+                  <a:srgbClr val="272525"/>
+                </a:solidFill>
+                <a:latin typeface="Times New Roman" panose="02020603050405020304" pitchFamily="18" charset="0"/>
+                <a:cs typeface="Times New Roman" panose="02020603050405020304" pitchFamily="18" charset="0"/>
+              </a:rPr>
+              <a:t>responsabilidade</a:t>
+            </a:r>
+            <a:r>
+              <a:rPr sz="2100" b="0" dirty="0">
+                <a:solidFill>
+                  <a:srgbClr val="272525"/>
+                </a:solidFill>
+                <a:latin typeface="Times New Roman" panose="02020603050405020304" pitchFamily="18" charset="0"/>
+                <a:cs typeface="Times New Roman" panose="02020603050405020304" pitchFamily="18" charset="0"/>
+              </a:rPr>
+              <a:t>.</a:t>
             </a:r>
           </a:p>
         </p:txBody>
@@ -36530,15 +37960,134 @@
               </a:defRPr>
             </a:pPr>
             <a:r>
-              <a:rPr sz="1725" b="0">
-                <a:solidFill>
-                  <a:srgbClr val="272525"/>
-                </a:solidFill>
-                <a:latin typeface="Inter"/>
-                <a:ea typeface="Inter"/>
-                <a:cs typeface="Inter"/>
+              <a:rPr sz="1725" b="0" dirty="0">
+                <a:solidFill>
+                  <a:srgbClr val="272525"/>
+                </a:solidFill>
+                <a:latin typeface="Times New Roman" panose="02020603050405020304" pitchFamily="18" charset="0"/>
+                <a:cs typeface="Times New Roman" panose="02020603050405020304" pitchFamily="18" charset="0"/>
               </a:rPr>
-              <a:t>print(get(Uri.parse(url))) imprime o Future, não o corpo da resposta.</a:t>
+              <a:t>print(get(</a:t>
+            </a:r>
+            <a:r>
+              <a:rPr sz="1725" b="0" dirty="0" err="1">
+                <a:solidFill>
+                  <a:srgbClr val="272525"/>
+                </a:solidFill>
+                <a:latin typeface="Times New Roman" panose="02020603050405020304" pitchFamily="18" charset="0"/>
+                <a:cs typeface="Times New Roman" panose="02020603050405020304" pitchFamily="18" charset="0"/>
+              </a:rPr>
+              <a:t>Uri.parse</a:t>
+            </a:r>
+            <a:r>
+              <a:rPr sz="1725" b="0" dirty="0">
+                <a:solidFill>
+                  <a:srgbClr val="272525"/>
+                </a:solidFill>
+                <a:latin typeface="Times New Roman" panose="02020603050405020304" pitchFamily="18" charset="0"/>
+                <a:cs typeface="Times New Roman" panose="02020603050405020304" pitchFamily="18" charset="0"/>
+              </a:rPr>
+              <a:t>(</a:t>
+            </a:r>
+            <a:r>
+              <a:rPr sz="1725" b="0" dirty="0" err="1">
+                <a:solidFill>
+                  <a:srgbClr val="272525"/>
+                </a:solidFill>
+                <a:latin typeface="Times New Roman" panose="02020603050405020304" pitchFamily="18" charset="0"/>
+                <a:cs typeface="Times New Roman" panose="02020603050405020304" pitchFamily="18" charset="0"/>
+              </a:rPr>
+              <a:t>url</a:t>
+            </a:r>
+            <a:r>
+              <a:rPr sz="1725" b="0" dirty="0">
+                <a:solidFill>
+                  <a:srgbClr val="272525"/>
+                </a:solidFill>
+                <a:latin typeface="Times New Roman" panose="02020603050405020304" pitchFamily="18" charset="0"/>
+                <a:cs typeface="Times New Roman" panose="02020603050405020304" pitchFamily="18" charset="0"/>
+              </a:rPr>
+              <a:t>))) </a:t>
+            </a:r>
+            <a:r>
+              <a:rPr sz="1725" b="0" dirty="0" err="1">
+                <a:solidFill>
+                  <a:srgbClr val="272525"/>
+                </a:solidFill>
+                <a:latin typeface="Times New Roman" panose="02020603050405020304" pitchFamily="18" charset="0"/>
+                <a:cs typeface="Times New Roman" panose="02020603050405020304" pitchFamily="18" charset="0"/>
+              </a:rPr>
+              <a:t>imprime</a:t>
+            </a:r>
+            <a:r>
+              <a:rPr sz="1725" b="0" dirty="0">
+                <a:solidFill>
+                  <a:srgbClr val="272525"/>
+                </a:solidFill>
+                <a:latin typeface="Times New Roman" panose="02020603050405020304" pitchFamily="18" charset="0"/>
+                <a:cs typeface="Times New Roman" panose="02020603050405020304" pitchFamily="18" charset="0"/>
+              </a:rPr>
+              <a:t> o Future, </a:t>
+            </a:r>
+            <a:r>
+              <a:rPr sz="1725" b="0" dirty="0" err="1">
+                <a:solidFill>
+                  <a:srgbClr val="272525"/>
+                </a:solidFill>
+                <a:latin typeface="Times New Roman" panose="02020603050405020304" pitchFamily="18" charset="0"/>
+                <a:cs typeface="Times New Roman" panose="02020603050405020304" pitchFamily="18" charset="0"/>
+              </a:rPr>
+              <a:t>não</a:t>
+            </a:r>
+            <a:r>
+              <a:rPr sz="1725" b="0" dirty="0">
+                <a:solidFill>
+                  <a:srgbClr val="272525"/>
+                </a:solidFill>
+                <a:latin typeface="Times New Roman" panose="02020603050405020304" pitchFamily="18" charset="0"/>
+                <a:cs typeface="Times New Roman" panose="02020603050405020304" pitchFamily="18" charset="0"/>
+              </a:rPr>
+              <a:t> o </a:t>
+            </a:r>
+            <a:r>
+              <a:rPr sz="1725" b="0" dirty="0" err="1">
+                <a:solidFill>
+                  <a:srgbClr val="272525"/>
+                </a:solidFill>
+                <a:latin typeface="Times New Roman" panose="02020603050405020304" pitchFamily="18" charset="0"/>
+                <a:cs typeface="Times New Roman" panose="02020603050405020304" pitchFamily="18" charset="0"/>
+              </a:rPr>
+              <a:t>corpo</a:t>
+            </a:r>
+            <a:r>
+              <a:rPr sz="1725" b="0" dirty="0">
+                <a:solidFill>
+                  <a:srgbClr val="272525"/>
+                </a:solidFill>
+                <a:latin typeface="Times New Roman" panose="02020603050405020304" pitchFamily="18" charset="0"/>
+                <a:cs typeface="Times New Roman" panose="02020603050405020304" pitchFamily="18" charset="0"/>
+              </a:rPr>
+              <a:t> da </a:t>
+            </a:r>
+            <a:r>
+              <a:rPr sz="1725" b="0" dirty="0" err="1">
+                <a:solidFill>
+                  <a:srgbClr val="272525"/>
+                </a:solidFill>
+                <a:latin typeface="Times New Roman" panose="02020603050405020304" pitchFamily="18" charset="0"/>
+                <a:cs typeface="Times New Roman" panose="02020603050405020304" pitchFamily="18" charset="0"/>
+              </a:rPr>
+              <a:t>resposta</a:t>
+            </a:r>
+            <a:r>
+              <a:rPr sz="1725" b="0" dirty="0">
+                <a:solidFill>
+                  <a:srgbClr val="272525"/>
+                </a:solidFill>
+                <a:latin typeface="Times New Roman" panose="02020603050405020304" pitchFamily="18" charset="0"/>
+                <a:cs typeface="Times New Roman" panose="02020603050405020304" pitchFamily="18" charset="0"/>
+              </a:rPr>
+              <a:t>.</a:t>
             </a:r>
           </a:p>
         </p:txBody>
@@ -36731,9 +38280,8 @@
                 <a:solidFill>
                   <a:srgbClr val="000000"/>
                 </a:solidFill>
-                <a:latin typeface="Inter"/>
-                <a:ea typeface="Inter"/>
-                <a:cs typeface="Inter"/>
+                <a:latin typeface="Times New Roman" panose="02020603050405020304" pitchFamily="18" charset="0"/>
+                <a:cs typeface="Times New Roman" panose="02020603050405020304" pitchFamily="18" charset="0"/>
               </a:rPr>
               <a:t>2. Future e Response</a:t>
             </a:r>
@@ -36890,9 +38438,8 @@
                 <a:solidFill>
                   <a:srgbClr val="043073"/>
                 </a:solidFill>
-                <a:latin typeface="Inter"/>
-                <a:ea typeface="Inter"/>
-                <a:cs typeface="Inter"/>
+                <a:latin typeface="Times New Roman" panose="02020603050405020304" pitchFamily="18" charset="0"/>
+                <a:cs typeface="Times New Roman" panose="02020603050405020304" pitchFamily="18" charset="0"/>
               </a:rPr>
               <a:t>05</a:t>
             </a:r>
@@ -37049,9 +38596,8 @@
                 <a:solidFill>
                   <a:srgbClr val="272525"/>
                 </a:solidFill>
-                <a:latin typeface="Inter"/>
-                <a:ea typeface="Inter"/>
-                <a:cs typeface="Inter"/>
+                <a:latin typeface="Times New Roman" panose="02020603050405020304" pitchFamily="18" charset="0"/>
+                <a:cs typeface="Times New Roman" panose="02020603050405020304" pitchFamily="18" charset="0"/>
               </a:rPr>
               <a:t>Pense em um pedido de restaurante.</a:t>
             </a:r>
@@ -37094,7 +38640,10 @@
           <a:bodyPr/>
           <a:lstStyle/>
           <a:p>
-            <a:endParaRPr lang="pt-BR"/>
+            <a:endParaRPr lang="pt-BR">
+              <a:latin typeface="Times New Roman" panose="02020603050405020304" pitchFamily="18" charset="0"/>
+              <a:cs typeface="Times New Roman" panose="02020603050405020304" pitchFamily="18" charset="0"/>
+            </a:endParaRPr>
           </a:p>
         </p:txBody>
       </p:sp>
@@ -37248,9 +38797,8 @@
                 <a:solidFill>
                   <a:srgbClr val="043073"/>
                 </a:solidFill>
-                <a:latin typeface="Inter"/>
-                <a:ea typeface="Inter"/>
-                <a:cs typeface="Inter"/>
+                <a:latin typeface="Times New Roman" panose="02020603050405020304" pitchFamily="18" charset="0"/>
+                <a:cs typeface="Times New Roman" panose="02020603050405020304" pitchFamily="18" charset="0"/>
               </a:rPr>
               <a:t>Future&lt;Response&gt;</a:t>
             </a:r>
@@ -37407,9 +38955,8 @@
                 <a:solidFill>
                   <a:srgbClr val="272525"/>
                 </a:solidFill>
-                <a:latin typeface="Inter"/>
-                <a:ea typeface="Inter"/>
-                <a:cs typeface="Inter"/>
+                <a:latin typeface="Times New Roman" panose="02020603050405020304" pitchFamily="18" charset="0"/>
+                <a:cs typeface="Times New Roman" panose="02020603050405020304" pitchFamily="18" charset="0"/>
               </a:rPr>
               <a:t>O pedido está em andamento.</a:t>
             </a:r>
@@ -37419,9 +38966,8 @@
               <a:solidFill>
                 <a:srgbClr val="272525"/>
               </a:solidFill>
-              <a:latin typeface="Inter"/>
-              <a:ea typeface="Inter"/>
-              <a:cs typeface="Inter"/>
+              <a:latin typeface="Times New Roman" panose="02020603050405020304" pitchFamily="18" charset="0"/>
+              <a:cs typeface="Times New Roman" panose="02020603050405020304" pitchFamily="18" charset="0"/>
             </a:endParaRPr>
           </a:p>
           <a:p>
@@ -37440,9 +38986,8 @@
                 <a:solidFill>
                   <a:srgbClr val="272525"/>
                 </a:solidFill>
-                <a:latin typeface="Inter"/>
-                <a:ea typeface="Inter"/>
-                <a:cs typeface="Inter"/>
+                <a:latin typeface="Times New Roman" panose="02020603050405020304" pitchFamily="18" charset="0"/>
+                <a:cs typeface="Times New Roman" panose="02020603050405020304" pitchFamily="18" charset="0"/>
               </a:rPr>
               <a:t>Pode concluir com resposta ou erro.</a:t>
             </a:r>
@@ -37485,7 +39030,10 @@
           <a:bodyPr/>
           <a:lstStyle/>
           <a:p>
-            <a:endParaRPr lang="pt-BR"/>
+            <a:endParaRPr lang="pt-BR">
+              <a:latin typeface="Times New Roman" panose="02020603050405020304" pitchFamily="18" charset="0"/>
+              <a:cs typeface="Times New Roman" panose="02020603050405020304" pitchFamily="18" charset="0"/>
+            </a:endParaRPr>
           </a:p>
         </p:txBody>
       </p:sp>
@@ -37639,9 +39187,8 @@
                 <a:solidFill>
                   <a:srgbClr val="043073"/>
                 </a:solidFill>
-                <a:latin typeface="Inter"/>
-                <a:ea typeface="Inter"/>
-                <a:cs typeface="Inter"/>
+                <a:latin typeface="Times New Roman" panose="02020603050405020304" pitchFamily="18" charset="0"/>
+                <a:cs typeface="Times New Roman" panose="02020603050405020304" pitchFamily="18" charset="0"/>
               </a:rPr>
               <a:t>Response</a:t>
             </a:r>
@@ -37798,9 +39345,8 @@
                 <a:solidFill>
                   <a:srgbClr val="272525"/>
                 </a:solidFill>
-                <a:latin typeface="Inter"/>
-                <a:ea typeface="Inter"/>
-                <a:cs typeface="Inter"/>
+                <a:latin typeface="Times New Roman" panose="02020603050405020304" pitchFamily="18" charset="0"/>
+                <a:cs typeface="Times New Roman" panose="02020603050405020304" pitchFamily="18" charset="0"/>
               </a:rPr>
               <a:t>A resposta chegou.</a:t>
             </a:r>
@@ -37810,9 +39356,8 @@
               <a:solidFill>
                 <a:srgbClr val="272525"/>
               </a:solidFill>
-              <a:latin typeface="Inter"/>
-              <a:ea typeface="Inter"/>
-              <a:cs typeface="Inter"/>
+              <a:latin typeface="Times New Roman" panose="02020603050405020304" pitchFamily="18" charset="0"/>
+              <a:cs typeface="Times New Roman" panose="02020603050405020304" pitchFamily="18" charset="0"/>
             </a:endParaRPr>
           </a:p>
           <a:p>
@@ -37831,9 +39376,8 @@
                 <a:solidFill>
                   <a:srgbClr val="272525"/>
                 </a:solidFill>
-                <a:latin typeface="Inter"/>
-                <a:ea typeface="Inter"/>
-                <a:cs typeface="Inter"/>
+                <a:latin typeface="Times New Roman" panose="02020603050405020304" pitchFamily="18" charset="0"/>
+                <a:cs typeface="Times New Roman" panose="02020603050405020304" pitchFamily="18" charset="0"/>
               </a:rPr>
               <a:t>Agora podemos ler seu conteúdo.</a:t>
             </a:r>
@@ -37876,7 +39420,10 @@
           <a:bodyPr/>
           <a:lstStyle/>
           <a:p>
-            <a:endParaRPr lang="pt-BR"/>
+            <a:endParaRPr lang="pt-BR">
+              <a:latin typeface="Times New Roman" panose="02020603050405020304" pitchFamily="18" charset="0"/>
+              <a:cs typeface="Times New Roman" panose="02020603050405020304" pitchFamily="18" charset="0"/>
+            </a:endParaRPr>
           </a:p>
         </p:txBody>
       </p:sp>
@@ -38030,9 +39577,8 @@
                 <a:solidFill>
                   <a:srgbClr val="272525"/>
                 </a:solidFill>
-                <a:latin typeface="Inter"/>
-                <a:ea typeface="Inter"/>
-                <a:cs typeface="Inter"/>
+                <a:latin typeface="Times New Roman" panose="02020603050405020304" pitchFamily="18" charset="0"/>
+                <a:cs typeface="Times New Roman" panose="02020603050405020304" pitchFamily="18" charset="0"/>
               </a:rPr>
               <a:t>Future representa o resultado pendente. Response contém a resposta.</a:t>
             </a:r>
@@ -38227,9 +39773,8 @@
                 <a:solidFill>
                   <a:srgbClr val="000000"/>
                 </a:solidFill>
-                <a:latin typeface="Inter"/>
-                <a:ea typeface="Inter"/>
-                <a:cs typeface="Inter"/>
+                <a:latin typeface="Times New Roman" panose="02020603050405020304" pitchFamily="18" charset="0"/>
+                <a:cs typeface="Times New Roman" panose="02020603050405020304" pitchFamily="18" charset="0"/>
               </a:rPr>
               <a:t>O que existe em um Response?</a:t>
             </a:r>
@@ -38386,9 +39931,8 @@
                 <a:solidFill>
                   <a:srgbClr val="043073"/>
                 </a:solidFill>
-                <a:latin typeface="Inter"/>
-                <a:ea typeface="Inter"/>
-                <a:cs typeface="Inter"/>
+                <a:latin typeface="Times New Roman" panose="02020603050405020304" pitchFamily="18" charset="0"/>
+                <a:cs typeface="Times New Roman" panose="02020603050405020304" pitchFamily="18" charset="0"/>
               </a:rPr>
               <a:t>06</a:t>
             </a:r>
@@ -38545,9 +40089,8 @@
                 <a:solidFill>
                   <a:srgbClr val="272525"/>
                 </a:solidFill>
-                <a:latin typeface="Inter"/>
-                <a:ea typeface="Inter"/>
-                <a:cs typeface="Inter"/>
+                <a:latin typeface="Times New Roman" panose="02020603050405020304" pitchFamily="18" charset="0"/>
+                <a:cs typeface="Times New Roman" panose="02020603050405020304" pitchFamily="18" charset="0"/>
               </a:rPr>
               <a:t>A resposta traz mais do que os dados.</a:t>
             </a:r>
@@ -38590,7 +40133,10 @@
           <a:bodyPr/>
           <a:lstStyle/>
           <a:p>
-            <a:endParaRPr lang="pt-BR"/>
+            <a:endParaRPr lang="pt-BR">
+              <a:latin typeface="Times New Roman" panose="02020603050405020304" pitchFamily="18" charset="0"/>
+              <a:cs typeface="Times New Roman" panose="02020603050405020304" pitchFamily="18" charset="0"/>
+            </a:endParaRPr>
           </a:p>
         </p:txBody>
       </p:sp>
@@ -38744,9 +40290,8 @@
                 <a:solidFill>
                   <a:srgbClr val="043073"/>
                 </a:solidFill>
-                <a:latin typeface="Inter"/>
-                <a:ea typeface="Inter"/>
-                <a:cs typeface="Inter"/>
+                <a:latin typeface="Times New Roman" panose="02020603050405020304" pitchFamily="18" charset="0"/>
+                <a:cs typeface="Times New Roman" panose="02020603050405020304" pitchFamily="18" charset="0"/>
               </a:rPr>
               <a:t>statusCode</a:t>
             </a:r>
@@ -38903,9 +40448,8 @@
                 <a:solidFill>
                   <a:srgbClr val="272525"/>
                 </a:solidFill>
-                <a:latin typeface="Inter"/>
-                <a:ea typeface="Inter"/>
-                <a:cs typeface="Inter"/>
+                <a:latin typeface="Times New Roman" panose="02020603050405020304" pitchFamily="18" charset="0"/>
+                <a:cs typeface="Times New Roman" panose="02020603050405020304" pitchFamily="18" charset="0"/>
               </a:rPr>
               <a:t>Resultado HTTP</a:t>
             </a:r>
@@ -38915,9 +40459,8 @@
               <a:solidFill>
                 <a:srgbClr val="272525"/>
               </a:solidFill>
-              <a:latin typeface="Inter"/>
-              <a:ea typeface="Inter"/>
-              <a:cs typeface="Inter"/>
+              <a:latin typeface="Times New Roman" panose="02020603050405020304" pitchFamily="18" charset="0"/>
+              <a:cs typeface="Times New Roman" panose="02020603050405020304" pitchFamily="18" charset="0"/>
             </a:endParaRPr>
           </a:p>
           <a:p>
@@ -38936,9 +40479,8 @@
                 <a:solidFill>
                   <a:srgbClr val="272525"/>
                 </a:solidFill>
-                <a:latin typeface="Inter"/>
-                <a:ea typeface="Inter"/>
-                <a:cs typeface="Inter"/>
+                <a:latin typeface="Times New Roman" panose="02020603050405020304" pitchFamily="18" charset="0"/>
+                <a:cs typeface="Times New Roman" panose="02020603050405020304" pitchFamily="18" charset="0"/>
               </a:rPr>
               <a:t>Exemplo: 200</a:t>
             </a:r>
@@ -38981,7 +40523,10 @@
           <a:bodyPr/>
           <a:lstStyle/>
           <a:p>
-            <a:endParaRPr lang="pt-BR"/>
+            <a:endParaRPr lang="pt-BR">
+              <a:latin typeface="Times New Roman" panose="02020603050405020304" pitchFamily="18" charset="0"/>
+              <a:cs typeface="Times New Roman" panose="02020603050405020304" pitchFamily="18" charset="0"/>
+            </a:endParaRPr>
           </a:p>
         </p:txBody>
       </p:sp>
@@ -39135,9 +40680,8 @@
                 <a:solidFill>
                   <a:srgbClr val="043073"/>
                 </a:solidFill>
-                <a:latin typeface="Inter"/>
-                <a:ea typeface="Inter"/>
-                <a:cs typeface="Inter"/>
+                <a:latin typeface="Times New Roman" panose="02020603050405020304" pitchFamily="18" charset="0"/>
+                <a:cs typeface="Times New Roman" panose="02020603050405020304" pitchFamily="18" charset="0"/>
               </a:rPr>
               <a:t>body</a:t>
             </a:r>
@@ -39294,9 +40838,8 @@
                 <a:solidFill>
                   <a:srgbClr val="272525"/>
                 </a:solidFill>
-                <a:latin typeface="Inter"/>
-                <a:ea typeface="Inter"/>
-                <a:cs typeface="Inter"/>
+                <a:latin typeface="Times New Roman" panose="02020603050405020304" pitchFamily="18" charset="0"/>
+                <a:cs typeface="Times New Roman" panose="02020603050405020304" pitchFamily="18" charset="0"/>
               </a:rPr>
               <a:t>Conteúdo como texto</a:t>
             </a:r>
@@ -39306,9 +40849,8 @@
               <a:solidFill>
                 <a:srgbClr val="272525"/>
               </a:solidFill>
-              <a:latin typeface="Inter"/>
-              <a:ea typeface="Inter"/>
-              <a:cs typeface="Inter"/>
+              <a:latin typeface="Times New Roman" panose="02020603050405020304" pitchFamily="18" charset="0"/>
+              <a:cs typeface="Times New Roman" panose="02020603050405020304" pitchFamily="18" charset="0"/>
             </a:endParaRPr>
           </a:p>
           <a:p>
@@ -39327,9 +40869,8 @@
                 <a:solidFill>
                   <a:srgbClr val="272525"/>
                 </a:solidFill>
-                <a:latin typeface="Inter"/>
-                <a:ea typeface="Inter"/>
-                <a:cs typeface="Inter"/>
+                <a:latin typeface="Times New Roman" panose="02020603050405020304" pitchFamily="18" charset="0"/>
+                <a:cs typeface="Times New Roman" panose="02020603050405020304" pitchFamily="18" charset="0"/>
               </a:rPr>
               <a:t>Exemplo: lista em JSON</a:t>
             </a:r>
@@ -39372,7 +40913,10 @@
           <a:bodyPr/>
           <a:lstStyle/>
           <a:p>
-            <a:endParaRPr lang="pt-BR"/>
+            <a:endParaRPr lang="pt-BR">
+              <a:latin typeface="Times New Roman" panose="02020603050405020304" pitchFamily="18" charset="0"/>
+              <a:cs typeface="Times New Roman" panose="02020603050405020304" pitchFamily="18" charset="0"/>
+            </a:endParaRPr>
           </a:p>
         </p:txBody>
       </p:sp>
@@ -39526,9 +41070,8 @@
                 <a:solidFill>
                   <a:srgbClr val="043073"/>
                 </a:solidFill>
-                <a:latin typeface="Inter"/>
-                <a:ea typeface="Inter"/>
-                <a:cs typeface="Inter"/>
+                <a:latin typeface="Times New Roman" panose="02020603050405020304" pitchFamily="18" charset="0"/>
+                <a:cs typeface="Times New Roman" panose="02020603050405020304" pitchFamily="18" charset="0"/>
               </a:rPr>
               <a:t>headers</a:t>
             </a:r>
@@ -39685,9 +41228,8 @@
                 <a:solidFill>
                   <a:srgbClr val="272525"/>
                 </a:solidFill>
-                <a:latin typeface="Inter"/>
-                <a:ea typeface="Inter"/>
-                <a:cs typeface="Inter"/>
+                <a:latin typeface="Times New Roman" panose="02020603050405020304" pitchFamily="18" charset="0"/>
+                <a:cs typeface="Times New Roman" panose="02020603050405020304" pitchFamily="18" charset="0"/>
               </a:rPr>
               <a:t>Metadados</a:t>
             </a:r>
@@ -39697,9 +41239,8 @@
               <a:solidFill>
                 <a:srgbClr val="272525"/>
               </a:solidFill>
-              <a:latin typeface="Inter"/>
-              <a:ea typeface="Inter"/>
-              <a:cs typeface="Inter"/>
+              <a:latin typeface="Times New Roman" panose="02020603050405020304" pitchFamily="18" charset="0"/>
+              <a:cs typeface="Times New Roman" panose="02020603050405020304" pitchFamily="18" charset="0"/>
             </a:endParaRPr>
           </a:p>
           <a:p>
@@ -39718,9 +41259,8 @@
                 <a:solidFill>
                   <a:srgbClr val="272525"/>
                 </a:solidFill>
-                <a:latin typeface="Inter"/>
-                <a:ea typeface="Inter"/>
-                <a:cs typeface="Inter"/>
+                <a:latin typeface="Times New Roman" panose="02020603050405020304" pitchFamily="18" charset="0"/>
+                <a:cs typeface="Times New Roman" panose="02020603050405020304" pitchFamily="18" charset="0"/>
               </a:rPr>
               <a:t>Exemplo: tipo do conteúdo</a:t>
             </a:r>
@@ -39763,7 +41303,10 @@
           <a:bodyPr/>
           <a:lstStyle/>
           <a:p>
-            <a:endParaRPr lang="pt-BR"/>
+            <a:endParaRPr lang="pt-BR">
+              <a:latin typeface="Times New Roman" panose="02020603050405020304" pitchFamily="18" charset="0"/>
+              <a:cs typeface="Times New Roman" panose="02020603050405020304" pitchFamily="18" charset="0"/>
+            </a:endParaRPr>
           </a:p>
         </p:txBody>
       </p:sp>
@@ -39917,9 +41460,8 @@
                 <a:solidFill>
                   <a:srgbClr val="272525"/>
                 </a:solidFill>
-                <a:latin typeface="Inter"/>
-                <a:ea typeface="Inter"/>
-                <a:cs typeface="Inter"/>
+                <a:latin typeface="Times New Roman" panose="02020603050405020304" pitchFamily="18" charset="0"/>
+                <a:cs typeface="Times New Roman" panose="02020603050405020304" pitchFamily="18" charset="0"/>
               </a:rPr>
               <a:t>Depois de receber: print(response.statusCode);  print(response.body);</a:t>
             </a:r>
@@ -40114,9 +41656,8 @@
                 <a:solidFill>
                   <a:srgbClr val="000000"/>
                 </a:solidFill>
-                <a:latin typeface="Inter"/>
-                <a:ea typeface="Inter"/>
-                <a:cs typeface="Inter"/>
+                <a:latin typeface="Times New Roman" panose="02020603050405020304" pitchFamily="18" charset="0"/>
+                <a:cs typeface="Times New Roman" panose="02020603050405020304" pitchFamily="18" charset="0"/>
               </a:rPr>
               <a:t>3. O método .then()</a:t>
             </a:r>
@@ -40273,9 +41814,8 @@
                 <a:solidFill>
                   <a:srgbClr val="043073"/>
                 </a:solidFill>
-                <a:latin typeface="Inter"/>
-                <a:ea typeface="Inter"/>
-                <a:cs typeface="Inter"/>
+                <a:latin typeface="Times New Roman" panose="02020603050405020304" pitchFamily="18" charset="0"/>
+                <a:cs typeface="Times New Roman" panose="02020603050405020304" pitchFamily="18" charset="0"/>
               </a:rPr>
               <a:t>07</a:t>
             </a:r>
@@ -40432,9 +41972,8 @@
                 <a:solidFill>
                   <a:srgbClr val="272525"/>
                 </a:solidFill>
-                <a:latin typeface="Inter"/>
-                <a:ea typeface="Inter"/>
-                <a:cs typeface="Inter"/>
+                <a:latin typeface="Times New Roman" panose="02020603050405020304" pitchFamily="18" charset="0"/>
+                <a:cs typeface="Times New Roman" panose="02020603050405020304" pitchFamily="18" charset="0"/>
               </a:rPr>
               <a:t>“Quando a resposta chegar, execute esta função.”</a:t>
             </a:r>
@@ -40477,7 +42016,10 @@
           <a:bodyPr/>
           <a:lstStyle/>
           <a:p>
-            <a:endParaRPr lang="pt-BR"/>
+            <a:endParaRPr lang="pt-BR">
+              <a:latin typeface="Times New Roman" panose="02020603050405020304" pitchFamily="18" charset="0"/>
+              <a:cs typeface="Times New Roman" panose="02020603050405020304" pitchFamily="18" charset="0"/>
+            </a:endParaRPr>
           </a:p>
         </p:txBody>
       </p:sp>
@@ -40631,9 +42173,8 @@
                 <a:solidFill>
                   <a:srgbClr val="043073"/>
                 </a:solidFill>
-                <a:latin typeface="Inter"/>
-                <a:ea typeface="Inter"/>
-                <a:cs typeface="Inter"/>
+                <a:latin typeface="Times New Roman" panose="02020603050405020304" pitchFamily="18" charset="0"/>
+                <a:cs typeface="Times New Roman" panose="02020603050405020304" pitchFamily="18" charset="0"/>
               </a:rPr>
               <a:t>Antes da resposta</a:t>
             </a:r>
@@ -40790,9 +42331,8 @@
                 <a:solidFill>
                   <a:srgbClr val="272525"/>
                 </a:solidFill>
-                <a:latin typeface="Inter"/>
-                <a:ea typeface="Inter"/>
-                <a:cs typeface="Inter"/>
+                <a:latin typeface="Times New Roman" panose="02020603050405020304" pitchFamily="18" charset="0"/>
+                <a:cs typeface="Times New Roman" panose="02020603050405020304" pitchFamily="18" charset="0"/>
               </a:rPr>
               <a:t>A requisição fica pendente.</a:t>
             </a:r>
@@ -40802,9 +42342,8 @@
               <a:solidFill>
                 <a:srgbClr val="272525"/>
               </a:solidFill>
-              <a:latin typeface="Inter"/>
-              <a:ea typeface="Inter"/>
-              <a:cs typeface="Inter"/>
+              <a:latin typeface="Times New Roman" panose="02020603050405020304" pitchFamily="18" charset="0"/>
+              <a:cs typeface="Times New Roman" panose="02020603050405020304" pitchFamily="18" charset="0"/>
             </a:endParaRPr>
           </a:p>
           <a:p>
@@ -40823,9 +42362,8 @@
                 <a:solidFill>
                   <a:srgbClr val="272525"/>
                 </a:solidFill>
-                <a:latin typeface="Inter"/>
-                <a:ea typeface="Inter"/>
-                <a:cs typeface="Inter"/>
+                <a:latin typeface="Times New Roman" panose="02020603050405020304" pitchFamily="18" charset="0"/>
+                <a:cs typeface="Times New Roman" panose="02020603050405020304" pitchFamily="18" charset="0"/>
               </a:rPr>
               <a:t>O código seguinte pode continuar.</a:t>
             </a:r>
@@ -40868,7 +42406,10 @@
           <a:bodyPr/>
           <a:lstStyle/>
           <a:p>
-            <a:endParaRPr lang="pt-BR"/>
+            <a:endParaRPr lang="pt-BR">
+              <a:latin typeface="Times New Roman" panose="02020603050405020304" pitchFamily="18" charset="0"/>
+              <a:cs typeface="Times New Roman" panose="02020603050405020304" pitchFamily="18" charset="0"/>
+            </a:endParaRPr>
           </a:p>
         </p:txBody>
       </p:sp>
@@ -41022,9 +42563,8 @@
                 <a:solidFill>
                   <a:srgbClr val="043073"/>
                 </a:solidFill>
-                <a:latin typeface="Inter"/>
-                <a:ea typeface="Inter"/>
-                <a:cs typeface="Inter"/>
+                <a:latin typeface="Times New Roman" panose="02020603050405020304" pitchFamily="18" charset="0"/>
+                <a:cs typeface="Times New Roman" panose="02020603050405020304" pitchFamily="18" charset="0"/>
               </a:rPr>
               <a:t>Quando ela chega</a:t>
             </a:r>
@@ -41181,9 +42721,8 @@
                 <a:solidFill>
                   <a:srgbClr val="272525"/>
                 </a:solidFill>
-                <a:latin typeface="Inter"/>
-                <a:ea typeface="Inter"/>
-                <a:cs typeface="Inter"/>
+                <a:latin typeface="Times New Roman" panose="02020603050405020304" pitchFamily="18" charset="0"/>
+                <a:cs typeface="Times New Roman" panose="02020603050405020304" pitchFamily="18" charset="0"/>
               </a:rPr>
               <a:t>O callback recebe um Response.</a:t>
             </a:r>
@@ -41193,9 +42732,8 @@
               <a:solidFill>
                 <a:srgbClr val="272525"/>
               </a:solidFill>
-              <a:latin typeface="Inter"/>
-              <a:ea typeface="Inter"/>
-              <a:cs typeface="Inter"/>
+              <a:latin typeface="Times New Roman" panose="02020603050405020304" pitchFamily="18" charset="0"/>
+              <a:cs typeface="Times New Roman" panose="02020603050405020304" pitchFamily="18" charset="0"/>
             </a:endParaRPr>
           </a:p>
           <a:p>
@@ -41214,9 +42752,8 @@
                 <a:solidFill>
                   <a:srgbClr val="272525"/>
                 </a:solidFill>
-                <a:latin typeface="Inter"/>
-                <a:ea typeface="Inter"/>
-                <a:cs typeface="Inter"/>
+                <a:latin typeface="Times New Roman" panose="02020603050405020304" pitchFamily="18" charset="0"/>
+                <a:cs typeface="Times New Roman" panose="02020603050405020304" pitchFamily="18" charset="0"/>
               </a:rPr>
               <a:t>Aqui lemos os dados.</a:t>
             </a:r>
@@ -41259,7 +42796,10 @@
           <a:bodyPr/>
           <a:lstStyle/>
           <a:p>
-            <a:endParaRPr lang="pt-BR"/>
+            <a:endParaRPr lang="pt-BR">
+              <a:latin typeface="Times New Roman" panose="02020603050405020304" pitchFamily="18" charset="0"/>
+              <a:cs typeface="Times New Roman" panose="02020603050405020304" pitchFamily="18" charset="0"/>
+            </a:endParaRPr>
           </a:p>
         </p:txBody>
       </p:sp>
@@ -41413,9 +42953,8 @@
                 <a:solidFill>
                   <a:srgbClr val="272525"/>
                 </a:solidFill>
-                <a:latin typeface="Inter"/>
-                <a:ea typeface="Inter"/>
-                <a:cs typeface="Inter"/>
+                <a:latin typeface="Times New Roman" panose="02020603050405020304" pitchFamily="18" charset="0"/>
+                <a:cs typeface="Times New Roman" panose="02020603050405020304" pitchFamily="18" charset="0"/>
               </a:rPr>
               <a:t>Callback: uma função que será chamada na conclusão da operação.</a:t>
             </a:r>
@@ -41606,15 +43145,54 @@
               </a:defRPr>
             </a:pPr>
             <a:r>
-              <a:rPr sz="2400" b="1">
+              <a:rPr sz="2400" b="1" dirty="0">
                 <a:solidFill>
                   <a:srgbClr val="000000"/>
                 </a:solidFill>
-                <a:latin typeface="Inter"/>
-                <a:ea typeface="Inter"/>
-                <a:cs typeface="Inter"/>
+                <a:latin typeface="Times New Roman" panose="02020603050405020304" pitchFamily="18" charset="0"/>
+                <a:cs typeface="Times New Roman" panose="02020603050405020304" pitchFamily="18" charset="0"/>
               </a:rPr>
-              <a:t>Na prática: recebendo com .then()</a:t>
+              <a:t>Na </a:t>
+            </a:r>
+            <a:r>
+              <a:rPr sz="2400" b="1" dirty="0" err="1">
+                <a:solidFill>
+                  <a:srgbClr val="000000"/>
+                </a:solidFill>
+                <a:latin typeface="Times New Roman" panose="02020603050405020304" pitchFamily="18" charset="0"/>
+                <a:cs typeface="Times New Roman" panose="02020603050405020304" pitchFamily="18" charset="0"/>
+              </a:rPr>
+              <a:t>prática</a:t>
+            </a:r>
+            <a:r>
+              <a:rPr sz="2400" b="1" dirty="0">
+                <a:solidFill>
+                  <a:srgbClr val="000000"/>
+                </a:solidFill>
+                <a:latin typeface="Times New Roman" panose="02020603050405020304" pitchFamily="18" charset="0"/>
+                <a:cs typeface="Times New Roman" panose="02020603050405020304" pitchFamily="18" charset="0"/>
+              </a:rPr>
+              <a:t>: </a:t>
+            </a:r>
+            <a:r>
+              <a:rPr sz="2400" b="1" dirty="0" err="1">
+                <a:solidFill>
+                  <a:srgbClr val="000000"/>
+                </a:solidFill>
+                <a:latin typeface="Times New Roman" panose="02020603050405020304" pitchFamily="18" charset="0"/>
+                <a:cs typeface="Times New Roman" panose="02020603050405020304" pitchFamily="18" charset="0"/>
+              </a:rPr>
+              <a:t>recebendo</a:t>
+            </a:r>
+            <a:r>
+              <a:rPr sz="2400" b="1" dirty="0">
+                <a:solidFill>
+                  <a:srgbClr val="000000"/>
+                </a:solidFill>
+                <a:latin typeface="Times New Roman" panose="02020603050405020304" pitchFamily="18" charset="0"/>
+                <a:cs typeface="Times New Roman" panose="02020603050405020304" pitchFamily="18" charset="0"/>
+              </a:rPr>
+              <a:t> com .then()</a:t>
             </a:r>
           </a:p>
         </p:txBody>
@@ -42232,16 +43810,92 @@
               </a:defRPr>
             </a:pPr>
             <a:r>
-              <a:rPr sz="1725" b="0">
-                <a:solidFill>
-                  <a:srgbClr val="272525"/>
-                </a:solidFill>
-                <a:latin typeface="Inter"/>
-                <a:ea typeface="Inter"/>
-                <a:cs typeface="Inter"/>
+              <a:rPr sz="1725" b="0" dirty="0">
+                <a:solidFill>
+                  <a:srgbClr val="272525"/>
+                </a:solidFill>
+                <a:latin typeface="Times New Roman" panose="02020603050405020304" pitchFamily="18" charset="0"/>
+                <a:cs typeface="Times New Roman" panose="02020603050405020304" pitchFamily="18" charset="0"/>
               </a:rPr>
-              <a:t>Response = tipo do parâmetro     response = nome da variável</a:t>
-            </a:r>
+              <a:t>Response = </a:t>
+            </a:r>
+            <a:r>
+              <a:rPr sz="1725" b="0" dirty="0" err="1">
+                <a:solidFill>
+                  <a:srgbClr val="272525"/>
+                </a:solidFill>
+                <a:latin typeface="Times New Roman" panose="02020603050405020304" pitchFamily="18" charset="0"/>
+                <a:cs typeface="Times New Roman" panose="02020603050405020304" pitchFamily="18" charset="0"/>
+              </a:rPr>
+              <a:t>tipo</a:t>
+            </a:r>
+            <a:r>
+              <a:rPr sz="1725" b="0" dirty="0">
+                <a:solidFill>
+                  <a:srgbClr val="272525"/>
+                </a:solidFill>
+                <a:latin typeface="Times New Roman" panose="02020603050405020304" pitchFamily="18" charset="0"/>
+                <a:cs typeface="Times New Roman" panose="02020603050405020304" pitchFamily="18" charset="0"/>
+              </a:rPr>
+              <a:t> do </a:t>
+            </a:r>
+            <a:r>
+              <a:rPr sz="1725" b="0" dirty="0" err="1">
+                <a:solidFill>
+                  <a:srgbClr val="272525"/>
+                </a:solidFill>
+                <a:latin typeface="Times New Roman" panose="02020603050405020304" pitchFamily="18" charset="0"/>
+                <a:cs typeface="Times New Roman" panose="02020603050405020304" pitchFamily="18" charset="0"/>
+              </a:rPr>
+              <a:t>parâmetro</a:t>
+            </a:r>
+            <a:r>
+              <a:rPr sz="1725" b="0" dirty="0">
+                <a:solidFill>
+                  <a:srgbClr val="272525"/>
+                </a:solidFill>
+                <a:latin typeface="Times New Roman" panose="02020603050405020304" pitchFamily="18" charset="0"/>
+                <a:cs typeface="Times New Roman" panose="02020603050405020304" pitchFamily="18" charset="0"/>
+              </a:rPr>
+              <a:t>     response = </a:t>
+            </a:r>
+            <a:r>
+              <a:rPr sz="1725" b="0" dirty="0" err="1">
+                <a:solidFill>
+                  <a:srgbClr val="272525"/>
+                </a:solidFill>
+                <a:latin typeface="Times New Roman" panose="02020603050405020304" pitchFamily="18" charset="0"/>
+                <a:cs typeface="Times New Roman" panose="02020603050405020304" pitchFamily="18" charset="0"/>
+              </a:rPr>
+              <a:t>nome</a:t>
+            </a:r>
+            <a:r>
+              <a:rPr sz="1725" b="0" dirty="0">
+                <a:solidFill>
+                  <a:srgbClr val="272525"/>
+                </a:solidFill>
+                <a:latin typeface="Times New Roman" panose="02020603050405020304" pitchFamily="18" charset="0"/>
+                <a:cs typeface="Times New Roman" panose="02020603050405020304" pitchFamily="18" charset="0"/>
+              </a:rPr>
+              <a:t> da </a:t>
+            </a:r>
+            <a:r>
+              <a:rPr sz="1725" b="0" dirty="0" err="1">
+                <a:solidFill>
+                  <a:srgbClr val="272525"/>
+                </a:solidFill>
+                <a:latin typeface="Times New Roman" panose="02020603050405020304" pitchFamily="18" charset="0"/>
+                <a:cs typeface="Times New Roman" panose="02020603050405020304" pitchFamily="18" charset="0"/>
+              </a:rPr>
+              <a:t>variável</a:t>
+            </a:r>
+            <a:endParaRPr sz="1725" b="0" dirty="0">
+              <a:solidFill>
+                <a:srgbClr val="272525"/>
+              </a:solidFill>
+              <a:latin typeface="Times New Roman" panose="02020603050405020304" pitchFamily="18" charset="0"/>
+              <a:cs typeface="Times New Roman" panose="02020603050405020304" pitchFamily="18" charset="0"/>
+            </a:endParaRPr>
           </a:p>
         </p:txBody>
       </p:sp>
@@ -42433,9 +44087,8 @@
                 <a:solidFill>
                   <a:srgbClr val="000000"/>
                 </a:solidFill>
-                <a:latin typeface="Inter"/>
-                <a:ea typeface="Inter"/>
-                <a:cs typeface="Inter"/>
+                <a:latin typeface="Times New Roman" panose="02020603050405020304" pitchFamily="18" charset="0"/>
+                <a:cs typeface="Times New Roman" panose="02020603050405020304" pitchFamily="18" charset="0"/>
               </a:rPr>
               <a:t>4. JSON e decode</a:t>
             </a:r>
@@ -42751,9 +44404,8 @@
                 <a:solidFill>
                   <a:srgbClr val="272525"/>
                 </a:solidFill>
-                <a:latin typeface="Inter"/>
-                <a:ea typeface="Inter"/>
-                <a:cs typeface="Inter"/>
+                <a:latin typeface="Times New Roman" panose="02020603050405020304" pitchFamily="18" charset="0"/>
+                <a:cs typeface="Times New Roman" panose="02020603050405020304" pitchFamily="18" charset="0"/>
               </a:rPr>
               <a:t>A API envia texto. O Dart precisa interpretar sua estrutura.</a:t>
             </a:r>
@@ -42796,7 +44448,10 @@
           <a:bodyPr/>
           <a:lstStyle/>
           <a:p>
-            <a:endParaRPr lang="pt-BR"/>
+            <a:endParaRPr lang="pt-BR">
+              <a:latin typeface="Times New Roman" panose="02020603050405020304" pitchFamily="18" charset="0"/>
+              <a:cs typeface="Times New Roman" panose="02020603050405020304" pitchFamily="18" charset="0"/>
+            </a:endParaRPr>
           </a:p>
         </p:txBody>
       </p:sp>
@@ -42950,9 +44605,8 @@
                 <a:solidFill>
                   <a:srgbClr val="043073"/>
                 </a:solidFill>
-                <a:latin typeface="Inter"/>
-                <a:ea typeface="Inter"/>
-                <a:cs typeface="Inter"/>
+                <a:latin typeface="Times New Roman" panose="02020603050405020304" pitchFamily="18" charset="0"/>
+                <a:cs typeface="Times New Roman" panose="02020603050405020304" pitchFamily="18" charset="0"/>
               </a:rPr>
               <a:t>JSON</a:t>
             </a:r>
@@ -43109,9 +44763,8 @@
                 <a:solidFill>
                   <a:srgbClr val="272525"/>
                 </a:solidFill>
-                <a:latin typeface="Inter"/>
-                <a:ea typeface="Inter"/>
-                <a:cs typeface="Inter"/>
+                <a:latin typeface="Times New Roman" panose="02020603050405020304" pitchFamily="18" charset="0"/>
+                <a:cs typeface="Times New Roman" panose="02020603050405020304" pitchFamily="18" charset="0"/>
               </a:rPr>
               <a:t>Formato do texto recebido.</a:t>
             </a:r>
@@ -43121,9 +44774,8 @@
               <a:solidFill>
                 <a:srgbClr val="272525"/>
               </a:solidFill>
-              <a:latin typeface="Inter"/>
-              <a:ea typeface="Inter"/>
-              <a:cs typeface="Inter"/>
+              <a:latin typeface="Times New Roman" panose="02020603050405020304" pitchFamily="18" charset="0"/>
+              <a:cs typeface="Times New Roman" panose="02020603050405020304" pitchFamily="18" charset="0"/>
             </a:endParaRPr>
           </a:p>
           <a:p>
@@ -43142,9 +44794,8 @@
                 <a:solidFill>
                   <a:srgbClr val="272525"/>
                 </a:solidFill>
-                <a:latin typeface="Inter"/>
-                <a:ea typeface="Inter"/>
-                <a:cs typeface="Inter"/>
+                <a:latin typeface="Times New Roman" panose="02020603050405020304" pitchFamily="18" charset="0"/>
+                <a:cs typeface="Times New Roman" panose="02020603050405020304" pitchFamily="18" charset="0"/>
               </a:rPr>
               <a:t>{"titulo": "Interestelar"}</a:t>
             </a:r>
@@ -43187,7 +44838,10 @@
           <a:bodyPr/>
           <a:lstStyle/>
           <a:p>
-            <a:endParaRPr lang="pt-BR"/>
+            <a:endParaRPr lang="pt-BR">
+              <a:latin typeface="Times New Roman" panose="02020603050405020304" pitchFamily="18" charset="0"/>
+              <a:cs typeface="Times New Roman" panose="02020603050405020304" pitchFamily="18" charset="0"/>
+            </a:endParaRPr>
           </a:p>
         </p:txBody>
       </p:sp>
@@ -43341,9 +44995,8 @@
                 <a:solidFill>
                   <a:srgbClr val="043073"/>
                 </a:solidFill>
-                <a:latin typeface="Inter"/>
-                <a:ea typeface="Inter"/>
-                <a:cs typeface="Inter"/>
+                <a:latin typeface="Times New Roman" panose="02020603050405020304" pitchFamily="18" charset="0"/>
+                <a:cs typeface="Times New Roman" panose="02020603050405020304" pitchFamily="18" charset="0"/>
               </a:rPr>
               <a:t>json.decode()</a:t>
             </a:r>
@@ -43500,9 +45153,8 @@
                 <a:solidFill>
                   <a:srgbClr val="272525"/>
                 </a:solidFill>
-                <a:latin typeface="Inter"/>
-                <a:ea typeface="Inter"/>
-                <a:cs typeface="Inter"/>
+                <a:latin typeface="Times New Roman" panose="02020603050405020304" pitchFamily="18" charset="0"/>
+                <a:cs typeface="Times New Roman" panose="02020603050405020304" pitchFamily="18" charset="0"/>
               </a:rPr>
               <a:t>Converte esse texto em objetos Dart.</a:t>
             </a:r>
@@ -43512,9 +45164,8 @@
               <a:solidFill>
                 <a:srgbClr val="272525"/>
               </a:solidFill>
-              <a:latin typeface="Inter"/>
-              <a:ea typeface="Inter"/>
-              <a:cs typeface="Inter"/>
+              <a:latin typeface="Times New Roman" panose="02020603050405020304" pitchFamily="18" charset="0"/>
+              <a:cs typeface="Times New Roman" panose="02020603050405020304" pitchFamily="18" charset="0"/>
             </a:endParaRPr>
           </a:p>
           <a:p>
@@ -43533,9 +45184,8 @@
                 <a:solidFill>
                   <a:srgbClr val="272525"/>
                 </a:solidFill>
-                <a:latin typeface="Inter"/>
-                <a:ea typeface="Inter"/>
-                <a:cs typeface="Inter"/>
+                <a:latin typeface="Times New Roman" panose="02020603050405020304" pitchFamily="18" charset="0"/>
+                <a:cs typeface="Times New Roman" panose="02020603050405020304" pitchFamily="18" charset="0"/>
               </a:rPr>
               <a:t>Podemos acessar as informações.</a:t>
             </a:r>
@@ -43578,7 +45228,10 @@
           <a:bodyPr/>
           <a:lstStyle/>
           <a:p>
-            <a:endParaRPr lang="pt-BR"/>
+            <a:endParaRPr lang="pt-BR">
+              <a:latin typeface="Times New Roman" panose="02020603050405020304" pitchFamily="18" charset="0"/>
+              <a:cs typeface="Times New Roman" panose="02020603050405020304" pitchFamily="18" charset="0"/>
+            </a:endParaRPr>
           </a:p>
         </p:txBody>
       </p:sp>
@@ -43732,9 +45385,8 @@
                 <a:solidFill>
                   <a:srgbClr val="272525"/>
                 </a:solidFill>
-                <a:latin typeface="Inter"/>
-                <a:ea typeface="Inter"/>
-                <a:cs typeface="Inter"/>
+                <a:latin typeface="Times New Roman" panose="02020603050405020304" pitchFamily="18" charset="0"/>
+                <a:cs typeface="Times New Roman" panose="02020603050405020304" pitchFamily="18" charset="0"/>
               </a:rPr>
               <a:t>A conversão depende da estrutura recebida: [...] lista, {...} mapa.</a:t>
             </a:r>
